--- a/docs/test/golden-outputs/p1-dangsan-r2/p1_dangsan_income_r2_basic.pptx
+++ b/docs/test/golden-outputs/p1-dangsan-r2/p1_dangsan_income_r2_basic.pptx
@@ -2199,7 +2199,7 @@
                 <a:ea typeface="맑은 고딕" pitchFamily="34" charset="-122"/>
                 <a:cs typeface="맑은 고딕" pitchFamily="34" charset="-120"/>
               </a:rPr>
-              <a:t>2026.09.22  |  정현우 수석팀장  |  제이에스부동산중개법인</a:t>
+              <a:t>2026.09.23  |  정현우 수석팀장  |  제이에스부동산중개법인</a:t>
             </a:r>
             <a:endParaRPr lang="en-US" sz="900" dirty="0"/>
           </a:p>

--- a/docs/test/golden-outputs/p1-dangsan-r2/p1_dangsan_income_r2_basic.pptx
+++ b/docs/test/golden-outputs/p1-dangsan-r2/p1_dangsan_income_r2_basic.pptx
@@ -2199,7 +2199,7 @@
                 <a:ea typeface="맑은 고딕" pitchFamily="34" charset="-122"/>
                 <a:cs typeface="맑은 고딕" pitchFamily="34" charset="-120"/>
               </a:rPr>
-              <a:t>2026.09.23  |  정현우 수석팀장  |  제이에스부동산중개법인</a:t>
+              <a:t>2026.09.24  |  정현우 수석팀장  |  제이에스부동산중개법인</a:t>
             </a:r>
             <a:endParaRPr lang="en-US" sz="900" dirty="0"/>
           </a:p>
@@ -9003,8 +9003,7 @@
                 <a:gridCol w="749808"/>
                 <a:gridCol w="658368"/>
                 <a:gridCol w="658368"/>
-                <a:gridCol w="658368"/>
-                <a:gridCol w="502920"/>
+                <a:gridCol w="1161288"/>
               </a:tblGrid>
               <a:tr h="320040">
                 <a:tc>
@@ -9388,67 +9387,6 @@
                           </a:solidFill>
                         </a:rPr>
                         <a:t>월세(만원)</a:t>
-                      </a:r>
-                      <a:endParaRPr lang="en-US" sz="1000" dirty="0"/>
-                    </a:p>
-                  </a:txBody>
-                  <a:tcPr marL="91440" marR="91440" marT="45720" marB="45720" anchor="ctr">
-                    <a:lnL w="12700" cap="flat" cmpd="sng" algn="ctr">
-                      <a:solidFill>
-                        <a:srgbClr val="CBD5E0"/>
-                      </a:solidFill>
-                      <a:prstDash val="solid"/>
-                      <a:round/>
-                      <a:headEnd type="none" w="med" len="med"/>
-                      <a:tailEnd type="none" w="med" len="med"/>
-                    </a:lnL>
-                    <a:lnR w="12700" cap="flat" cmpd="sng" algn="ctr">
-                      <a:solidFill>
-                        <a:srgbClr val="CBD5E0"/>
-                      </a:solidFill>
-                      <a:prstDash val="solid"/>
-                      <a:round/>
-                      <a:headEnd type="none" w="med" len="med"/>
-                      <a:tailEnd type="none" w="med" len="med"/>
-                    </a:lnR>
-                    <a:lnT w="12700" cap="flat" cmpd="sng" algn="ctr">
-                      <a:solidFill>
-                        <a:srgbClr val="CBD5E0"/>
-                      </a:solidFill>
-                      <a:prstDash val="solid"/>
-                      <a:round/>
-                      <a:headEnd type="none" w="med" len="med"/>
-                      <a:tailEnd type="none" w="med" len="med"/>
-                    </a:lnT>
-                    <a:lnB w="12700" cap="flat" cmpd="sng" algn="ctr">
-                      <a:solidFill>
-                        <a:srgbClr val="CBD5E0"/>
-                      </a:solidFill>
-                      <a:prstDash val="solid"/>
-                      <a:round/>
-                      <a:headEnd type="none" w="med" len="med"/>
-                      <a:tailEnd type="none" w="med" len="med"/>
-                    </a:lnB>
-                    <a:solidFill>
-                      <a:srgbClr val="132A3A"/>
-                    </a:solidFill>
-                  </a:tcPr>
-                </a:tc>
-                <a:tc>
-                  <a:txBody>
-                    <a:bodyPr/>
-                    <a:lstStyle/>
-                    <a:p>
-                      <a:pPr algn="ctr" indent="0" marL="0">
-                        <a:buNone/>
-                      </a:pPr>
-                      <a:r>
-                        <a:rPr lang="en-US" sz="1000" b="1" dirty="0">
-                          <a:solidFill>
-                            <a:srgbClr val="FFFFFF"/>
-                          </a:solidFill>
-                        </a:rPr>
-                        <a:t>관리비(만원)</a:t>
                       </a:r>
                       <a:endParaRPr lang="en-US" sz="1000" dirty="0"/>
                     </a:p>
@@ -10180,7 +10118,7 @@
                           <a:ea typeface="맑은 고딕" pitchFamily="34" charset="-122"/>
                           <a:cs typeface="맑은 고딕" pitchFamily="34" charset="-120"/>
                         </a:rPr>
-                        <a:t>-</a:t>
+                        <a:t>자가사용</a:t>
                       </a:r>
                       <a:endParaRPr lang="en-US" sz="850" dirty="0">
                         <a:latin typeface="맑은 고딕" charset="0"/>
@@ -10239,17 +10177,6 @@
                       <a:pPr algn="ctr" indent="0" marL="0">
                         <a:buNone/>
                       </a:pPr>
-                      <a:r>
-                        <a:rPr lang="en-US" sz="850" dirty="0">
-                          <a:solidFill>
-                            <a:srgbClr val="5B6B73"/>
-                          </a:solidFill>
-                          <a:latin typeface="맑은 고딕" pitchFamily="34" charset="0"/>
-                          <a:ea typeface="맑은 고딕" pitchFamily="34" charset="-122"/>
-                          <a:cs typeface="맑은 고딕" pitchFamily="34" charset="-120"/>
-                        </a:rPr>
-                        <a:t>자가사용</a:t>
-                      </a:r>
                       <a:endParaRPr lang="en-US" sz="850" dirty="0">
                         <a:latin typeface="맑은 고딕" charset="0"/>
                         <a:ea typeface="맑은 고딕" charset="0"/>
@@ -10794,74 +10721,6 @@
                           <a:ea typeface="맑은 고딕" pitchFamily="34" charset="-122"/>
                           <a:cs typeface="맑은 고딕" pitchFamily="34" charset="-120"/>
                         </a:rPr>
-                        <a:t>-</a:t>
-                      </a:r>
-                      <a:endParaRPr lang="en-US" sz="850" dirty="0">
-                        <a:latin typeface="맑은 고딕" charset="0"/>
-                        <a:ea typeface="맑은 고딕" charset="0"/>
-                        <a:cs typeface="맑은 고딕" charset="0"/>
-                      </a:endParaRPr>
-                    </a:p>
-                  </a:txBody>
-                  <a:tcPr marL="91440" marR="91440" marT="45720" marB="45720" anchor="ctr">
-                    <a:lnL w="12700" cap="flat" cmpd="sng" algn="ctr">
-                      <a:solidFill>
-                        <a:srgbClr val="CBD5E0"/>
-                      </a:solidFill>
-                      <a:prstDash val="solid"/>
-                      <a:round/>
-                      <a:headEnd type="none" w="med" len="med"/>
-                      <a:tailEnd type="none" w="med" len="med"/>
-                    </a:lnL>
-                    <a:lnR w="12700" cap="flat" cmpd="sng" algn="ctr">
-                      <a:solidFill>
-                        <a:srgbClr val="CBD5E0"/>
-                      </a:solidFill>
-                      <a:prstDash val="solid"/>
-                      <a:round/>
-                      <a:headEnd type="none" w="med" len="med"/>
-                      <a:tailEnd type="none" w="med" len="med"/>
-                    </a:lnR>
-                    <a:lnT w="12700" cap="flat" cmpd="sng" algn="ctr">
-                      <a:solidFill>
-                        <a:srgbClr val="CBD5E0"/>
-                      </a:solidFill>
-                      <a:prstDash val="solid"/>
-                      <a:round/>
-                      <a:headEnd type="none" w="med" len="med"/>
-                      <a:tailEnd type="none" w="med" len="med"/>
-                    </a:lnT>
-                    <a:lnB w="12700" cap="flat" cmpd="sng" algn="ctr">
-                      <a:solidFill>
-                        <a:srgbClr val="CBD5E0"/>
-                      </a:solidFill>
-                      <a:prstDash val="solid"/>
-                      <a:round/>
-                      <a:headEnd type="none" w="med" len="med"/>
-                      <a:tailEnd type="none" w="med" len="med"/>
-                    </a:lnB>
-                    <a:solidFill>
-                      <a:srgbClr val="F3F6F7"/>
-                    </a:solidFill>
-                  </a:tcPr>
-                </a:tc>
-                <a:tc>
-                  <a:txBody>
-                    <a:bodyPr/>
-                    <a:lstStyle/>
-                    <a:p>
-                      <a:pPr algn="ctr" indent="0" marL="0">
-                        <a:buNone/>
-                      </a:pPr>
-                      <a:r>
-                        <a:rPr lang="en-US" sz="850" dirty="0">
-                          <a:solidFill>
-                            <a:srgbClr val="2B2B2B"/>
-                          </a:solidFill>
-                          <a:latin typeface="맑은 고딕" pitchFamily="34" charset="0"/>
-                          <a:ea typeface="맑은 고딕" pitchFamily="34" charset="-122"/>
-                          <a:cs typeface="맑은 고딕" pitchFamily="34" charset="-120"/>
-                        </a:rPr>
                         <a:t>2026-08-31</a:t>
                       </a:r>
                       <a:endParaRPr lang="en-US" sz="850" dirty="0">
@@ -10932,6 +10791,63 @@
                         </a:rPr>
                         <a:t>임대 11년 경과</a:t>
                       </a:r>
+                      <a:endParaRPr lang="en-US" sz="850" dirty="0">
+                        <a:latin typeface="맑은 고딕" charset="0"/>
+                        <a:ea typeface="맑은 고딕" charset="0"/>
+                        <a:cs typeface="맑은 고딕" charset="0"/>
+                      </a:endParaRPr>
+                    </a:p>
+                  </a:txBody>
+                  <a:tcPr marL="91440" marR="91440" marT="45720" marB="45720" anchor="ctr">
+                    <a:lnL w="12700" cap="flat" cmpd="sng" algn="ctr">
+                      <a:solidFill>
+                        <a:srgbClr val="CBD5E0"/>
+                      </a:solidFill>
+                      <a:prstDash val="solid"/>
+                      <a:round/>
+                      <a:headEnd type="none" w="med" len="med"/>
+                      <a:tailEnd type="none" w="med" len="med"/>
+                    </a:lnL>
+                    <a:lnR w="12700" cap="flat" cmpd="sng" algn="ctr">
+                      <a:solidFill>
+                        <a:srgbClr val="CBD5E0"/>
+                      </a:solidFill>
+                      <a:prstDash val="solid"/>
+                      <a:round/>
+                      <a:headEnd type="none" w="med" len="med"/>
+                      <a:tailEnd type="none" w="med" len="med"/>
+                    </a:lnR>
+                    <a:lnT w="12700" cap="flat" cmpd="sng" algn="ctr">
+                      <a:solidFill>
+                        <a:srgbClr val="CBD5E0"/>
+                      </a:solidFill>
+                      <a:prstDash val="solid"/>
+                      <a:round/>
+                      <a:headEnd type="none" w="med" len="med"/>
+                      <a:tailEnd type="none" w="med" len="med"/>
+                    </a:lnT>
+                    <a:lnB w="12700" cap="flat" cmpd="sng" algn="ctr">
+                      <a:solidFill>
+                        <a:srgbClr val="CBD5E0"/>
+                      </a:solidFill>
+                      <a:prstDash val="solid"/>
+                      <a:round/>
+                      <a:headEnd type="none" w="med" len="med"/>
+                      <a:tailEnd type="none" w="med" len="med"/>
+                    </a:lnB>
+                    <a:solidFill>
+                      <a:srgbClr val="F3F6F7"/>
+                    </a:solidFill>
+                  </a:tcPr>
+                </a:tc>
+                <a:tc>
+                  <a:txBody>
+                    <a:bodyPr/>
+                    <a:lstStyle/>
+                    <a:p>
+                      <a:pPr algn="ctr" indent="0" marL="0">
+                        <a:buNone/>
+                      </a:pPr>
                       <a:endParaRPr lang="en-US" sz="850" dirty="0">
                         <a:latin typeface="맑은 고딕" charset="0"/>
                         <a:ea typeface="맑은 고딕" charset="0"/>
@@ -11476,74 +11392,6 @@
                           <a:ea typeface="맑은 고딕" pitchFamily="34" charset="-122"/>
                           <a:cs typeface="맑은 고딕" pitchFamily="34" charset="-120"/>
                         </a:rPr>
-                        <a:t>-</a:t>
-                      </a:r>
-                      <a:endParaRPr lang="en-US" sz="850" dirty="0">
-                        <a:latin typeface="맑은 고딕" charset="0"/>
-                        <a:ea typeface="맑은 고딕" charset="0"/>
-                        <a:cs typeface="맑은 고딕" charset="0"/>
-                      </a:endParaRPr>
-                    </a:p>
-                  </a:txBody>
-                  <a:tcPr marL="91440" marR="91440" marT="45720" marB="45720" anchor="ctr">
-                    <a:lnL w="12700" cap="flat" cmpd="sng" algn="ctr">
-                      <a:solidFill>
-                        <a:srgbClr val="CBD5E0"/>
-                      </a:solidFill>
-                      <a:prstDash val="solid"/>
-                      <a:round/>
-                      <a:headEnd type="none" w="med" len="med"/>
-                      <a:tailEnd type="none" w="med" len="med"/>
-                    </a:lnL>
-                    <a:lnR w="12700" cap="flat" cmpd="sng" algn="ctr">
-                      <a:solidFill>
-                        <a:srgbClr val="CBD5E0"/>
-                      </a:solidFill>
-                      <a:prstDash val="solid"/>
-                      <a:round/>
-                      <a:headEnd type="none" w="med" len="med"/>
-                      <a:tailEnd type="none" w="med" len="med"/>
-                    </a:lnR>
-                    <a:lnT w="12700" cap="flat" cmpd="sng" algn="ctr">
-                      <a:solidFill>
-                        <a:srgbClr val="CBD5E0"/>
-                      </a:solidFill>
-                      <a:prstDash val="solid"/>
-                      <a:round/>
-                      <a:headEnd type="none" w="med" len="med"/>
-                      <a:tailEnd type="none" w="med" len="med"/>
-                    </a:lnT>
-                    <a:lnB w="12700" cap="flat" cmpd="sng" algn="ctr">
-                      <a:solidFill>
-                        <a:srgbClr val="CBD5E0"/>
-                      </a:solidFill>
-                      <a:prstDash val="solid"/>
-                      <a:round/>
-                      <a:headEnd type="none" w="med" len="med"/>
-                      <a:tailEnd type="none" w="med" len="med"/>
-                    </a:lnB>
-                    <a:solidFill>
-                      <a:srgbClr val="FFFFFF"/>
-                    </a:solidFill>
-                  </a:tcPr>
-                </a:tc>
-                <a:tc>
-                  <a:txBody>
-                    <a:bodyPr/>
-                    <a:lstStyle/>
-                    <a:p>
-                      <a:pPr algn="ctr" indent="0" marL="0">
-                        <a:buNone/>
-                      </a:pPr>
-                      <a:r>
-                        <a:rPr lang="en-US" sz="850" dirty="0">
-                          <a:solidFill>
-                            <a:srgbClr val="2B2B2B"/>
-                          </a:solidFill>
-                          <a:latin typeface="맑은 고딕" pitchFamily="34" charset="0"/>
-                          <a:ea typeface="맑은 고딕" pitchFamily="34" charset="-122"/>
-                          <a:cs typeface="맑은 고딕" pitchFamily="34" charset="-120"/>
-                        </a:rPr>
                         <a:t>2026-08-31</a:t>
                       </a:r>
                       <a:endParaRPr lang="en-US" sz="850" dirty="0">
@@ -11614,6 +11462,63 @@
                         </a:rPr>
                         <a:t>로뎀나무내과 통합계약</a:t>
                       </a:r>
+                      <a:endParaRPr lang="en-US" sz="850" dirty="0">
+                        <a:latin typeface="맑은 고딕" charset="0"/>
+                        <a:ea typeface="맑은 고딕" charset="0"/>
+                        <a:cs typeface="맑은 고딕" charset="0"/>
+                      </a:endParaRPr>
+                    </a:p>
+                  </a:txBody>
+                  <a:tcPr marL="91440" marR="91440" marT="45720" marB="45720" anchor="ctr">
+                    <a:lnL w="12700" cap="flat" cmpd="sng" algn="ctr">
+                      <a:solidFill>
+                        <a:srgbClr val="CBD5E0"/>
+                      </a:solidFill>
+                      <a:prstDash val="solid"/>
+                      <a:round/>
+                      <a:headEnd type="none" w="med" len="med"/>
+                      <a:tailEnd type="none" w="med" len="med"/>
+                    </a:lnL>
+                    <a:lnR w="12700" cap="flat" cmpd="sng" algn="ctr">
+                      <a:solidFill>
+                        <a:srgbClr val="CBD5E0"/>
+                      </a:solidFill>
+                      <a:prstDash val="solid"/>
+                      <a:round/>
+                      <a:headEnd type="none" w="med" len="med"/>
+                      <a:tailEnd type="none" w="med" len="med"/>
+                    </a:lnR>
+                    <a:lnT w="12700" cap="flat" cmpd="sng" algn="ctr">
+                      <a:solidFill>
+                        <a:srgbClr val="CBD5E0"/>
+                      </a:solidFill>
+                      <a:prstDash val="solid"/>
+                      <a:round/>
+                      <a:headEnd type="none" w="med" len="med"/>
+                      <a:tailEnd type="none" w="med" len="med"/>
+                    </a:lnT>
+                    <a:lnB w="12700" cap="flat" cmpd="sng" algn="ctr">
+                      <a:solidFill>
+                        <a:srgbClr val="CBD5E0"/>
+                      </a:solidFill>
+                      <a:prstDash val="solid"/>
+                      <a:round/>
+                      <a:headEnd type="none" w="med" len="med"/>
+                      <a:tailEnd type="none" w="med" len="med"/>
+                    </a:lnB>
+                    <a:solidFill>
+                      <a:srgbClr val="FFFFFF"/>
+                    </a:solidFill>
+                  </a:tcPr>
+                </a:tc>
+                <a:tc>
+                  <a:txBody>
+                    <a:bodyPr/>
+                    <a:lstStyle/>
+                    <a:p>
+                      <a:pPr algn="ctr" indent="0" marL="0">
+                        <a:buNone/>
+                      </a:pPr>
                       <a:endParaRPr lang="en-US" sz="850" dirty="0">
                         <a:latin typeface="맑은 고딕" charset="0"/>
                         <a:ea typeface="맑은 고딕" charset="0"/>
@@ -12158,74 +12063,6 @@
                           <a:ea typeface="맑은 고딕" pitchFamily="34" charset="-122"/>
                           <a:cs typeface="맑은 고딕" pitchFamily="34" charset="-120"/>
                         </a:rPr>
-                        <a:t>-</a:t>
-                      </a:r>
-                      <a:endParaRPr lang="en-US" sz="850" dirty="0">
-                        <a:latin typeface="맑은 고딕" charset="0"/>
-                        <a:ea typeface="맑은 고딕" charset="0"/>
-                        <a:cs typeface="맑은 고딕" charset="0"/>
-                      </a:endParaRPr>
-                    </a:p>
-                  </a:txBody>
-                  <a:tcPr marL="91440" marR="91440" marT="45720" marB="45720" anchor="ctr">
-                    <a:lnL w="12700" cap="flat" cmpd="sng" algn="ctr">
-                      <a:solidFill>
-                        <a:srgbClr val="CBD5E0"/>
-                      </a:solidFill>
-                      <a:prstDash val="solid"/>
-                      <a:round/>
-                      <a:headEnd type="none" w="med" len="med"/>
-                      <a:tailEnd type="none" w="med" len="med"/>
-                    </a:lnL>
-                    <a:lnR w="12700" cap="flat" cmpd="sng" algn="ctr">
-                      <a:solidFill>
-                        <a:srgbClr val="CBD5E0"/>
-                      </a:solidFill>
-                      <a:prstDash val="solid"/>
-                      <a:round/>
-                      <a:headEnd type="none" w="med" len="med"/>
-                      <a:tailEnd type="none" w="med" len="med"/>
-                    </a:lnR>
-                    <a:lnT w="12700" cap="flat" cmpd="sng" algn="ctr">
-                      <a:solidFill>
-                        <a:srgbClr val="CBD5E0"/>
-                      </a:solidFill>
-                      <a:prstDash val="solid"/>
-                      <a:round/>
-                      <a:headEnd type="none" w="med" len="med"/>
-                      <a:tailEnd type="none" w="med" len="med"/>
-                    </a:lnT>
-                    <a:lnB w="12700" cap="flat" cmpd="sng" algn="ctr">
-                      <a:solidFill>
-                        <a:srgbClr val="CBD5E0"/>
-                      </a:solidFill>
-                      <a:prstDash val="solid"/>
-                      <a:round/>
-                      <a:headEnd type="none" w="med" len="med"/>
-                      <a:tailEnd type="none" w="med" len="med"/>
-                    </a:lnB>
-                    <a:solidFill>
-                      <a:srgbClr val="F3F6F7"/>
-                    </a:solidFill>
-                  </a:tcPr>
-                </a:tc>
-                <a:tc>
-                  <a:txBody>
-                    <a:bodyPr/>
-                    <a:lstStyle/>
-                    <a:p>
-                      <a:pPr algn="ctr" indent="0" marL="0">
-                        <a:buNone/>
-                      </a:pPr>
-                      <a:r>
-                        <a:rPr lang="en-US" sz="850" dirty="0">
-                          <a:solidFill>
-                            <a:srgbClr val="2B2B2B"/>
-                          </a:solidFill>
-                          <a:latin typeface="맑은 고딕" pitchFamily="34" charset="0"/>
-                          <a:ea typeface="맑은 고딕" pitchFamily="34" charset="-122"/>
-                          <a:cs typeface="맑은 고딕" pitchFamily="34" charset="-120"/>
-                        </a:rPr>
                         <a:t>2026-08-31</a:t>
                       </a:r>
                       <a:endParaRPr lang="en-US" sz="850" dirty="0">
@@ -12296,6 +12133,63 @@
                         </a:rPr>
                         <a:t>로뎀나무내과 통합계약</a:t>
                       </a:r>
+                      <a:endParaRPr lang="en-US" sz="850" dirty="0">
+                        <a:latin typeface="맑은 고딕" charset="0"/>
+                        <a:ea typeface="맑은 고딕" charset="0"/>
+                        <a:cs typeface="맑은 고딕" charset="0"/>
+                      </a:endParaRPr>
+                    </a:p>
+                  </a:txBody>
+                  <a:tcPr marL="91440" marR="91440" marT="45720" marB="45720" anchor="ctr">
+                    <a:lnL w="12700" cap="flat" cmpd="sng" algn="ctr">
+                      <a:solidFill>
+                        <a:srgbClr val="CBD5E0"/>
+                      </a:solidFill>
+                      <a:prstDash val="solid"/>
+                      <a:round/>
+                      <a:headEnd type="none" w="med" len="med"/>
+                      <a:tailEnd type="none" w="med" len="med"/>
+                    </a:lnL>
+                    <a:lnR w="12700" cap="flat" cmpd="sng" algn="ctr">
+                      <a:solidFill>
+                        <a:srgbClr val="CBD5E0"/>
+                      </a:solidFill>
+                      <a:prstDash val="solid"/>
+                      <a:round/>
+                      <a:headEnd type="none" w="med" len="med"/>
+                      <a:tailEnd type="none" w="med" len="med"/>
+                    </a:lnR>
+                    <a:lnT w="12700" cap="flat" cmpd="sng" algn="ctr">
+                      <a:solidFill>
+                        <a:srgbClr val="CBD5E0"/>
+                      </a:solidFill>
+                      <a:prstDash val="solid"/>
+                      <a:round/>
+                      <a:headEnd type="none" w="med" len="med"/>
+                      <a:tailEnd type="none" w="med" len="med"/>
+                    </a:lnT>
+                    <a:lnB w="12700" cap="flat" cmpd="sng" algn="ctr">
+                      <a:solidFill>
+                        <a:srgbClr val="CBD5E0"/>
+                      </a:solidFill>
+                      <a:prstDash val="solid"/>
+                      <a:round/>
+                      <a:headEnd type="none" w="med" len="med"/>
+                      <a:tailEnd type="none" w="med" len="med"/>
+                    </a:lnB>
+                    <a:solidFill>
+                      <a:srgbClr val="F3F6F7"/>
+                    </a:solidFill>
+                  </a:tcPr>
+                </a:tc>
+                <a:tc>
+                  <a:txBody>
+                    <a:bodyPr/>
+                    <a:lstStyle/>
+                    <a:p>
+                      <a:pPr algn="ctr" indent="0" marL="0">
+                        <a:buNone/>
+                      </a:pPr>
                       <a:endParaRPr lang="en-US" sz="850" dirty="0">
                         <a:latin typeface="맑은 고딕" charset="0"/>
                         <a:ea typeface="맑은 고딕" charset="0"/>
@@ -12840,7 +12734,7 @@
                           <a:ea typeface="맑은 고딕" pitchFamily="34" charset="-122"/>
                           <a:cs typeface="맑은 고딕" pitchFamily="34" charset="-120"/>
                         </a:rPr>
-                        <a:t>-</a:t>
+                        <a:t>2026-04-17</a:t>
                       </a:r>
                       <a:endParaRPr lang="en-US" sz="850" dirty="0">
                         <a:latin typeface="맑은 고딕" charset="0"/>
@@ -12899,17 +12793,6 @@
                       <a:pPr algn="ctr" indent="0" marL="0">
                         <a:buNone/>
                       </a:pPr>
-                      <a:r>
-                        <a:rPr lang="en-US" sz="850" dirty="0">
-                          <a:solidFill>
-                            <a:srgbClr val="2B2B2B"/>
-                          </a:solidFill>
-                          <a:latin typeface="맑은 고딕" pitchFamily="34" charset="0"/>
-                          <a:ea typeface="맑은 고딕" pitchFamily="34" charset="-122"/>
-                          <a:cs typeface="맑은 고딕" pitchFamily="34" charset="-120"/>
-                        </a:rPr>
-                        <a:t>2026-04-17</a:t>
-                      </a:r>
                       <a:endParaRPr lang="en-US" sz="850" dirty="0">
                         <a:latin typeface="맑은 고딕" charset="0"/>
                         <a:ea typeface="맑은 고딕" charset="0"/>
@@ -13511,7 +13394,7 @@
                           <a:ea typeface="맑은 고딕" pitchFamily="34" charset="-122"/>
                           <a:cs typeface="맑은 고딕" pitchFamily="34" charset="-120"/>
                         </a:rPr>
-                        <a:t>-</a:t>
+                        <a:t>2025-04-30</a:t>
                       </a:r>
                       <a:endParaRPr lang="en-US" sz="850" dirty="0">
                         <a:latin typeface="맑은 고딕" charset="0"/>
@@ -13570,17 +13453,6 @@
                       <a:pPr algn="ctr" indent="0" marL="0">
                         <a:buNone/>
                       </a:pPr>
-                      <a:r>
-                        <a:rPr lang="en-US" sz="850" dirty="0">
-                          <a:solidFill>
-                            <a:srgbClr val="2B2B2B"/>
-                          </a:solidFill>
-                          <a:latin typeface="맑은 고딕" pitchFamily="34" charset="0"/>
-                          <a:ea typeface="맑은 고딕" pitchFamily="34" charset="-122"/>
-                          <a:cs typeface="맑은 고딕" pitchFamily="34" charset="-120"/>
-                        </a:rPr>
-                        <a:t>2025-04-30</a:t>
-                      </a:r>
                       <a:endParaRPr lang="en-US" sz="850" dirty="0">
                         <a:latin typeface="맑은 고딕" charset="0"/>
                         <a:ea typeface="맑은 고딕" charset="0"/>
@@ -14250,7 +14122,7 @@
                           <a:ea typeface="맑은 고딕" pitchFamily="34" charset="-122"/>
                           <a:cs typeface="맑은 고딕" pitchFamily="34" charset="-120"/>
                         </a:rPr>
-                        <a:t>-</a:t>
+                        <a:t>자가사용</a:t>
                       </a:r>
                       <a:endParaRPr lang="en-US" sz="850" dirty="0">
                         <a:latin typeface="맑은 고딕" charset="0"/>
@@ -14309,17 +14181,6 @@
                       <a:pPr algn="ctr" indent="0" marL="0">
                         <a:buNone/>
                       </a:pPr>
-                      <a:r>
-                        <a:rPr lang="en-US" sz="850" dirty="0">
-                          <a:solidFill>
-                            <a:srgbClr val="5B6B73"/>
-                          </a:solidFill>
-                          <a:latin typeface="맑은 고딕" pitchFamily="34" charset="0"/>
-                          <a:ea typeface="맑은 고딕" pitchFamily="34" charset="-122"/>
-                          <a:cs typeface="맑은 고딕" pitchFamily="34" charset="-120"/>
-                        </a:rPr>
-                        <a:t>자가사용</a:t>
-                      </a:r>
                       <a:endParaRPr lang="en-US" sz="850" dirty="0">
                         <a:latin typeface="맑은 고딕" charset="0"/>
                         <a:ea typeface="맑은 고딕" charset="0"/>
@@ -14864,74 +14725,6 @@
                           <a:ea typeface="맑은 고딕" pitchFamily="34" charset="-122"/>
                           <a:cs typeface="맑은 고딕" pitchFamily="34" charset="-120"/>
                         </a:rPr>
-                        <a:t>-</a:t>
-                      </a:r>
-                      <a:endParaRPr lang="en-US" sz="850" dirty="0">
-                        <a:latin typeface="맑은 고딕" charset="0"/>
-                        <a:ea typeface="맑은 고딕" charset="0"/>
-                        <a:cs typeface="맑은 고딕" charset="0"/>
-                      </a:endParaRPr>
-                    </a:p>
-                  </a:txBody>
-                  <a:tcPr marL="91440" marR="91440" marT="45720" marB="45720" anchor="ctr">
-                    <a:lnL w="12700" cap="flat" cmpd="sng" algn="ctr">
-                      <a:solidFill>
-                        <a:srgbClr val="CBD5E0"/>
-                      </a:solidFill>
-                      <a:prstDash val="solid"/>
-                      <a:round/>
-                      <a:headEnd type="none" w="med" len="med"/>
-                      <a:tailEnd type="none" w="med" len="med"/>
-                    </a:lnL>
-                    <a:lnR w="12700" cap="flat" cmpd="sng" algn="ctr">
-                      <a:solidFill>
-                        <a:srgbClr val="CBD5E0"/>
-                      </a:solidFill>
-                      <a:prstDash val="solid"/>
-                      <a:round/>
-                      <a:headEnd type="none" w="med" len="med"/>
-                      <a:tailEnd type="none" w="med" len="med"/>
-                    </a:lnR>
-                    <a:lnT w="12700" cap="flat" cmpd="sng" algn="ctr">
-                      <a:solidFill>
-                        <a:srgbClr val="CBD5E0"/>
-                      </a:solidFill>
-                      <a:prstDash val="solid"/>
-                      <a:round/>
-                      <a:headEnd type="none" w="med" len="med"/>
-                      <a:tailEnd type="none" w="med" len="med"/>
-                    </a:lnT>
-                    <a:lnB w="12700" cap="flat" cmpd="sng" algn="ctr">
-                      <a:solidFill>
-                        <a:srgbClr val="CBD5E0"/>
-                      </a:solidFill>
-                      <a:prstDash val="solid"/>
-                      <a:round/>
-                      <a:headEnd type="none" w="med" len="med"/>
-                      <a:tailEnd type="none" w="med" len="med"/>
-                    </a:lnB>
-                    <a:solidFill>
-                      <a:srgbClr val="F3F6F7"/>
-                    </a:solidFill>
-                  </a:tcPr>
-                </a:tc>
-                <a:tc>
-                  <a:txBody>
-                    <a:bodyPr/>
-                    <a:lstStyle/>
-                    <a:p>
-                      <a:pPr algn="ctr" indent="0" marL="0">
-                        <a:buNone/>
-                      </a:pPr>
-                      <a:r>
-                        <a:rPr lang="en-US" sz="850" dirty="0">
-                          <a:solidFill>
-                            <a:srgbClr val="2B2B2B"/>
-                          </a:solidFill>
-                          <a:latin typeface="맑은 고딕" pitchFamily="34" charset="0"/>
-                          <a:ea typeface="맑은 고딕" pitchFamily="34" charset="-122"/>
-                          <a:cs typeface="맑은 고딕" pitchFamily="34" charset="-120"/>
-                        </a:rPr>
                         <a:t>2026-08-31</a:t>
                       </a:r>
                       <a:endParaRPr lang="en-US" sz="850" dirty="0">
@@ -15002,6 +14795,63 @@
                         </a:rPr>
                         <a:t>로뎀나무내과 통합계약</a:t>
                       </a:r>
+                      <a:endParaRPr lang="en-US" sz="850" dirty="0">
+                        <a:latin typeface="맑은 고딕" charset="0"/>
+                        <a:ea typeface="맑은 고딕" charset="0"/>
+                        <a:cs typeface="맑은 고딕" charset="0"/>
+                      </a:endParaRPr>
+                    </a:p>
+                  </a:txBody>
+                  <a:tcPr marL="91440" marR="91440" marT="45720" marB="45720" anchor="ctr">
+                    <a:lnL w="12700" cap="flat" cmpd="sng" algn="ctr">
+                      <a:solidFill>
+                        <a:srgbClr val="CBD5E0"/>
+                      </a:solidFill>
+                      <a:prstDash val="solid"/>
+                      <a:round/>
+                      <a:headEnd type="none" w="med" len="med"/>
+                      <a:tailEnd type="none" w="med" len="med"/>
+                    </a:lnL>
+                    <a:lnR w="12700" cap="flat" cmpd="sng" algn="ctr">
+                      <a:solidFill>
+                        <a:srgbClr val="CBD5E0"/>
+                      </a:solidFill>
+                      <a:prstDash val="solid"/>
+                      <a:round/>
+                      <a:headEnd type="none" w="med" len="med"/>
+                      <a:tailEnd type="none" w="med" len="med"/>
+                    </a:lnR>
+                    <a:lnT w="12700" cap="flat" cmpd="sng" algn="ctr">
+                      <a:solidFill>
+                        <a:srgbClr val="CBD5E0"/>
+                      </a:solidFill>
+                      <a:prstDash val="solid"/>
+                      <a:round/>
+                      <a:headEnd type="none" w="med" len="med"/>
+                      <a:tailEnd type="none" w="med" len="med"/>
+                    </a:lnT>
+                    <a:lnB w="12700" cap="flat" cmpd="sng" algn="ctr">
+                      <a:solidFill>
+                        <a:srgbClr val="CBD5E0"/>
+                      </a:solidFill>
+                      <a:prstDash val="solid"/>
+                      <a:round/>
+                      <a:headEnd type="none" w="med" len="med"/>
+                      <a:tailEnd type="none" w="med" len="med"/>
+                    </a:lnB>
+                    <a:solidFill>
+                      <a:srgbClr val="F3F6F7"/>
+                    </a:solidFill>
+                  </a:tcPr>
+                </a:tc>
+                <a:tc>
+                  <a:txBody>
+                    <a:bodyPr/>
+                    <a:lstStyle/>
+                    <a:p>
+                      <a:pPr algn="ctr" indent="0" marL="0">
+                        <a:buNone/>
+                      </a:pPr>
                       <a:endParaRPr lang="en-US" sz="850" dirty="0">
                         <a:latin typeface="맑은 고딕" charset="0"/>
                         <a:ea typeface="맑은 고딕" charset="0"/>

--- a/docs/test/golden-outputs/p1-dangsan-r2/p1_dangsan_income_r2_basic.pptx
+++ b/docs/test/golden-outputs/p1-dangsan-r2/p1_dangsan_income_r2_basic.pptx
@@ -2199,7 +2199,7 @@
                 <a:ea typeface="맑은 고딕" pitchFamily="34" charset="-122"/>
                 <a:cs typeface="맑은 고딕" pitchFamily="34" charset="-120"/>
               </a:rPr>
-              <a:t>2026.09.24  |  정현우 수석팀장  |  제이에스부동산중개법인</a:t>
+              <a:t>2026.09.29  |  정현우 수석팀장  |  제이에스부동산중개법인</a:t>
             </a:r>
             <a:endParaRPr lang="en-US" sz="900" dirty="0"/>
           </a:p>
@@ -7763,124 +7763,6 @@
             <a:avLst/>
           </a:prstGeom>
           <a:solidFill>
-            <a:srgbClr val="C9A9A6"/>
-          </a:solidFill>
-          <a:ln/>
-        </p:spPr>
-      </p:sp>
-      <p:sp>
-        <p:nvSpPr>
-          <p:cNvPr id="7" name="Text 5"/>
-          <p:cNvSpPr/>
-          <p:nvPr/>
-        </p:nvSpPr>
-        <p:spPr>
-          <a:xfrm>
-            <a:off x="685800" y="1645920"/>
-            <a:ext cx="548640" cy="137160"/>
-          </a:xfrm>
-          <a:prstGeom prst="rect">
-            <a:avLst/>
-          </a:prstGeom>
-          <a:noFill/>
-          <a:ln/>
-        </p:spPr>
-        <p:txBody>
-          <a:bodyPr wrap="square" rtlCol="0" anchor="ctr"/>
-          <a:lstStyle/>
-          <a:p>
-            <a:pPr indent="0" marL="0">
-              <a:buNone/>
-            </a:pPr>
-            <a:r>
-              <a:rPr lang="en-US" sz="900" dirty="0">
-                <a:solidFill>
-                  <a:srgbClr val="5B6B73"/>
-                </a:solidFill>
-                <a:latin typeface="맑은 고딕" pitchFamily="34" charset="0"/>
-                <a:ea typeface="맑은 고딕" pitchFamily="34" charset="-122"/>
-                <a:cs typeface="맑은 고딕" pitchFamily="34" charset="-120"/>
-              </a:rPr>
-              <a:t>2025</a:t>
-            </a:r>
-            <a:endParaRPr lang="en-US" sz="900" dirty="0"/>
-          </a:p>
-        </p:txBody>
-      </p:sp>
-      <p:sp>
-        <p:nvSpPr>
-          <p:cNvPr id="8" name="Shape 6"/>
-          <p:cNvSpPr/>
-          <p:nvPr/>
-        </p:nvSpPr>
-        <p:spPr>
-          <a:xfrm>
-            <a:off x="1234440" y="1645920"/>
-            <a:ext cx="137160" cy="137160"/>
-          </a:xfrm>
-          <a:prstGeom prst="rect">
-            <a:avLst/>
-          </a:prstGeom>
-          <a:solidFill>
-            <a:srgbClr val="93B3A0"/>
-          </a:solidFill>
-          <a:ln/>
-        </p:spPr>
-      </p:sp>
-      <p:sp>
-        <p:nvSpPr>
-          <p:cNvPr id="9" name="Text 7"/>
-          <p:cNvSpPr/>
-          <p:nvPr/>
-        </p:nvSpPr>
-        <p:spPr>
-          <a:xfrm>
-            <a:off x="1417320" y="1645920"/>
-            <a:ext cx="548640" cy="137160"/>
-          </a:xfrm>
-          <a:prstGeom prst="rect">
-            <a:avLst/>
-          </a:prstGeom>
-          <a:noFill/>
-          <a:ln/>
-        </p:spPr>
-        <p:txBody>
-          <a:bodyPr wrap="square" rtlCol="0" anchor="ctr"/>
-          <a:lstStyle/>
-          <a:p>
-            <a:pPr indent="0" marL="0">
-              <a:buNone/>
-            </a:pPr>
-            <a:r>
-              <a:rPr lang="en-US" sz="900" dirty="0">
-                <a:solidFill>
-                  <a:srgbClr val="5B6B73"/>
-                </a:solidFill>
-                <a:latin typeface="맑은 고딕" pitchFamily="34" charset="0"/>
-                <a:ea typeface="맑은 고딕" pitchFamily="34" charset="-122"/>
-                <a:cs typeface="맑은 고딕" pitchFamily="34" charset="-120"/>
-              </a:rPr>
-              <a:t>2026</a:t>
-            </a:r>
-            <a:endParaRPr lang="en-US" sz="900" dirty="0"/>
-          </a:p>
-        </p:txBody>
-      </p:sp>
-      <p:sp>
-        <p:nvSpPr>
-          <p:cNvPr id="10" name="Shape 8"/>
-          <p:cNvSpPr/>
-          <p:nvPr/>
-        </p:nvSpPr>
-        <p:spPr>
-          <a:xfrm>
-            <a:off x="1965960" y="1645920"/>
-            <a:ext cx="137160" cy="137160"/>
-          </a:xfrm>
-          <a:prstGeom prst="rect">
-            <a:avLst/>
-          </a:prstGeom>
-          <a:solidFill>
             <a:srgbClr val="FBEFE8"/>
           </a:solidFill>
           <a:ln w="12700">
@@ -7893,13 +7775,13 @@
       </p:sp>
       <p:sp>
         <p:nvSpPr>
-          <p:cNvPr id="11" name="Text 9"/>
-          <p:cNvSpPr/>
-          <p:nvPr/>
-        </p:nvSpPr>
-        <p:spPr>
-          <a:xfrm>
-            <a:off x="2148840" y="1645920"/>
+          <p:cNvPr id="7" name="Text 5"/>
+          <p:cNvSpPr/>
+          <p:nvPr/>
+        </p:nvSpPr>
+        <p:spPr>
+          <a:xfrm>
+            <a:off x="685800" y="1645920"/>
             <a:ext cx="548640" cy="137160"/>
           </a:xfrm>
           <a:prstGeom prst="rect">
@@ -7932,14 +7814,14 @@
       </p:sp>
       <p:sp>
         <p:nvSpPr>
-          <p:cNvPr id="12" name="Shape 10"/>
-          <p:cNvSpPr/>
-          <p:nvPr/>
-        </p:nvSpPr>
-        <p:spPr>
-          <a:xfrm>
-            <a:off x="685800" y="5532120"/>
-            <a:ext cx="2560320" cy="0"/>
+          <p:cNvPr id="8" name="Shape 6"/>
+          <p:cNvSpPr/>
+          <p:nvPr/>
+        </p:nvSpPr>
+        <p:spPr>
+          <a:xfrm>
+            <a:off x="685800" y="5364480"/>
+            <a:ext cx="2743200" cy="0"/>
           </a:xfrm>
           <a:prstGeom prst="line">
             <a:avLst/>
@@ -7955,13 +7837,13 @@
       </p:sp>
       <p:sp>
         <p:nvSpPr>
-          <p:cNvPr id="13" name="Text 11"/>
-          <p:cNvSpPr/>
-          <p:nvPr/>
-        </p:nvSpPr>
-        <p:spPr>
-          <a:xfrm>
-            <a:off x="685800" y="5349240"/>
+          <p:cNvPr id="9" name="Text 7"/>
+          <p:cNvSpPr/>
+          <p:nvPr/>
+        </p:nvSpPr>
+        <p:spPr>
+          <a:xfrm>
+            <a:off x="685800" y="5181600"/>
             <a:ext cx="1828800" cy="182880"/>
           </a:xfrm>
           <a:prstGeom prst="rect">
@@ -7994,14 +7876,14 @@
       </p:sp>
       <p:sp>
         <p:nvSpPr>
-          <p:cNvPr id="14" name="Text 12"/>
-          <p:cNvSpPr/>
-          <p:nvPr/>
-        </p:nvSpPr>
-        <p:spPr>
-          <a:xfrm>
-            <a:off x="502920" y="5532120"/>
-            <a:ext cx="320040" cy="502920"/>
+          <p:cNvPr id="10" name="Text 8"/>
+          <p:cNvSpPr/>
+          <p:nvPr/>
+        </p:nvSpPr>
+        <p:spPr>
+          <a:xfrm>
+            <a:off x="502920" y="5364480"/>
+            <a:ext cx="475488" cy="670560"/>
           </a:xfrm>
           <a:prstGeom prst="rect">
             <a:avLst/>
@@ -8017,7 +7899,7 @@
               <a:buNone/>
             </a:pPr>
             <a:r>
-              <a:rPr lang="en-US" sz="1000" b="1" dirty="0">
+              <a:rPr lang="en-US" sz="1200" b="1" dirty="0">
                 <a:solidFill>
                   <a:srgbClr val="132A3A"/>
                 </a:solidFill>
@@ -8027,20 +7909,20 @@
               </a:rPr>
               <a:t>B1</a:t>
             </a:r>
-            <a:endParaRPr lang="en-US" sz="1000" dirty="0"/>
-          </a:p>
-        </p:txBody>
-      </p:sp>
-      <p:sp>
-        <p:nvSpPr>
-          <p:cNvPr id="15" name="Shape 13"/>
-          <p:cNvSpPr/>
-          <p:nvPr/>
-        </p:nvSpPr>
-        <p:spPr>
-          <a:xfrm>
-            <a:off x="868680" y="5559552"/>
-            <a:ext cx="2194560" cy="448056"/>
+            <a:endParaRPr lang="en-US" sz="1200" dirty="0"/>
+          </a:p>
+        </p:txBody>
+      </p:sp>
+      <p:sp>
+        <p:nvSpPr>
+          <p:cNvPr id="11" name="Shape 9"/>
+          <p:cNvSpPr/>
+          <p:nvPr/>
+        </p:nvSpPr>
+        <p:spPr>
+          <a:xfrm>
+            <a:off x="1033272" y="5391912"/>
+            <a:ext cx="2468880" cy="615696"/>
           </a:xfrm>
           <a:prstGeom prst="rect">
             <a:avLst/>
@@ -8058,14 +7940,14 @@
       </p:sp>
       <p:sp>
         <p:nvSpPr>
-          <p:cNvPr id="16" name="Text 14"/>
-          <p:cNvSpPr/>
-          <p:nvPr/>
-        </p:nvSpPr>
-        <p:spPr>
-          <a:xfrm>
-            <a:off x="941832" y="5559552"/>
-            <a:ext cx="1316736" cy="448056"/>
+          <p:cNvPr id="12" name="Text 10"/>
+          <p:cNvSpPr/>
+          <p:nvPr/>
+        </p:nvSpPr>
+        <p:spPr>
+          <a:xfrm>
+            <a:off x="1069848" y="5382768"/>
+            <a:ext cx="2395728" cy="633984"/>
           </a:xfrm>
           <a:prstGeom prst="rect">
             <a:avLst/>
@@ -8077,11 +7959,11 @@
           <a:bodyPr wrap="square" rtlCol="0" anchor="ctr"/>
           <a:lstStyle/>
           <a:p>
-            <a:pPr algn="l" indent="0" marL="0">
-              <a:buNone/>
-            </a:pPr>
-            <a:r>
-              <a:rPr lang="en-US" sz="900" dirty="0">
+            <a:pPr algn="ctr" indent="0" marL="0">
+              <a:buNone/>
+            </a:pPr>
+            <a:r>
+              <a:rPr lang="en-US" sz="1000" dirty="0">
                 <a:solidFill>
                   <a:srgbClr val="3A3A3A"/>
                 </a:solidFill>
@@ -8091,20 +7973,20 @@
               </a:rPr>
               <a:t>카페(자가)</a:t>
             </a:r>
-            <a:endParaRPr lang="en-US" sz="900" dirty="0"/>
-          </a:p>
-        </p:txBody>
-      </p:sp>
-      <p:sp>
-        <p:nvSpPr>
-          <p:cNvPr id="17" name="Text 15"/>
-          <p:cNvSpPr/>
-          <p:nvPr/>
-        </p:nvSpPr>
-        <p:spPr>
-          <a:xfrm>
-            <a:off x="2185416" y="5559552"/>
-            <a:ext cx="768096" cy="448056"/>
+            <a:endParaRPr lang="en-US" sz="1000" dirty="0"/>
+          </a:p>
+        </p:txBody>
+      </p:sp>
+      <p:sp>
+        <p:nvSpPr>
+          <p:cNvPr id="13" name="Text 11"/>
+          <p:cNvSpPr/>
+          <p:nvPr/>
+        </p:nvSpPr>
+        <p:spPr>
+          <a:xfrm>
+            <a:off x="502920" y="4693920"/>
+            <a:ext cx="475488" cy="670560"/>
           </a:xfrm>
           <a:prstGeom prst="rect">
             <a:avLst/>
@@ -8120,662 +8002,30 @@
               <a:buNone/>
             </a:pPr>
             <a:r>
-              <a:rPr lang="en-US" sz="800" dirty="0">
-                <a:solidFill>
-                  <a:srgbClr val="8A9AA3"/>
+              <a:rPr lang="en-US" sz="1200" b="1" dirty="0">
+                <a:solidFill>
+                  <a:srgbClr val="132A3A"/>
                 </a:solidFill>
                 <a:latin typeface="맑은 고딕" pitchFamily="34" charset="0"/>
                 <a:ea typeface="맑은 고딕" pitchFamily="34" charset="-122"/>
                 <a:cs typeface="맑은 고딕" pitchFamily="34" charset="-120"/>
               </a:rPr>
-              <a:t>317평</a:t>
-            </a:r>
-            <a:endParaRPr lang="en-US" sz="800" dirty="0"/>
-          </a:p>
-        </p:txBody>
-      </p:sp>
-      <p:sp>
-        <p:nvSpPr>
-          <p:cNvPr id="18" name="Text 16"/>
-          <p:cNvSpPr/>
-          <p:nvPr/>
-        </p:nvSpPr>
-        <p:spPr>
-          <a:xfrm>
-            <a:off x="502920" y="5029200"/>
-            <a:ext cx="320040" cy="502920"/>
-          </a:xfrm>
-          <a:prstGeom prst="rect">
-            <a:avLst/>
-          </a:prstGeom>
-          <a:noFill/>
-          <a:ln/>
-        </p:spPr>
-        <p:txBody>
-          <a:bodyPr wrap="square" rtlCol="0" anchor="ctr"/>
-          <a:lstStyle/>
-          <a:p>
-            <a:pPr algn="r" indent="0" marL="0">
-              <a:buNone/>
-            </a:pPr>
-            <a:r>
-              <a:rPr lang="en-US" sz="1000" b="1" dirty="0">
-                <a:solidFill>
-                  <a:srgbClr val="132A3A"/>
-                </a:solidFill>
-                <a:latin typeface="맑은 고딕" pitchFamily="34" charset="0"/>
-                <a:ea typeface="맑은 고딕" pitchFamily="34" charset="-122"/>
-                <a:cs typeface="맑은 고딕" pitchFamily="34" charset="-120"/>
-              </a:rPr>
               <a:t>1F</a:t>
             </a:r>
-            <a:endParaRPr lang="en-US" sz="1000" dirty="0"/>
-          </a:p>
-        </p:txBody>
-      </p:sp>
-      <p:sp>
-        <p:nvSpPr>
-          <p:cNvPr id="19" name="Shape 17"/>
-          <p:cNvSpPr/>
-          <p:nvPr/>
-        </p:nvSpPr>
-        <p:spPr>
-          <a:xfrm>
-            <a:off x="1472184" y="5056632"/>
-            <a:ext cx="987552" cy="448056"/>
-          </a:xfrm>
-          <a:prstGeom prst="rect">
-            <a:avLst/>
-          </a:prstGeom>
-          <a:solidFill>
-            <a:srgbClr val="93B3A0"/>
-          </a:solidFill>
-          <a:ln w="13970">
-            <a:solidFill>
-              <a:srgbClr val="5B6B73"/>
-            </a:solidFill>
-            <a:prstDash val="solid"/>
-          </a:ln>
-        </p:spPr>
-      </p:sp>
-      <p:sp>
-        <p:nvSpPr>
-          <p:cNvPr id="20" name="Text 18"/>
-          <p:cNvSpPr/>
-          <p:nvPr/>
-        </p:nvSpPr>
-        <p:spPr>
-          <a:xfrm>
-            <a:off x="1517904" y="5056632"/>
-            <a:ext cx="896112" cy="448056"/>
-          </a:xfrm>
-          <a:prstGeom prst="rect">
-            <a:avLst/>
-          </a:prstGeom>
-          <a:noFill/>
-          <a:ln/>
-        </p:spPr>
-        <p:txBody>
-          <a:bodyPr wrap="square" rtlCol="0" anchor="ctr"/>
-          <a:lstStyle/>
-          <a:p>
-            <a:pPr algn="ctr" indent="0" marL="0">
-              <a:buNone/>
-            </a:pPr>
-            <a:r>
-              <a:rPr lang="en-US" sz="900" dirty="0">
-                <a:solidFill>
-                  <a:srgbClr val="3A3A3A"/>
-                </a:solidFill>
-                <a:latin typeface="맑은 고딕" pitchFamily="34" charset="0"/>
-                <a:ea typeface="맑은 고딕" pitchFamily="34" charset="-122"/>
-                <a:cs typeface="맑은 고딕" pitchFamily="34" charset="-120"/>
-              </a:rPr>
-              <a:t>약국</a:t>
-            </a:r>
-            <a:endParaRPr lang="en-US" sz="900" dirty="0"/>
-          </a:p>
-        </p:txBody>
-      </p:sp>
-      <p:sp>
-        <p:nvSpPr>
-          <p:cNvPr id="21" name="Text 19"/>
-          <p:cNvSpPr/>
-          <p:nvPr/>
-        </p:nvSpPr>
-        <p:spPr>
-          <a:xfrm>
-            <a:off x="502920" y="4526280"/>
-            <a:ext cx="320040" cy="502920"/>
-          </a:xfrm>
-          <a:prstGeom prst="rect">
-            <a:avLst/>
-          </a:prstGeom>
-          <a:noFill/>
-          <a:ln/>
-        </p:spPr>
-        <p:txBody>
-          <a:bodyPr wrap="square" rtlCol="0" anchor="ctr"/>
-          <a:lstStyle/>
-          <a:p>
-            <a:pPr algn="r" indent="0" marL="0">
-              <a:buNone/>
-            </a:pPr>
-            <a:r>
-              <a:rPr lang="en-US" sz="1000" b="1" dirty="0">
-                <a:solidFill>
-                  <a:srgbClr val="132A3A"/>
-                </a:solidFill>
-                <a:latin typeface="맑은 고딕" pitchFamily="34" charset="0"/>
-                <a:ea typeface="맑은 고딕" pitchFamily="34" charset="-122"/>
-                <a:cs typeface="맑은 고딕" pitchFamily="34" charset="-120"/>
-              </a:rPr>
-              <a:t>1F</a:t>
-            </a:r>
-            <a:endParaRPr lang="en-US" sz="1000" dirty="0"/>
-          </a:p>
-        </p:txBody>
-      </p:sp>
-      <p:sp>
-        <p:nvSpPr>
-          <p:cNvPr id="22" name="Shape 20"/>
-          <p:cNvSpPr/>
-          <p:nvPr/>
-        </p:nvSpPr>
-        <p:spPr>
-          <a:xfrm>
-            <a:off x="1472184" y="4553712"/>
-            <a:ext cx="987552" cy="448056"/>
-          </a:xfrm>
-          <a:prstGeom prst="rect">
-            <a:avLst/>
-          </a:prstGeom>
-          <a:solidFill>
-            <a:srgbClr val="93B3A0"/>
-          </a:solidFill>
-          <a:ln w="13970">
-            <a:solidFill>
-              <a:srgbClr val="5B6B73"/>
-            </a:solidFill>
-            <a:prstDash val="solid"/>
-          </a:ln>
-        </p:spPr>
-      </p:sp>
-      <p:sp>
-        <p:nvSpPr>
-          <p:cNvPr id="23" name="Text 21"/>
-          <p:cNvSpPr/>
-          <p:nvPr/>
-        </p:nvSpPr>
-        <p:spPr>
-          <a:xfrm>
-            <a:off x="1517904" y="4553712"/>
-            <a:ext cx="896112" cy="448056"/>
-          </a:xfrm>
-          <a:prstGeom prst="rect">
-            <a:avLst/>
-          </a:prstGeom>
-          <a:noFill/>
-          <a:ln/>
-        </p:spPr>
-        <p:txBody>
-          <a:bodyPr wrap="square" rtlCol="0" anchor="ctr"/>
-          <a:lstStyle/>
-          <a:p>
-            <a:pPr algn="ctr" indent="0" marL="0">
-              <a:buNone/>
-            </a:pPr>
-            <a:r>
-              <a:rPr lang="en-US" sz="900" dirty="0">
-                <a:solidFill>
-                  <a:srgbClr val="3A3A3A"/>
-                </a:solidFill>
-                <a:latin typeface="맑은 고딕" pitchFamily="34" charset="0"/>
-                <a:ea typeface="맑은 고딕" pitchFamily="34" charset="-122"/>
-                <a:cs typeface="맑은 고딕" pitchFamily="34" charset="-120"/>
-              </a:rPr>
-              <a:t>내과</a:t>
-            </a:r>
-            <a:endParaRPr lang="en-US" sz="900" dirty="0"/>
-          </a:p>
-        </p:txBody>
-      </p:sp>
-      <p:sp>
-        <p:nvSpPr>
-          <p:cNvPr id="24" name="Text 22"/>
-          <p:cNvSpPr/>
-          <p:nvPr/>
-        </p:nvSpPr>
-        <p:spPr>
-          <a:xfrm>
-            <a:off x="502920" y="4023360"/>
-            <a:ext cx="320040" cy="502920"/>
-          </a:xfrm>
-          <a:prstGeom prst="rect">
-            <a:avLst/>
-          </a:prstGeom>
-          <a:noFill/>
-          <a:ln/>
-        </p:spPr>
-        <p:txBody>
-          <a:bodyPr wrap="square" rtlCol="0" anchor="ctr"/>
-          <a:lstStyle/>
-          <a:p>
-            <a:pPr algn="r" indent="0" marL="0">
-              <a:buNone/>
-            </a:pPr>
-            <a:r>
-              <a:rPr lang="en-US" sz="1000" b="1" dirty="0">
-                <a:solidFill>
-                  <a:srgbClr val="132A3A"/>
-                </a:solidFill>
-                <a:latin typeface="맑은 고딕" pitchFamily="34" charset="0"/>
-                <a:ea typeface="맑은 고딕" pitchFamily="34" charset="-122"/>
-                <a:cs typeface="맑은 고딕" pitchFamily="34" charset="-120"/>
-              </a:rPr>
-              <a:t>2F</a:t>
-            </a:r>
-            <a:endParaRPr lang="en-US" sz="1000" dirty="0"/>
-          </a:p>
-        </p:txBody>
-      </p:sp>
-      <p:sp>
-        <p:nvSpPr>
-          <p:cNvPr id="25" name="Shape 23"/>
-          <p:cNvSpPr/>
-          <p:nvPr/>
-        </p:nvSpPr>
-        <p:spPr>
-          <a:xfrm>
-            <a:off x="1099109" y="4050792"/>
-            <a:ext cx="1733702" cy="448056"/>
-          </a:xfrm>
-          <a:prstGeom prst="rect">
-            <a:avLst/>
-          </a:prstGeom>
-          <a:solidFill>
-            <a:srgbClr val="93B3A0"/>
-          </a:solidFill>
-          <a:ln w="13970">
-            <a:solidFill>
-              <a:srgbClr val="5B6B73"/>
-            </a:solidFill>
-            <a:prstDash val="solid"/>
-          </a:ln>
-        </p:spPr>
-      </p:sp>
-      <p:sp>
-        <p:nvSpPr>
-          <p:cNvPr id="26" name="Text 24"/>
-          <p:cNvSpPr/>
-          <p:nvPr/>
-        </p:nvSpPr>
-        <p:spPr>
-          <a:xfrm>
-            <a:off x="1172261" y="4050792"/>
-            <a:ext cx="1040221" cy="448056"/>
-          </a:xfrm>
-          <a:prstGeom prst="rect">
-            <a:avLst/>
-          </a:prstGeom>
-          <a:noFill/>
-          <a:ln/>
-        </p:spPr>
-        <p:txBody>
-          <a:bodyPr wrap="square" rtlCol="0" anchor="ctr"/>
-          <a:lstStyle/>
-          <a:p>
-            <a:pPr algn="l" indent="0" marL="0">
-              <a:buNone/>
-            </a:pPr>
-            <a:r>
-              <a:rPr lang="en-US" sz="900" dirty="0">
-                <a:solidFill>
-                  <a:srgbClr val="3A3A3A"/>
-                </a:solidFill>
-                <a:latin typeface="맑은 고딕" pitchFamily="34" charset="0"/>
-                <a:ea typeface="맑은 고딕" pitchFamily="34" charset="-122"/>
-                <a:cs typeface="맑은 고딕" pitchFamily="34" charset="-120"/>
-              </a:rPr>
-              <a:t>내과</a:t>
-            </a:r>
-            <a:endParaRPr lang="en-US" sz="900" dirty="0"/>
-          </a:p>
-        </p:txBody>
-      </p:sp>
-      <p:sp>
-        <p:nvSpPr>
-          <p:cNvPr id="27" name="Text 25"/>
-          <p:cNvSpPr/>
-          <p:nvPr/>
-        </p:nvSpPr>
-        <p:spPr>
-          <a:xfrm>
-            <a:off x="2139330" y="4050792"/>
-            <a:ext cx="606796" cy="448056"/>
-          </a:xfrm>
-          <a:prstGeom prst="rect">
-            <a:avLst/>
-          </a:prstGeom>
-          <a:noFill/>
-          <a:ln/>
-        </p:spPr>
-        <p:txBody>
-          <a:bodyPr wrap="square" rtlCol="0" anchor="ctr"/>
-          <a:lstStyle/>
-          <a:p>
-            <a:pPr algn="r" indent="0" marL="0">
-              <a:buNone/>
-            </a:pPr>
-            <a:r>
-              <a:rPr lang="en-US" sz="800" dirty="0">
-                <a:solidFill>
-                  <a:srgbClr val="8A9AA3"/>
-                </a:solidFill>
-                <a:latin typeface="맑은 고딕" pitchFamily="34" charset="0"/>
-                <a:ea typeface="맑은 고딕" pitchFamily="34" charset="-122"/>
-                <a:cs typeface="맑은 고딕" pitchFamily="34" charset="-120"/>
-              </a:rPr>
-              <a:t>252평</a:t>
-            </a:r>
-            <a:endParaRPr lang="en-US" sz="800" dirty="0"/>
-          </a:p>
-        </p:txBody>
-      </p:sp>
-      <p:sp>
-        <p:nvSpPr>
-          <p:cNvPr id="28" name="Text 26"/>
-          <p:cNvSpPr/>
-          <p:nvPr/>
-        </p:nvSpPr>
-        <p:spPr>
-          <a:xfrm>
-            <a:off x="502920" y="3520440"/>
-            <a:ext cx="320040" cy="502920"/>
-          </a:xfrm>
-          <a:prstGeom prst="rect">
-            <a:avLst/>
-          </a:prstGeom>
-          <a:noFill/>
-          <a:ln/>
-        </p:spPr>
-        <p:txBody>
-          <a:bodyPr wrap="square" rtlCol="0" anchor="ctr"/>
-          <a:lstStyle/>
-          <a:p>
-            <a:pPr algn="r" indent="0" marL="0">
-              <a:buNone/>
-            </a:pPr>
-            <a:r>
-              <a:rPr lang="en-US" sz="1000" b="1" dirty="0">
-                <a:solidFill>
-                  <a:srgbClr val="132A3A"/>
-                </a:solidFill>
-                <a:latin typeface="맑은 고딕" pitchFamily="34" charset="0"/>
-                <a:ea typeface="맑은 고딕" pitchFamily="34" charset="-122"/>
-                <a:cs typeface="맑은 고딕" pitchFamily="34" charset="-120"/>
-              </a:rPr>
-              <a:t>3F</a:t>
-            </a:r>
-            <a:endParaRPr lang="en-US" sz="1000" dirty="0"/>
-          </a:p>
-        </p:txBody>
-      </p:sp>
-      <p:sp>
-        <p:nvSpPr>
-          <p:cNvPr id="29" name="Shape 27"/>
-          <p:cNvSpPr/>
-          <p:nvPr/>
-        </p:nvSpPr>
-        <p:spPr>
-          <a:xfrm>
-            <a:off x="1099109" y="3547872"/>
-            <a:ext cx="1733702" cy="448056"/>
-          </a:xfrm>
-          <a:prstGeom prst="rect">
-            <a:avLst/>
-          </a:prstGeom>
-          <a:solidFill>
-            <a:srgbClr val="93B3A0"/>
-          </a:solidFill>
-          <a:ln w="13970">
-            <a:solidFill>
-              <a:srgbClr val="5B6B73"/>
-            </a:solidFill>
-            <a:prstDash val="solid"/>
-          </a:ln>
-        </p:spPr>
-      </p:sp>
-      <p:sp>
-        <p:nvSpPr>
-          <p:cNvPr id="30" name="Text 28"/>
-          <p:cNvSpPr/>
-          <p:nvPr/>
-        </p:nvSpPr>
-        <p:spPr>
-          <a:xfrm>
-            <a:off x="1172261" y="3547872"/>
-            <a:ext cx="1040221" cy="448056"/>
-          </a:xfrm>
-          <a:prstGeom prst="rect">
-            <a:avLst/>
-          </a:prstGeom>
-          <a:noFill/>
-          <a:ln/>
-        </p:spPr>
-        <p:txBody>
-          <a:bodyPr wrap="square" rtlCol="0" anchor="ctr"/>
-          <a:lstStyle/>
-          <a:p>
-            <a:pPr algn="l" indent="0" marL="0">
-              <a:buNone/>
-            </a:pPr>
-            <a:r>
-              <a:rPr lang="en-US" sz="900" dirty="0">
-                <a:solidFill>
-                  <a:srgbClr val="3A3A3A"/>
-                </a:solidFill>
-                <a:latin typeface="맑은 고딕" pitchFamily="34" charset="0"/>
-                <a:ea typeface="맑은 고딕" pitchFamily="34" charset="-122"/>
-                <a:cs typeface="맑은 고딕" pitchFamily="34" charset="-120"/>
-              </a:rPr>
-              <a:t>헬쓰장</a:t>
-            </a:r>
-            <a:endParaRPr lang="en-US" sz="900" dirty="0"/>
-          </a:p>
-        </p:txBody>
-      </p:sp>
-      <p:sp>
-        <p:nvSpPr>
-          <p:cNvPr id="31" name="Text 29"/>
-          <p:cNvSpPr/>
-          <p:nvPr/>
-        </p:nvSpPr>
-        <p:spPr>
-          <a:xfrm>
-            <a:off x="2139330" y="3547872"/>
-            <a:ext cx="606796" cy="448056"/>
-          </a:xfrm>
-          <a:prstGeom prst="rect">
-            <a:avLst/>
-          </a:prstGeom>
-          <a:noFill/>
-          <a:ln/>
-        </p:spPr>
-        <p:txBody>
-          <a:bodyPr wrap="square" rtlCol="0" anchor="ctr"/>
-          <a:lstStyle/>
-          <a:p>
-            <a:pPr algn="r" indent="0" marL="0">
-              <a:buNone/>
-            </a:pPr>
-            <a:r>
-              <a:rPr lang="en-US" sz="800" dirty="0">
-                <a:solidFill>
-                  <a:srgbClr val="8A9AA3"/>
-                </a:solidFill>
-                <a:latin typeface="맑은 고딕" pitchFamily="34" charset="0"/>
-                <a:ea typeface="맑은 고딕" pitchFamily="34" charset="-122"/>
-                <a:cs typeface="맑은 고딕" pitchFamily="34" charset="-120"/>
-              </a:rPr>
-              <a:t>252평</a:t>
-            </a:r>
-            <a:endParaRPr lang="en-US" sz="800" dirty="0"/>
-          </a:p>
-        </p:txBody>
-      </p:sp>
-      <p:sp>
-        <p:nvSpPr>
-          <p:cNvPr id="32" name="Text 30"/>
-          <p:cNvSpPr/>
-          <p:nvPr/>
-        </p:nvSpPr>
-        <p:spPr>
-          <a:xfrm>
-            <a:off x="502920" y="3017520"/>
-            <a:ext cx="320040" cy="502920"/>
-          </a:xfrm>
-          <a:prstGeom prst="rect">
-            <a:avLst/>
-          </a:prstGeom>
-          <a:noFill/>
-          <a:ln/>
-        </p:spPr>
-        <p:txBody>
-          <a:bodyPr wrap="square" rtlCol="0" anchor="ctr"/>
-          <a:lstStyle/>
-          <a:p>
-            <a:pPr algn="r" indent="0" marL="0">
-              <a:buNone/>
-            </a:pPr>
-            <a:r>
-              <a:rPr lang="en-US" sz="1000" b="1" dirty="0">
-                <a:solidFill>
-                  <a:srgbClr val="132A3A"/>
-                </a:solidFill>
-                <a:latin typeface="맑은 고딕" pitchFamily="34" charset="0"/>
-                <a:ea typeface="맑은 고딕" pitchFamily="34" charset="-122"/>
-                <a:cs typeface="맑은 고딕" pitchFamily="34" charset="-120"/>
-              </a:rPr>
-              <a:t>4F</a:t>
-            </a:r>
-            <a:endParaRPr lang="en-US" sz="1000" dirty="0"/>
-          </a:p>
-        </p:txBody>
-      </p:sp>
-      <p:sp>
-        <p:nvSpPr>
-          <p:cNvPr id="33" name="Shape 31"/>
-          <p:cNvSpPr/>
-          <p:nvPr/>
-        </p:nvSpPr>
-        <p:spPr>
-          <a:xfrm>
-            <a:off x="1384402" y="3044952"/>
-            <a:ext cx="1163117" cy="448056"/>
-          </a:xfrm>
-          <a:prstGeom prst="rect">
-            <a:avLst/>
-          </a:prstGeom>
-          <a:solidFill>
-            <a:srgbClr val="C9A9A6"/>
-          </a:solidFill>
-          <a:ln w="13970">
-            <a:solidFill>
-              <a:srgbClr val="5B6B73"/>
-            </a:solidFill>
-            <a:prstDash val="solid"/>
-          </a:ln>
-        </p:spPr>
-      </p:sp>
-      <p:sp>
-        <p:nvSpPr>
-          <p:cNvPr id="34" name="Text 32"/>
-          <p:cNvSpPr/>
-          <p:nvPr/>
-        </p:nvSpPr>
-        <p:spPr>
-          <a:xfrm>
-            <a:off x="1430122" y="3044952"/>
-            <a:ext cx="1071677" cy="448056"/>
-          </a:xfrm>
-          <a:prstGeom prst="rect">
-            <a:avLst/>
-          </a:prstGeom>
-          <a:noFill/>
-          <a:ln/>
-        </p:spPr>
-        <p:txBody>
-          <a:bodyPr wrap="square" rtlCol="0" anchor="ctr"/>
-          <a:lstStyle/>
-          <a:p>
-            <a:pPr algn="ctr" indent="0" marL="0">
-              <a:buNone/>
-            </a:pPr>
-            <a:r>
-              <a:rPr lang="en-US" sz="900" dirty="0">
-                <a:solidFill>
-                  <a:srgbClr val="3A3A3A"/>
-                </a:solidFill>
-                <a:latin typeface="맑은 고딕" pitchFamily="34" charset="0"/>
-                <a:ea typeface="맑은 고딕" pitchFamily="34" charset="-122"/>
-                <a:cs typeface="맑은 고딕" pitchFamily="34" charset="-120"/>
-              </a:rPr>
-              <a:t>와인매장</a:t>
-            </a:r>
-            <a:endParaRPr lang="en-US" sz="900" dirty="0"/>
-          </a:p>
-        </p:txBody>
-      </p:sp>
-      <p:sp>
-        <p:nvSpPr>
-          <p:cNvPr id="35" name="Text 33"/>
-          <p:cNvSpPr/>
-          <p:nvPr/>
-        </p:nvSpPr>
-        <p:spPr>
-          <a:xfrm>
-            <a:off x="502920" y="2514600"/>
-            <a:ext cx="320040" cy="502920"/>
-          </a:xfrm>
-          <a:prstGeom prst="rect">
-            <a:avLst/>
-          </a:prstGeom>
-          <a:noFill/>
-          <a:ln/>
-        </p:spPr>
-        <p:txBody>
-          <a:bodyPr wrap="square" rtlCol="0" anchor="ctr"/>
-          <a:lstStyle/>
-          <a:p>
-            <a:pPr algn="r" indent="0" marL="0">
-              <a:buNone/>
-            </a:pPr>
-            <a:r>
-              <a:rPr lang="en-US" sz="1000" b="1" dirty="0">
-                <a:solidFill>
-                  <a:srgbClr val="132A3A"/>
-                </a:solidFill>
-                <a:latin typeface="맑은 고딕" pitchFamily="34" charset="0"/>
-                <a:ea typeface="맑은 고딕" pitchFamily="34" charset="-122"/>
-                <a:cs typeface="맑은 고딕" pitchFamily="34" charset="-120"/>
-              </a:rPr>
-              <a:t>4F</a:t>
-            </a:r>
-            <a:endParaRPr lang="en-US" sz="1000" dirty="0"/>
-          </a:p>
-        </p:txBody>
-      </p:sp>
-      <p:sp>
-        <p:nvSpPr>
-          <p:cNvPr id="36" name="Shape 34"/>
-          <p:cNvSpPr/>
-          <p:nvPr/>
-        </p:nvSpPr>
-        <p:spPr>
-          <a:xfrm>
-            <a:off x="1472184" y="2542032"/>
-            <a:ext cx="987552" cy="448056"/>
+            <a:endParaRPr lang="en-US" sz="1200" dirty="0"/>
+          </a:p>
+        </p:txBody>
+      </p:sp>
+      <p:sp>
+        <p:nvSpPr>
+          <p:cNvPr id="14" name="Shape 12"/>
+          <p:cNvSpPr/>
+          <p:nvPr/>
+        </p:nvSpPr>
+        <p:spPr>
+          <a:xfrm>
+            <a:off x="1033272" y="4721352"/>
+            <a:ext cx="1234440" cy="615696"/>
           </a:xfrm>
           <a:prstGeom prst="rect">
             <a:avLst/>
@@ -8793,14 +8043,14 @@
       </p:sp>
       <p:sp>
         <p:nvSpPr>
-          <p:cNvPr id="37" name="Text 35"/>
-          <p:cNvSpPr/>
-          <p:nvPr/>
-        </p:nvSpPr>
-        <p:spPr>
-          <a:xfrm>
-            <a:off x="1517904" y="2542032"/>
-            <a:ext cx="896112" cy="448056"/>
+          <p:cNvPr id="15" name="Text 13"/>
+          <p:cNvSpPr/>
+          <p:nvPr/>
+        </p:nvSpPr>
+        <p:spPr>
+          <a:xfrm>
+            <a:off x="1069848" y="4712208"/>
+            <a:ext cx="1161288" cy="633984"/>
           </a:xfrm>
           <a:prstGeom prst="rect">
             <a:avLst/>
@@ -8816,7 +8066,7 @@
               <a:buNone/>
             </a:pPr>
             <a:r>
-              <a:rPr lang="en-US" sz="900" dirty="0">
+              <a:rPr lang="en-US" sz="1000" dirty="0">
                 <a:solidFill>
                   <a:srgbClr val="3A3A3A"/>
                 </a:solidFill>
@@ -8824,46 +8074,7 @@
                 <a:ea typeface="맑은 고딕" pitchFamily="34" charset="-122"/>
                 <a:cs typeface="맑은 고딕" pitchFamily="34" charset="-120"/>
               </a:rPr>
-              <a:t>자가</a:t>
-            </a:r>
-            <a:endParaRPr lang="en-US" sz="900" dirty="0"/>
-          </a:p>
-        </p:txBody>
-      </p:sp>
-      <p:sp>
-        <p:nvSpPr>
-          <p:cNvPr id="38" name="Text 36"/>
-          <p:cNvSpPr/>
-          <p:nvPr/>
-        </p:nvSpPr>
-        <p:spPr>
-          <a:xfrm>
-            <a:off x="502920" y="2011680"/>
-            <a:ext cx="320040" cy="502920"/>
-          </a:xfrm>
-          <a:prstGeom prst="rect">
-            <a:avLst/>
-          </a:prstGeom>
-          <a:noFill/>
-          <a:ln/>
-        </p:spPr>
-        <p:txBody>
-          <a:bodyPr wrap="square" rtlCol="0" anchor="ctr"/>
-          <a:lstStyle/>
-          <a:p>
-            <a:pPr algn="r" indent="0" marL="0">
-              <a:buNone/>
-            </a:pPr>
-            <a:r>
-              <a:rPr lang="en-US" sz="1000" b="1" dirty="0">
-                <a:solidFill>
-                  <a:srgbClr val="132A3A"/>
-                </a:solidFill>
-                <a:latin typeface="맑은 고딕" pitchFamily="34" charset="0"/>
-                <a:ea typeface="맑은 고딕" pitchFamily="34" charset="-122"/>
-                <a:cs typeface="맑은 고딕" pitchFamily="34" charset="-120"/>
-              </a:rPr>
-              <a:t>5F</a:t>
+              <a:t>약국</a:t>
             </a:r>
             <a:endParaRPr lang="en-US" sz="1000" dirty="0"/>
           </a:p>
@@ -8871,20 +8082,20 @@
       </p:sp>
       <p:sp>
         <p:nvSpPr>
-          <p:cNvPr id="39" name="Shape 37"/>
-          <p:cNvSpPr/>
-          <p:nvPr/>
-        </p:nvSpPr>
-        <p:spPr>
-          <a:xfrm>
-            <a:off x="1329538" y="2039112"/>
-            <a:ext cx="1272845" cy="448056"/>
+          <p:cNvPr id="16" name="Shape 14"/>
+          <p:cNvSpPr/>
+          <p:nvPr/>
+        </p:nvSpPr>
+        <p:spPr>
+          <a:xfrm>
+            <a:off x="2267712" y="4721352"/>
+            <a:ext cx="1234440" cy="615696"/>
           </a:xfrm>
           <a:prstGeom prst="rect">
             <a:avLst/>
           </a:prstGeom>
           <a:solidFill>
-            <a:srgbClr val="93B3A0"/>
+            <a:srgbClr val="E2E8F0"/>
           </a:solidFill>
           <a:ln w="13970">
             <a:solidFill>
@@ -8896,14 +8107,14 @@
       </p:sp>
       <p:sp>
         <p:nvSpPr>
-          <p:cNvPr id="40" name="Text 38"/>
-          <p:cNvSpPr/>
-          <p:nvPr/>
-        </p:nvSpPr>
-        <p:spPr>
-          <a:xfrm>
-            <a:off x="1375258" y="2039112"/>
-            <a:ext cx="1181405" cy="448056"/>
+          <p:cNvPr id="17" name="Text 15"/>
+          <p:cNvSpPr/>
+          <p:nvPr/>
+        </p:nvSpPr>
+        <p:spPr>
+          <a:xfrm>
+            <a:off x="2304288" y="4712208"/>
+            <a:ext cx="1161288" cy="633984"/>
           </a:xfrm>
           <a:prstGeom prst="rect">
             <a:avLst/>
@@ -8919,7 +8130,7 @@
               <a:buNone/>
             </a:pPr>
             <a:r>
-              <a:rPr lang="en-US" sz="900" dirty="0">
+              <a:rPr lang="en-US" sz="1000" dirty="0">
                 <a:solidFill>
                   <a:srgbClr val="3A3A3A"/>
                 </a:solidFill>
@@ -8929,20 +8140,496 @@
               </a:rPr>
               <a:t>내과</a:t>
             </a:r>
-            <a:endParaRPr lang="en-US" sz="900" dirty="0"/>
-          </a:p>
-        </p:txBody>
-      </p:sp>
-      <p:sp>
-        <p:nvSpPr>
-          <p:cNvPr id="41" name="Text 39"/>
+            <a:endParaRPr lang="en-US" sz="1000" dirty="0"/>
+          </a:p>
+        </p:txBody>
+      </p:sp>
+      <p:sp>
+        <p:nvSpPr>
+          <p:cNvPr id="18" name="Text 16"/>
+          <p:cNvSpPr/>
+          <p:nvPr/>
+        </p:nvSpPr>
+        <p:spPr>
+          <a:xfrm>
+            <a:off x="502920" y="4023360"/>
+            <a:ext cx="475488" cy="670560"/>
+          </a:xfrm>
+          <a:prstGeom prst="rect">
+            <a:avLst/>
+          </a:prstGeom>
+          <a:noFill/>
+          <a:ln/>
+        </p:spPr>
+        <p:txBody>
+          <a:bodyPr wrap="square" rtlCol="0" anchor="ctr"/>
+          <a:lstStyle/>
+          <a:p>
+            <a:pPr algn="r" indent="0" marL="0">
+              <a:buNone/>
+            </a:pPr>
+            <a:r>
+              <a:rPr lang="en-US" sz="1200" b="1" dirty="0">
+                <a:solidFill>
+                  <a:srgbClr val="132A3A"/>
+                </a:solidFill>
+                <a:latin typeface="맑은 고딕" pitchFamily="34" charset="0"/>
+                <a:ea typeface="맑은 고딕" pitchFamily="34" charset="-122"/>
+                <a:cs typeface="맑은 고딕" pitchFamily="34" charset="-120"/>
+              </a:rPr>
+              <a:t>2F</a:t>
+            </a:r>
+            <a:endParaRPr lang="en-US" sz="1200" dirty="0"/>
+          </a:p>
+        </p:txBody>
+      </p:sp>
+      <p:sp>
+        <p:nvSpPr>
+          <p:cNvPr id="19" name="Shape 17"/>
+          <p:cNvSpPr/>
+          <p:nvPr/>
+        </p:nvSpPr>
+        <p:spPr>
+          <a:xfrm>
+            <a:off x="1033272" y="4050792"/>
+            <a:ext cx="2468880" cy="615696"/>
+          </a:xfrm>
+          <a:prstGeom prst="rect">
+            <a:avLst/>
+          </a:prstGeom>
+          <a:solidFill>
+            <a:srgbClr val="E2E8F0"/>
+          </a:solidFill>
+          <a:ln w="13970">
+            <a:solidFill>
+              <a:srgbClr val="5B6B73"/>
+            </a:solidFill>
+            <a:prstDash val="solid"/>
+          </a:ln>
+        </p:spPr>
+      </p:sp>
+      <p:sp>
+        <p:nvSpPr>
+          <p:cNvPr id="20" name="Text 18"/>
+          <p:cNvSpPr/>
+          <p:nvPr/>
+        </p:nvSpPr>
+        <p:spPr>
+          <a:xfrm>
+            <a:off x="1069848" y="4041648"/>
+            <a:ext cx="2395728" cy="633984"/>
+          </a:xfrm>
+          <a:prstGeom prst="rect">
+            <a:avLst/>
+          </a:prstGeom>
+          <a:noFill/>
+          <a:ln/>
+        </p:spPr>
+        <p:txBody>
+          <a:bodyPr wrap="square" rtlCol="0" anchor="ctr"/>
+          <a:lstStyle/>
+          <a:p>
+            <a:pPr algn="ctr" indent="0" marL="0">
+              <a:buNone/>
+            </a:pPr>
+            <a:r>
+              <a:rPr lang="en-US" sz="1000" dirty="0">
+                <a:solidFill>
+                  <a:srgbClr val="3A3A3A"/>
+                </a:solidFill>
+                <a:latin typeface="맑은 고딕" pitchFamily="34" charset="0"/>
+                <a:ea typeface="맑은 고딕" pitchFamily="34" charset="-122"/>
+                <a:cs typeface="맑은 고딕" pitchFamily="34" charset="-120"/>
+              </a:rPr>
+              <a:t>내과</a:t>
+            </a:r>
+            <a:endParaRPr lang="en-US" sz="1000" dirty="0"/>
+          </a:p>
+        </p:txBody>
+      </p:sp>
+      <p:sp>
+        <p:nvSpPr>
+          <p:cNvPr id="21" name="Text 19"/>
+          <p:cNvSpPr/>
+          <p:nvPr/>
+        </p:nvSpPr>
+        <p:spPr>
+          <a:xfrm>
+            <a:off x="502920" y="3352800"/>
+            <a:ext cx="475488" cy="670560"/>
+          </a:xfrm>
+          <a:prstGeom prst="rect">
+            <a:avLst/>
+          </a:prstGeom>
+          <a:noFill/>
+          <a:ln/>
+        </p:spPr>
+        <p:txBody>
+          <a:bodyPr wrap="square" rtlCol="0" anchor="ctr"/>
+          <a:lstStyle/>
+          <a:p>
+            <a:pPr algn="r" indent="0" marL="0">
+              <a:buNone/>
+            </a:pPr>
+            <a:r>
+              <a:rPr lang="en-US" sz="1200" b="1" dirty="0">
+                <a:solidFill>
+                  <a:srgbClr val="132A3A"/>
+                </a:solidFill>
+                <a:latin typeface="맑은 고딕" pitchFamily="34" charset="0"/>
+                <a:ea typeface="맑은 고딕" pitchFamily="34" charset="-122"/>
+                <a:cs typeface="맑은 고딕" pitchFamily="34" charset="-120"/>
+              </a:rPr>
+              <a:t>3F</a:t>
+            </a:r>
+            <a:endParaRPr lang="en-US" sz="1200" dirty="0"/>
+          </a:p>
+        </p:txBody>
+      </p:sp>
+      <p:sp>
+        <p:nvSpPr>
+          <p:cNvPr id="22" name="Shape 20"/>
+          <p:cNvSpPr/>
+          <p:nvPr/>
+        </p:nvSpPr>
+        <p:spPr>
+          <a:xfrm>
+            <a:off x="1033272" y="3380232"/>
+            <a:ext cx="2468880" cy="615696"/>
+          </a:xfrm>
+          <a:prstGeom prst="rect">
+            <a:avLst/>
+          </a:prstGeom>
+          <a:solidFill>
+            <a:srgbClr val="E2E8F0"/>
+          </a:solidFill>
+          <a:ln w="13970">
+            <a:solidFill>
+              <a:srgbClr val="5B6B73"/>
+            </a:solidFill>
+            <a:prstDash val="solid"/>
+          </a:ln>
+        </p:spPr>
+      </p:sp>
+      <p:sp>
+        <p:nvSpPr>
+          <p:cNvPr id="23" name="Text 21"/>
+          <p:cNvSpPr/>
+          <p:nvPr/>
+        </p:nvSpPr>
+        <p:spPr>
+          <a:xfrm>
+            <a:off x="1069848" y="3371088"/>
+            <a:ext cx="2395728" cy="633984"/>
+          </a:xfrm>
+          <a:prstGeom prst="rect">
+            <a:avLst/>
+          </a:prstGeom>
+          <a:noFill/>
+          <a:ln/>
+        </p:spPr>
+        <p:txBody>
+          <a:bodyPr wrap="square" rtlCol="0" anchor="ctr"/>
+          <a:lstStyle/>
+          <a:p>
+            <a:pPr algn="ctr" indent="0" marL="0">
+              <a:buNone/>
+            </a:pPr>
+            <a:r>
+              <a:rPr lang="en-US" sz="1000" dirty="0">
+                <a:solidFill>
+                  <a:srgbClr val="3A3A3A"/>
+                </a:solidFill>
+                <a:latin typeface="맑은 고딕" pitchFamily="34" charset="0"/>
+                <a:ea typeface="맑은 고딕" pitchFamily="34" charset="-122"/>
+                <a:cs typeface="맑은 고딕" pitchFamily="34" charset="-120"/>
+              </a:rPr>
+              <a:t>헬쓰장</a:t>
+            </a:r>
+            <a:endParaRPr lang="en-US" sz="1000" dirty="0"/>
+          </a:p>
+        </p:txBody>
+      </p:sp>
+      <p:sp>
+        <p:nvSpPr>
+          <p:cNvPr id="24" name="Text 22"/>
+          <p:cNvSpPr/>
+          <p:nvPr/>
+        </p:nvSpPr>
+        <p:spPr>
+          <a:xfrm>
+            <a:off x="502920" y="2682240"/>
+            <a:ext cx="475488" cy="670560"/>
+          </a:xfrm>
+          <a:prstGeom prst="rect">
+            <a:avLst/>
+          </a:prstGeom>
+          <a:noFill/>
+          <a:ln/>
+        </p:spPr>
+        <p:txBody>
+          <a:bodyPr wrap="square" rtlCol="0" anchor="ctr"/>
+          <a:lstStyle/>
+          <a:p>
+            <a:pPr algn="r" indent="0" marL="0">
+              <a:buNone/>
+            </a:pPr>
+            <a:r>
+              <a:rPr lang="en-US" sz="1200" b="1" dirty="0">
+                <a:solidFill>
+                  <a:srgbClr val="132A3A"/>
+                </a:solidFill>
+                <a:latin typeface="맑은 고딕" pitchFamily="34" charset="0"/>
+                <a:ea typeface="맑은 고딕" pitchFamily="34" charset="-122"/>
+                <a:cs typeface="맑은 고딕" pitchFamily="34" charset="-120"/>
+              </a:rPr>
+              <a:t>4F</a:t>
+            </a:r>
+            <a:endParaRPr lang="en-US" sz="1200" dirty="0"/>
+          </a:p>
+        </p:txBody>
+      </p:sp>
+      <p:sp>
+        <p:nvSpPr>
+          <p:cNvPr id="25" name="Shape 23"/>
+          <p:cNvSpPr/>
+          <p:nvPr/>
+        </p:nvSpPr>
+        <p:spPr>
+          <a:xfrm>
+            <a:off x="1033272" y="2709672"/>
+            <a:ext cx="1234440" cy="615696"/>
+          </a:xfrm>
+          <a:prstGeom prst="rect">
+            <a:avLst/>
+          </a:prstGeom>
+          <a:solidFill>
+            <a:srgbClr val="E2E8F0"/>
+          </a:solidFill>
+          <a:ln w="13970">
+            <a:solidFill>
+              <a:srgbClr val="5B6B73"/>
+            </a:solidFill>
+            <a:prstDash val="solid"/>
+          </a:ln>
+        </p:spPr>
+      </p:sp>
+      <p:sp>
+        <p:nvSpPr>
+          <p:cNvPr id="26" name="Text 24"/>
+          <p:cNvSpPr/>
+          <p:nvPr/>
+        </p:nvSpPr>
+        <p:spPr>
+          <a:xfrm>
+            <a:off x="1069848" y="2700528"/>
+            <a:ext cx="1161288" cy="633984"/>
+          </a:xfrm>
+          <a:prstGeom prst="rect">
+            <a:avLst/>
+          </a:prstGeom>
+          <a:noFill/>
+          <a:ln/>
+        </p:spPr>
+        <p:txBody>
+          <a:bodyPr wrap="square" rtlCol="0" anchor="ctr"/>
+          <a:lstStyle/>
+          <a:p>
+            <a:pPr algn="ctr" indent="0" marL="0">
+              <a:buNone/>
+            </a:pPr>
+            <a:r>
+              <a:rPr lang="en-US" sz="1000" dirty="0">
+                <a:solidFill>
+                  <a:srgbClr val="3A3A3A"/>
+                </a:solidFill>
+                <a:latin typeface="맑은 고딕" pitchFamily="34" charset="0"/>
+                <a:ea typeface="맑은 고딕" pitchFamily="34" charset="-122"/>
+                <a:cs typeface="맑은 고딕" pitchFamily="34" charset="-120"/>
+              </a:rPr>
+              <a:t>와인매장</a:t>
+            </a:r>
+            <a:endParaRPr lang="en-US" sz="1000" dirty="0"/>
+          </a:p>
+        </p:txBody>
+      </p:sp>
+      <p:sp>
+        <p:nvSpPr>
+          <p:cNvPr id="27" name="Shape 25"/>
+          <p:cNvSpPr/>
+          <p:nvPr/>
+        </p:nvSpPr>
+        <p:spPr>
+          <a:xfrm>
+            <a:off x="2267712" y="2709672"/>
+            <a:ext cx="1234440" cy="615696"/>
+          </a:xfrm>
+          <a:prstGeom prst="rect">
+            <a:avLst/>
+          </a:prstGeom>
+          <a:solidFill>
+            <a:srgbClr val="E2E8F0"/>
+          </a:solidFill>
+          <a:ln w="13970">
+            <a:solidFill>
+              <a:srgbClr val="5B6B73"/>
+            </a:solidFill>
+            <a:prstDash val="solid"/>
+          </a:ln>
+        </p:spPr>
+      </p:sp>
+      <p:sp>
+        <p:nvSpPr>
+          <p:cNvPr id="28" name="Text 26"/>
+          <p:cNvSpPr/>
+          <p:nvPr/>
+        </p:nvSpPr>
+        <p:spPr>
+          <a:xfrm>
+            <a:off x="2304288" y="2700528"/>
+            <a:ext cx="1161288" cy="633984"/>
+          </a:xfrm>
+          <a:prstGeom prst="rect">
+            <a:avLst/>
+          </a:prstGeom>
+          <a:noFill/>
+          <a:ln/>
+        </p:spPr>
+        <p:txBody>
+          <a:bodyPr wrap="square" rtlCol="0" anchor="ctr"/>
+          <a:lstStyle/>
+          <a:p>
+            <a:pPr algn="ctr" indent="0" marL="0">
+              <a:buNone/>
+            </a:pPr>
+            <a:r>
+              <a:rPr lang="en-US" sz="1000" dirty="0">
+                <a:solidFill>
+                  <a:srgbClr val="3A3A3A"/>
+                </a:solidFill>
+                <a:latin typeface="맑은 고딕" pitchFamily="34" charset="0"/>
+                <a:ea typeface="맑은 고딕" pitchFamily="34" charset="-122"/>
+                <a:cs typeface="맑은 고딕" pitchFamily="34" charset="-120"/>
+              </a:rPr>
+              <a:t>자가</a:t>
+            </a:r>
+            <a:endParaRPr lang="en-US" sz="1000" dirty="0"/>
+          </a:p>
+        </p:txBody>
+      </p:sp>
+      <p:sp>
+        <p:nvSpPr>
+          <p:cNvPr id="29" name="Text 27"/>
+          <p:cNvSpPr/>
+          <p:nvPr/>
+        </p:nvSpPr>
+        <p:spPr>
+          <a:xfrm>
+            <a:off x="502920" y="2011680"/>
+            <a:ext cx="475488" cy="670560"/>
+          </a:xfrm>
+          <a:prstGeom prst="rect">
+            <a:avLst/>
+          </a:prstGeom>
+          <a:noFill/>
+          <a:ln/>
+        </p:spPr>
+        <p:txBody>
+          <a:bodyPr wrap="square" rtlCol="0" anchor="ctr"/>
+          <a:lstStyle/>
+          <a:p>
+            <a:pPr algn="r" indent="0" marL="0">
+              <a:buNone/>
+            </a:pPr>
+            <a:r>
+              <a:rPr lang="en-US" sz="1200" b="1" dirty="0">
+                <a:solidFill>
+                  <a:srgbClr val="132A3A"/>
+                </a:solidFill>
+                <a:latin typeface="맑은 고딕" pitchFamily="34" charset="0"/>
+                <a:ea typeface="맑은 고딕" pitchFamily="34" charset="-122"/>
+                <a:cs typeface="맑은 고딕" pitchFamily="34" charset="-120"/>
+              </a:rPr>
+              <a:t>5F</a:t>
+            </a:r>
+            <a:endParaRPr lang="en-US" sz="1200" dirty="0"/>
+          </a:p>
+        </p:txBody>
+      </p:sp>
+      <p:sp>
+        <p:nvSpPr>
+          <p:cNvPr id="30" name="Shape 28"/>
+          <p:cNvSpPr/>
+          <p:nvPr/>
+        </p:nvSpPr>
+        <p:spPr>
+          <a:xfrm>
+            <a:off x="1033272" y="2039112"/>
+            <a:ext cx="2468880" cy="615696"/>
+          </a:xfrm>
+          <a:prstGeom prst="rect">
+            <a:avLst/>
+          </a:prstGeom>
+          <a:solidFill>
+            <a:srgbClr val="E2E8F0"/>
+          </a:solidFill>
+          <a:ln w="13970">
+            <a:solidFill>
+              <a:srgbClr val="5B6B73"/>
+            </a:solidFill>
+            <a:prstDash val="solid"/>
+          </a:ln>
+        </p:spPr>
+      </p:sp>
+      <p:sp>
+        <p:nvSpPr>
+          <p:cNvPr id="31" name="Text 29"/>
+          <p:cNvSpPr/>
+          <p:nvPr/>
+        </p:nvSpPr>
+        <p:spPr>
+          <a:xfrm>
+            <a:off x="1069848" y="2029968"/>
+            <a:ext cx="2395728" cy="633984"/>
+          </a:xfrm>
+          <a:prstGeom prst="rect">
+            <a:avLst/>
+          </a:prstGeom>
+          <a:noFill/>
+          <a:ln/>
+        </p:spPr>
+        <p:txBody>
+          <a:bodyPr wrap="square" rtlCol="0" anchor="ctr"/>
+          <a:lstStyle/>
+          <a:p>
+            <a:pPr algn="ctr" indent="0" marL="0">
+              <a:buNone/>
+            </a:pPr>
+            <a:r>
+              <a:rPr lang="en-US" sz="1000" dirty="0">
+                <a:solidFill>
+                  <a:srgbClr val="3A3A3A"/>
+                </a:solidFill>
+                <a:latin typeface="맑은 고딕" pitchFamily="34" charset="0"/>
+                <a:ea typeface="맑은 고딕" pitchFamily="34" charset="-122"/>
+                <a:cs typeface="맑은 고딕" pitchFamily="34" charset="-120"/>
+              </a:rPr>
+              <a:t>내과</a:t>
+            </a:r>
+            <a:endParaRPr lang="en-US" sz="1000" dirty="0"/>
+          </a:p>
+        </p:txBody>
+      </p:sp>
+      <p:sp>
+        <p:nvSpPr>
+          <p:cNvPr id="32" name="Text 30"/>
           <p:cNvSpPr/>
           <p:nvPr/>
         </p:nvSpPr>
         <p:spPr>
           <a:xfrm>
             <a:off x="502920" y="6080760"/>
-            <a:ext cx="2926080" cy="228600"/>
+            <a:ext cx="3108960" cy="228600"/>
           </a:xfrm>
           <a:prstGeom prst="rect">
             <a:avLst/>
@@ -8987,23 +8674,26 @@
           </p:nvPr>
         </p:nvGraphicFramePr>
         <p:xfrm>
-          <a:off x="3749040" y="1645920"/>
-          <a:ext cx="6805879" cy="914400"/>
+          <a:off x="3886200" y="1645920"/>
+          <a:ext cx="7674559" cy="914400"/>
         </p:xfrm>
         <a:graphic>
           <a:graphicData uri="http://schemas.openxmlformats.org/drawingml/2006/table">
             <a:tbl>
               <a:tblPr/>
               <a:tblGrid>
-                <a:gridCol w="457200"/>
-                <a:gridCol w="457200"/>
-                <a:gridCol w="868680"/>
-                <a:gridCol w="1188720"/>
-                <a:gridCol w="749808"/>
-                <a:gridCol w="749808"/>
-                <a:gridCol w="658368"/>
-                <a:gridCol w="658368"/>
-                <a:gridCol w="1161288"/>
+                <a:gridCol w="411480"/>
+                <a:gridCol w="411480"/>
+                <a:gridCol w="640080"/>
+                <a:gridCol w="1051560"/>
+                <a:gridCol w="640080"/>
+                <a:gridCol w="640080"/>
+                <a:gridCol w="502920"/>
+                <a:gridCol w="640080"/>
+                <a:gridCol w="640080"/>
+                <a:gridCol w="640080"/>
+                <a:gridCol w="640080"/>
+                <a:gridCol w="850392"/>
               </a:tblGrid>
               <a:tr h="320040">
                 <a:tc>
@@ -9015,14 +8705,14 @@
                         <a:buNone/>
                       </a:pPr>
                       <a:r>
-                        <a:rPr lang="en-US" sz="1000" b="1" dirty="0">
+                        <a:rPr lang="en-US" sz="900" b="1" dirty="0">
                           <a:solidFill>
                             <a:srgbClr val="FFFFFF"/>
                           </a:solidFill>
                         </a:rPr>
                         <a:t>층</a:t>
                       </a:r>
-                      <a:endParaRPr lang="en-US" sz="1000" dirty="0"/>
+                      <a:endParaRPr lang="en-US" sz="900" dirty="0"/>
                     </a:p>
                   </a:txBody>
                   <a:tcPr marL="91440" marR="91440" marT="45720" marB="45720" anchor="ctr">
@@ -9076,14 +8766,14 @@
                         <a:buNone/>
                       </a:pPr>
                       <a:r>
-                        <a:rPr lang="en-US" sz="1000" b="1" dirty="0">
+                        <a:rPr lang="en-US" sz="900" b="1" dirty="0">
                           <a:solidFill>
                             <a:srgbClr val="FFFFFF"/>
                           </a:solidFill>
                         </a:rPr>
                         <a:t>호실</a:t>
                       </a:r>
-                      <a:endParaRPr lang="en-US" sz="1000" dirty="0"/>
+                      <a:endParaRPr lang="en-US" sz="900" dirty="0"/>
                     </a:p>
                   </a:txBody>
                   <a:tcPr marL="91440" marR="91440" marT="45720" marB="45720" anchor="ctr">
@@ -9137,14 +8827,14 @@
                         <a:buNone/>
                       </a:pPr>
                       <a:r>
-                        <a:rPr lang="en-US" sz="1000" b="1" dirty="0">
+                        <a:rPr lang="en-US" sz="900" b="1" dirty="0">
                           <a:solidFill>
                             <a:srgbClr val="FFFFFF"/>
                           </a:solidFill>
                         </a:rPr>
-                        <a:t>용도/업종</a:t>
+                        <a:t>용도</a:t>
                       </a:r>
-                      <a:endParaRPr lang="en-US" sz="1000" dirty="0"/>
+                      <a:endParaRPr lang="en-US" sz="900" dirty="0"/>
                     </a:p>
                   </a:txBody>
                   <a:tcPr marL="91440" marR="91440" marT="45720" marB="45720" anchor="ctr">
@@ -9198,14 +8888,14 @@
                         <a:buNone/>
                       </a:pPr>
                       <a:r>
-                        <a:rPr lang="en-US" sz="1000" b="1" dirty="0">
+                        <a:rPr lang="en-US" sz="900" b="1" dirty="0">
                           <a:solidFill>
                             <a:srgbClr val="FFFFFF"/>
                           </a:solidFill>
                         </a:rPr>
                         <a:t>임차인</a:t>
                       </a:r>
-                      <a:endParaRPr lang="en-US" sz="1000" dirty="0"/>
+                      <a:endParaRPr lang="en-US" sz="900" dirty="0"/>
                     </a:p>
                   </a:txBody>
                   <a:tcPr marL="91440" marR="91440" marT="45720" marB="45720" anchor="ctr">
@@ -9259,14 +8949,14 @@
                         <a:buNone/>
                       </a:pPr>
                       <a:r>
-                        <a:rPr lang="en-US" sz="1000" b="1" dirty="0">
+                        <a:rPr lang="en-US" sz="900" b="1" dirty="0">
                           <a:solidFill>
                             <a:srgbClr val="FFFFFF"/>
                           </a:solidFill>
                         </a:rPr>
-                        <a:t>전용면적(㎡)</a:t>
+                        <a:t>임대(㎡)</a:t>
                       </a:r>
-                      <a:endParaRPr lang="en-US" sz="1000" dirty="0"/>
+                      <a:endParaRPr lang="en-US" sz="900" dirty="0"/>
                     </a:p>
                   </a:txBody>
                   <a:tcPr marL="91440" marR="91440" marT="45720" marB="45720" anchor="ctr">
@@ -9320,14 +9010,14 @@
                         <a:buNone/>
                       </a:pPr>
                       <a:r>
-                        <a:rPr lang="en-US" sz="1000" b="1" dirty="0">
+                        <a:rPr lang="en-US" sz="900" b="1" dirty="0">
                           <a:solidFill>
                             <a:srgbClr val="FFFFFF"/>
                           </a:solidFill>
                         </a:rPr>
-                        <a:t>보증금(만원)</a:t>
+                        <a:t>전용(㎡)</a:t>
                       </a:r>
-                      <a:endParaRPr lang="en-US" sz="1000" dirty="0"/>
+                      <a:endParaRPr lang="en-US" sz="900" dirty="0"/>
                     </a:p>
                   </a:txBody>
                   <a:tcPr marL="91440" marR="91440" marT="45720" marB="45720" anchor="ctr">
@@ -9381,14 +9071,14 @@
                         <a:buNone/>
                       </a:pPr>
                       <a:r>
-                        <a:rPr lang="en-US" sz="1000" b="1" dirty="0">
+                        <a:rPr lang="en-US" sz="900" b="1" dirty="0">
                           <a:solidFill>
                             <a:srgbClr val="FFFFFF"/>
                           </a:solidFill>
                         </a:rPr>
-                        <a:t>월세(만원)</a:t>
+                        <a:t>전용률</a:t>
                       </a:r>
-                      <a:endParaRPr lang="en-US" sz="1000" dirty="0"/>
+                      <a:endParaRPr lang="en-US" sz="900" dirty="0"/>
                     </a:p>
                   </a:txBody>
                   <a:tcPr marL="91440" marR="91440" marT="45720" marB="45720" anchor="ctr">
@@ -9442,14 +9132,14 @@
                         <a:buNone/>
                       </a:pPr>
                       <a:r>
-                        <a:rPr lang="en-US" sz="1000" b="1" dirty="0">
+                        <a:rPr lang="en-US" sz="900" b="1" dirty="0">
                           <a:solidFill>
                             <a:srgbClr val="FFFFFF"/>
                           </a:solidFill>
                         </a:rPr>
-                        <a:t>계약종료</a:t>
+                        <a:t>보증금</a:t>
                       </a:r>
-                      <a:endParaRPr lang="en-US" sz="1000" dirty="0"/>
+                      <a:endParaRPr lang="en-US" sz="900" dirty="0"/>
                     </a:p>
                   </a:txBody>
                   <a:tcPr marL="91440" marR="91440" marT="45720" marB="45720" anchor="ctr">
@@ -9503,14 +9193,197 @@
                         <a:buNone/>
                       </a:pPr>
                       <a:r>
-                        <a:rPr lang="en-US" sz="1000" b="1" dirty="0">
+                        <a:rPr lang="en-US" sz="900" b="1" dirty="0">
                           <a:solidFill>
                             <a:srgbClr val="FFFFFF"/>
                           </a:solidFill>
                         </a:rPr>
-                        <a:t>비고</a:t>
+                        <a:t>월세</a:t>
                       </a:r>
-                      <a:endParaRPr lang="en-US" sz="1000" dirty="0"/>
+                      <a:endParaRPr lang="en-US" sz="900" dirty="0"/>
+                    </a:p>
+                  </a:txBody>
+                  <a:tcPr marL="91440" marR="91440" marT="45720" marB="45720" anchor="ctr">
+                    <a:lnL w="12700" cap="flat" cmpd="sng" algn="ctr">
+                      <a:solidFill>
+                        <a:srgbClr val="CBD5E0"/>
+                      </a:solidFill>
+                      <a:prstDash val="solid"/>
+                      <a:round/>
+                      <a:headEnd type="none" w="med" len="med"/>
+                      <a:tailEnd type="none" w="med" len="med"/>
+                    </a:lnL>
+                    <a:lnR w="12700" cap="flat" cmpd="sng" algn="ctr">
+                      <a:solidFill>
+                        <a:srgbClr val="CBD5E0"/>
+                      </a:solidFill>
+                      <a:prstDash val="solid"/>
+                      <a:round/>
+                      <a:headEnd type="none" w="med" len="med"/>
+                      <a:tailEnd type="none" w="med" len="med"/>
+                    </a:lnR>
+                    <a:lnT w="12700" cap="flat" cmpd="sng" algn="ctr">
+                      <a:solidFill>
+                        <a:srgbClr val="CBD5E0"/>
+                      </a:solidFill>
+                      <a:prstDash val="solid"/>
+                      <a:round/>
+                      <a:headEnd type="none" w="med" len="med"/>
+                      <a:tailEnd type="none" w="med" len="med"/>
+                    </a:lnT>
+                    <a:lnB w="12700" cap="flat" cmpd="sng" algn="ctr">
+                      <a:solidFill>
+                        <a:srgbClr val="CBD5E0"/>
+                      </a:solidFill>
+                      <a:prstDash val="solid"/>
+                      <a:round/>
+                      <a:headEnd type="none" w="med" len="med"/>
+                      <a:tailEnd type="none" w="med" len="med"/>
+                    </a:lnB>
+                    <a:solidFill>
+                      <a:srgbClr val="132A3A"/>
+                    </a:solidFill>
+                  </a:tcPr>
+                </a:tc>
+                <a:tc>
+                  <a:txBody>
+                    <a:bodyPr/>
+                    <a:lstStyle/>
+                    <a:p>
+                      <a:pPr algn="ctr" indent="0" marL="0">
+                        <a:buNone/>
+                      </a:pPr>
+                      <a:r>
+                        <a:rPr lang="en-US" sz="900" b="1" dirty="0">
+                          <a:solidFill>
+                            <a:srgbClr val="FFFFFF"/>
+                          </a:solidFill>
+                        </a:rPr>
+                        <a:t>관리비</a:t>
+                      </a:r>
+                      <a:endParaRPr lang="en-US" sz="900" dirty="0"/>
+                    </a:p>
+                  </a:txBody>
+                  <a:tcPr marL="91440" marR="91440" marT="45720" marB="45720" anchor="ctr">
+                    <a:lnL w="12700" cap="flat" cmpd="sng" algn="ctr">
+                      <a:solidFill>
+                        <a:srgbClr val="CBD5E0"/>
+                      </a:solidFill>
+                      <a:prstDash val="solid"/>
+                      <a:round/>
+                      <a:headEnd type="none" w="med" len="med"/>
+                      <a:tailEnd type="none" w="med" len="med"/>
+                    </a:lnL>
+                    <a:lnR w="12700" cap="flat" cmpd="sng" algn="ctr">
+                      <a:solidFill>
+                        <a:srgbClr val="CBD5E0"/>
+                      </a:solidFill>
+                      <a:prstDash val="solid"/>
+                      <a:round/>
+                      <a:headEnd type="none" w="med" len="med"/>
+                      <a:tailEnd type="none" w="med" len="med"/>
+                    </a:lnR>
+                    <a:lnT w="12700" cap="flat" cmpd="sng" algn="ctr">
+                      <a:solidFill>
+                        <a:srgbClr val="CBD5E0"/>
+                      </a:solidFill>
+                      <a:prstDash val="solid"/>
+                      <a:round/>
+                      <a:headEnd type="none" w="med" len="med"/>
+                      <a:tailEnd type="none" w="med" len="med"/>
+                    </a:lnT>
+                    <a:lnB w="12700" cap="flat" cmpd="sng" algn="ctr">
+                      <a:solidFill>
+                        <a:srgbClr val="CBD5E0"/>
+                      </a:solidFill>
+                      <a:prstDash val="solid"/>
+                      <a:round/>
+                      <a:headEnd type="none" w="med" len="med"/>
+                      <a:tailEnd type="none" w="med" len="med"/>
+                    </a:lnB>
+                    <a:solidFill>
+                      <a:srgbClr val="132A3A"/>
+                    </a:solidFill>
+                  </a:tcPr>
+                </a:tc>
+                <a:tc>
+                  <a:txBody>
+                    <a:bodyPr/>
+                    <a:lstStyle/>
+                    <a:p>
+                      <a:pPr algn="ctr" indent="0" marL="0">
+                        <a:buNone/>
+                      </a:pPr>
+                      <a:r>
+                        <a:rPr lang="en-US" sz="900" b="1" dirty="0">
+                          <a:solidFill>
+                            <a:srgbClr val="FFFFFF"/>
+                          </a:solidFill>
+                        </a:rPr>
+                        <a:t>NOC</a:t>
+                      </a:r>
+                      <a:endParaRPr lang="en-US" sz="900" dirty="0"/>
+                    </a:p>
+                  </a:txBody>
+                  <a:tcPr marL="91440" marR="91440" marT="45720" marB="45720" anchor="ctr">
+                    <a:lnL w="12700" cap="flat" cmpd="sng" algn="ctr">
+                      <a:solidFill>
+                        <a:srgbClr val="CBD5E0"/>
+                      </a:solidFill>
+                      <a:prstDash val="solid"/>
+                      <a:round/>
+                      <a:headEnd type="none" w="med" len="med"/>
+                      <a:tailEnd type="none" w="med" len="med"/>
+                    </a:lnL>
+                    <a:lnR w="12700" cap="flat" cmpd="sng" algn="ctr">
+                      <a:solidFill>
+                        <a:srgbClr val="CBD5E0"/>
+                      </a:solidFill>
+                      <a:prstDash val="solid"/>
+                      <a:round/>
+                      <a:headEnd type="none" w="med" len="med"/>
+                      <a:tailEnd type="none" w="med" len="med"/>
+                    </a:lnR>
+                    <a:lnT w="12700" cap="flat" cmpd="sng" algn="ctr">
+                      <a:solidFill>
+                        <a:srgbClr val="CBD5E0"/>
+                      </a:solidFill>
+                      <a:prstDash val="solid"/>
+                      <a:round/>
+                      <a:headEnd type="none" w="med" len="med"/>
+                      <a:tailEnd type="none" w="med" len="med"/>
+                    </a:lnT>
+                    <a:lnB w="12700" cap="flat" cmpd="sng" algn="ctr">
+                      <a:solidFill>
+                        <a:srgbClr val="CBD5E0"/>
+                      </a:solidFill>
+                      <a:prstDash val="solid"/>
+                      <a:round/>
+                      <a:headEnd type="none" w="med" len="med"/>
+                      <a:tailEnd type="none" w="med" len="med"/>
+                    </a:lnB>
+                    <a:solidFill>
+                      <a:srgbClr val="132A3A"/>
+                    </a:solidFill>
+                  </a:tcPr>
+                </a:tc>
+                <a:tc>
+                  <a:txBody>
+                    <a:bodyPr/>
+                    <a:lstStyle/>
+                    <a:p>
+                      <a:pPr algn="ctr" indent="0" marL="0">
+                        <a:buNone/>
+                      </a:pPr>
+                      <a:r>
+                        <a:rPr lang="en-US" sz="900" b="1" dirty="0">
+                          <a:solidFill>
+                            <a:srgbClr val="FFFFFF"/>
+                          </a:solidFill>
+                        </a:rPr>
+                        <a:t>만기일</a:t>
+                      </a:r>
+                      <a:endParaRPr lang="en-US" sz="900" dirty="0"/>
                     </a:p>
                   </a:txBody>
                   <a:tcPr marL="91440" marR="91440" marT="45720" marB="45720" anchor="ctr">
@@ -9846,7 +9719,143 @@
                           <a:ea typeface="맑은 고딕" pitchFamily="34" charset="-122"/>
                           <a:cs typeface="맑은 고딕" pitchFamily="34" charset="-120"/>
                         </a:rPr>
-                        <a:t>317.4</a:t>
+                        <a:t>-</a:t>
+                      </a:r>
+                      <a:endParaRPr lang="en-US" sz="850" dirty="0">
+                        <a:latin typeface="맑은 고딕" charset="0"/>
+                        <a:ea typeface="맑은 고딕" charset="0"/>
+                        <a:cs typeface="맑은 고딕" charset="0"/>
+                      </a:endParaRPr>
+                    </a:p>
+                  </a:txBody>
+                  <a:tcPr marL="91440" marR="91440" marT="45720" marB="45720" anchor="ctr">
+                    <a:lnL w="12700" cap="flat" cmpd="sng" algn="ctr">
+                      <a:solidFill>
+                        <a:srgbClr val="CBD5E0"/>
+                      </a:solidFill>
+                      <a:prstDash val="solid"/>
+                      <a:round/>
+                      <a:headEnd type="none" w="med" len="med"/>
+                      <a:tailEnd type="none" w="med" len="med"/>
+                    </a:lnL>
+                    <a:lnR w="12700" cap="flat" cmpd="sng" algn="ctr">
+                      <a:solidFill>
+                        <a:srgbClr val="CBD5E0"/>
+                      </a:solidFill>
+                      <a:prstDash val="solid"/>
+                      <a:round/>
+                      <a:headEnd type="none" w="med" len="med"/>
+                      <a:tailEnd type="none" w="med" len="med"/>
+                    </a:lnR>
+                    <a:lnT w="12700" cap="flat" cmpd="sng" algn="ctr">
+                      <a:solidFill>
+                        <a:srgbClr val="CBD5E0"/>
+                      </a:solidFill>
+                      <a:prstDash val="solid"/>
+                      <a:round/>
+                      <a:headEnd type="none" w="med" len="med"/>
+                      <a:tailEnd type="none" w="med" len="med"/>
+                    </a:lnT>
+                    <a:lnB w="12700" cap="flat" cmpd="sng" algn="ctr">
+                      <a:solidFill>
+                        <a:srgbClr val="CBD5E0"/>
+                      </a:solidFill>
+                      <a:prstDash val="solid"/>
+                      <a:round/>
+                      <a:headEnd type="none" w="med" len="med"/>
+                      <a:tailEnd type="none" w="med" len="med"/>
+                    </a:lnB>
+                    <a:solidFill>
+                      <a:srgbClr val="F3F6F7"/>
+                    </a:solidFill>
+                  </a:tcPr>
+                </a:tc>
+                <a:tc>
+                  <a:txBody>
+                    <a:bodyPr/>
+                    <a:lstStyle/>
+                    <a:p>
+                      <a:pPr algn="r" indent="0" marL="0">
+                        <a:buNone/>
+                      </a:pPr>
+                      <a:r>
+                        <a:rPr lang="en-US" sz="850" dirty="0">
+                          <a:solidFill>
+                            <a:srgbClr val="5B6B73"/>
+                          </a:solidFill>
+                          <a:latin typeface="맑은 고딕" pitchFamily="34" charset="0"/>
+                          <a:ea typeface="맑은 고딕" pitchFamily="34" charset="-122"/>
+                          <a:cs typeface="맑은 고딕" pitchFamily="34" charset="-120"/>
+                        </a:rPr>
+                        <a:t>-</a:t>
+                      </a:r>
+                      <a:endParaRPr lang="en-US" sz="850" dirty="0">
+                        <a:latin typeface="맑은 고딕" charset="0"/>
+                        <a:ea typeface="맑은 고딕" charset="0"/>
+                        <a:cs typeface="맑은 고딕" charset="0"/>
+                      </a:endParaRPr>
+                    </a:p>
+                  </a:txBody>
+                  <a:tcPr marL="91440" marR="91440" marT="45720" marB="45720" anchor="ctr">
+                    <a:lnL w="12700" cap="flat" cmpd="sng" algn="ctr">
+                      <a:solidFill>
+                        <a:srgbClr val="CBD5E0"/>
+                      </a:solidFill>
+                      <a:prstDash val="solid"/>
+                      <a:round/>
+                      <a:headEnd type="none" w="med" len="med"/>
+                      <a:tailEnd type="none" w="med" len="med"/>
+                    </a:lnL>
+                    <a:lnR w="12700" cap="flat" cmpd="sng" algn="ctr">
+                      <a:solidFill>
+                        <a:srgbClr val="CBD5E0"/>
+                      </a:solidFill>
+                      <a:prstDash val="solid"/>
+                      <a:round/>
+                      <a:headEnd type="none" w="med" len="med"/>
+                      <a:tailEnd type="none" w="med" len="med"/>
+                    </a:lnR>
+                    <a:lnT w="12700" cap="flat" cmpd="sng" algn="ctr">
+                      <a:solidFill>
+                        <a:srgbClr val="CBD5E0"/>
+                      </a:solidFill>
+                      <a:prstDash val="solid"/>
+                      <a:round/>
+                      <a:headEnd type="none" w="med" len="med"/>
+                      <a:tailEnd type="none" w="med" len="med"/>
+                    </a:lnT>
+                    <a:lnB w="12700" cap="flat" cmpd="sng" algn="ctr">
+                      <a:solidFill>
+                        <a:srgbClr val="CBD5E0"/>
+                      </a:solidFill>
+                      <a:prstDash val="solid"/>
+                      <a:round/>
+                      <a:headEnd type="none" w="med" len="med"/>
+                      <a:tailEnd type="none" w="med" len="med"/>
+                    </a:lnB>
+                    <a:solidFill>
+                      <a:srgbClr val="F3F6F7"/>
+                    </a:solidFill>
+                  </a:tcPr>
+                </a:tc>
+                <a:tc>
+                  <a:txBody>
+                    <a:bodyPr/>
+                    <a:lstStyle/>
+                    <a:p>
+                      <a:pPr algn="r" indent="0" marL="0">
+                        <a:buNone/>
+                      </a:pPr>
+                      <a:r>
+                        <a:rPr lang="en-US" sz="850" dirty="0">
+                          <a:solidFill>
+                            <a:srgbClr val="5B6B73"/>
+                          </a:solidFill>
+                          <a:latin typeface="맑은 고딕" pitchFamily="34" charset="0"/>
+                          <a:ea typeface="맑은 고딕" pitchFamily="34" charset="-122"/>
+                          <a:cs typeface="맑은 고딕" pitchFamily="34" charset="-120"/>
+                        </a:rPr>
+                        <a:t>-</a:t>
                       </a:r>
                       <a:endParaRPr lang="en-US" sz="850" dirty="0">
                         <a:latin typeface="맑은 고딕" charset="0"/>
@@ -9970,7 +9979,7 @@
                     <a:bodyPr/>
                     <a:lstStyle/>
                     <a:p>
-                      <a:pPr algn="r" indent="0" marL="0">
+                      <a:pPr algn="ctr" indent="0" marL="0">
                         <a:buNone/>
                       </a:pPr>
                       <a:r>
@@ -9984,199 +9993,6 @@
                         </a:rPr>
                         <a:t>0</a:t>
                       </a:r>
-                      <a:endParaRPr lang="en-US" sz="850" dirty="0">
-                        <a:latin typeface="맑은 고딕" charset="0"/>
-                        <a:ea typeface="맑은 고딕" charset="0"/>
-                        <a:cs typeface="맑은 고딕" charset="0"/>
-                      </a:endParaRPr>
-                    </a:p>
-                  </a:txBody>
-                  <a:tcPr marL="91440" marR="91440" marT="45720" marB="45720" anchor="ctr">
-                    <a:lnL w="12700" cap="flat" cmpd="sng" algn="ctr">
-                      <a:solidFill>
-                        <a:srgbClr val="CBD5E0"/>
-                      </a:solidFill>
-                      <a:prstDash val="solid"/>
-                      <a:round/>
-                      <a:headEnd type="none" w="med" len="med"/>
-                      <a:tailEnd type="none" w="med" len="med"/>
-                    </a:lnL>
-                    <a:lnR w="12700" cap="flat" cmpd="sng" algn="ctr">
-                      <a:solidFill>
-                        <a:srgbClr val="CBD5E0"/>
-                      </a:solidFill>
-                      <a:prstDash val="solid"/>
-                      <a:round/>
-                      <a:headEnd type="none" w="med" len="med"/>
-                      <a:tailEnd type="none" w="med" len="med"/>
-                    </a:lnR>
-                    <a:lnT w="12700" cap="flat" cmpd="sng" algn="ctr">
-                      <a:solidFill>
-                        <a:srgbClr val="CBD5E0"/>
-                      </a:solidFill>
-                      <a:prstDash val="solid"/>
-                      <a:round/>
-                      <a:headEnd type="none" w="med" len="med"/>
-                      <a:tailEnd type="none" w="med" len="med"/>
-                    </a:lnT>
-                    <a:lnB w="12700" cap="flat" cmpd="sng" algn="ctr">
-                      <a:solidFill>
-                        <a:srgbClr val="CBD5E0"/>
-                      </a:solidFill>
-                      <a:prstDash val="solid"/>
-                      <a:round/>
-                      <a:headEnd type="none" w="med" len="med"/>
-                      <a:tailEnd type="none" w="med" len="med"/>
-                    </a:lnB>
-                    <a:solidFill>
-                      <a:srgbClr val="F3F6F7"/>
-                    </a:solidFill>
-                  </a:tcPr>
-                </a:tc>
-                <a:tc>
-                  <a:txBody>
-                    <a:bodyPr/>
-                    <a:lstStyle/>
-                    <a:p>
-                      <a:pPr algn="r" indent="0" marL="0">
-                        <a:buNone/>
-                      </a:pPr>
-                      <a:r>
-                        <a:rPr lang="en-US" sz="850" dirty="0">
-                          <a:solidFill>
-                            <a:srgbClr val="5B6B73"/>
-                          </a:solidFill>
-                          <a:latin typeface="맑은 고딕" pitchFamily="34" charset="0"/>
-                          <a:ea typeface="맑은 고딕" pitchFamily="34" charset="-122"/>
-                          <a:cs typeface="맑은 고딕" pitchFamily="34" charset="-120"/>
-                        </a:rPr>
-                        <a:t>-</a:t>
-                      </a:r>
-                      <a:endParaRPr lang="en-US" sz="850" dirty="0">
-                        <a:latin typeface="맑은 고딕" charset="0"/>
-                        <a:ea typeface="맑은 고딕" charset="0"/>
-                        <a:cs typeface="맑은 고딕" charset="0"/>
-                      </a:endParaRPr>
-                    </a:p>
-                  </a:txBody>
-                  <a:tcPr marL="91440" marR="91440" marT="45720" marB="45720" anchor="ctr">
-                    <a:lnL w="12700" cap="flat" cmpd="sng" algn="ctr">
-                      <a:solidFill>
-                        <a:srgbClr val="CBD5E0"/>
-                      </a:solidFill>
-                      <a:prstDash val="solid"/>
-                      <a:round/>
-                      <a:headEnd type="none" w="med" len="med"/>
-                      <a:tailEnd type="none" w="med" len="med"/>
-                    </a:lnL>
-                    <a:lnR w="12700" cap="flat" cmpd="sng" algn="ctr">
-                      <a:solidFill>
-                        <a:srgbClr val="CBD5E0"/>
-                      </a:solidFill>
-                      <a:prstDash val="solid"/>
-                      <a:round/>
-                      <a:headEnd type="none" w="med" len="med"/>
-                      <a:tailEnd type="none" w="med" len="med"/>
-                    </a:lnR>
-                    <a:lnT w="12700" cap="flat" cmpd="sng" algn="ctr">
-                      <a:solidFill>
-                        <a:srgbClr val="CBD5E0"/>
-                      </a:solidFill>
-                      <a:prstDash val="solid"/>
-                      <a:round/>
-                      <a:headEnd type="none" w="med" len="med"/>
-                      <a:tailEnd type="none" w="med" len="med"/>
-                    </a:lnT>
-                    <a:lnB w="12700" cap="flat" cmpd="sng" algn="ctr">
-                      <a:solidFill>
-                        <a:srgbClr val="CBD5E0"/>
-                      </a:solidFill>
-                      <a:prstDash val="solid"/>
-                      <a:round/>
-                      <a:headEnd type="none" w="med" len="med"/>
-                      <a:tailEnd type="none" w="med" len="med"/>
-                    </a:lnB>
-                    <a:solidFill>
-                      <a:srgbClr val="F3F6F7"/>
-                    </a:solidFill>
-                  </a:tcPr>
-                </a:tc>
-                <a:tc>
-                  <a:txBody>
-                    <a:bodyPr/>
-                    <a:lstStyle/>
-                    <a:p>
-                      <a:pPr algn="ctr" indent="0" marL="0">
-                        <a:buNone/>
-                      </a:pPr>
-                      <a:r>
-                        <a:rPr lang="en-US" sz="850" dirty="0">
-                          <a:solidFill>
-                            <a:srgbClr val="5B6B73"/>
-                          </a:solidFill>
-                          <a:latin typeface="맑은 고딕" pitchFamily="34" charset="0"/>
-                          <a:ea typeface="맑은 고딕" pitchFamily="34" charset="-122"/>
-                          <a:cs typeface="맑은 고딕" pitchFamily="34" charset="-120"/>
-                        </a:rPr>
-                        <a:t>자가사용</a:t>
-                      </a:r>
-                      <a:endParaRPr lang="en-US" sz="850" dirty="0">
-                        <a:latin typeface="맑은 고딕" charset="0"/>
-                        <a:ea typeface="맑은 고딕" charset="0"/>
-                        <a:cs typeface="맑은 고딕" charset="0"/>
-                      </a:endParaRPr>
-                    </a:p>
-                  </a:txBody>
-                  <a:tcPr marL="91440" marR="91440" marT="45720" marB="45720" anchor="ctr">
-                    <a:lnL w="12700" cap="flat" cmpd="sng" algn="ctr">
-                      <a:solidFill>
-                        <a:srgbClr val="CBD5E0"/>
-                      </a:solidFill>
-                      <a:prstDash val="solid"/>
-                      <a:round/>
-                      <a:headEnd type="none" w="med" len="med"/>
-                      <a:tailEnd type="none" w="med" len="med"/>
-                    </a:lnL>
-                    <a:lnR w="12700" cap="flat" cmpd="sng" algn="ctr">
-                      <a:solidFill>
-                        <a:srgbClr val="CBD5E0"/>
-                      </a:solidFill>
-                      <a:prstDash val="solid"/>
-                      <a:round/>
-                      <a:headEnd type="none" w="med" len="med"/>
-                      <a:tailEnd type="none" w="med" len="med"/>
-                    </a:lnR>
-                    <a:lnT w="12700" cap="flat" cmpd="sng" algn="ctr">
-                      <a:solidFill>
-                        <a:srgbClr val="CBD5E0"/>
-                      </a:solidFill>
-                      <a:prstDash val="solid"/>
-                      <a:round/>
-                      <a:headEnd type="none" w="med" len="med"/>
-                      <a:tailEnd type="none" w="med" len="med"/>
-                    </a:lnT>
-                    <a:lnB w="12700" cap="flat" cmpd="sng" algn="ctr">
-                      <a:solidFill>
-                        <a:srgbClr val="CBD5E0"/>
-                      </a:solidFill>
-                      <a:prstDash val="solid"/>
-                      <a:round/>
-                      <a:headEnd type="none" w="med" len="med"/>
-                      <a:tailEnd type="none" w="med" len="med"/>
-                    </a:lnB>
-                    <a:solidFill>
-                      <a:srgbClr val="F3F6F7"/>
-                    </a:solidFill>
-                  </a:tcPr>
-                </a:tc>
-                <a:tc>
-                  <a:txBody>
-                    <a:bodyPr/>
-                    <a:lstStyle/>
-                    <a:p>
-                      <a:pPr algn="ctr" indent="0" marL="0">
-                        <a:buNone/>
-                      </a:pPr>
                       <a:endParaRPr lang="en-US" sz="850" dirty="0">
                         <a:latin typeface="맑은 고딕" charset="0"/>
                         <a:ea typeface="맑은 고딕" charset="0"/>
@@ -10517,7 +10333,143 @@
                           <a:ea typeface="맑은 고딕" pitchFamily="34" charset="-122"/>
                           <a:cs typeface="맑은 고딕" pitchFamily="34" charset="-120"/>
                         </a:rPr>
-                        <a:t>78.3</a:t>
+                        <a:t>-</a:t>
+                      </a:r>
+                      <a:endParaRPr lang="en-US" sz="850" dirty="0">
+                        <a:latin typeface="맑은 고딕" charset="0"/>
+                        <a:ea typeface="맑은 고딕" charset="0"/>
+                        <a:cs typeface="맑은 고딕" charset="0"/>
+                      </a:endParaRPr>
+                    </a:p>
+                  </a:txBody>
+                  <a:tcPr marL="91440" marR="91440" marT="45720" marB="45720" anchor="ctr">
+                    <a:lnL w="12700" cap="flat" cmpd="sng" algn="ctr">
+                      <a:solidFill>
+                        <a:srgbClr val="CBD5E0"/>
+                      </a:solidFill>
+                      <a:prstDash val="solid"/>
+                      <a:round/>
+                      <a:headEnd type="none" w="med" len="med"/>
+                      <a:tailEnd type="none" w="med" len="med"/>
+                    </a:lnL>
+                    <a:lnR w="12700" cap="flat" cmpd="sng" algn="ctr">
+                      <a:solidFill>
+                        <a:srgbClr val="CBD5E0"/>
+                      </a:solidFill>
+                      <a:prstDash val="solid"/>
+                      <a:round/>
+                      <a:headEnd type="none" w="med" len="med"/>
+                      <a:tailEnd type="none" w="med" len="med"/>
+                    </a:lnR>
+                    <a:lnT w="12700" cap="flat" cmpd="sng" algn="ctr">
+                      <a:solidFill>
+                        <a:srgbClr val="CBD5E0"/>
+                      </a:solidFill>
+                      <a:prstDash val="solid"/>
+                      <a:round/>
+                      <a:headEnd type="none" w="med" len="med"/>
+                      <a:tailEnd type="none" w="med" len="med"/>
+                    </a:lnT>
+                    <a:lnB w="12700" cap="flat" cmpd="sng" algn="ctr">
+                      <a:solidFill>
+                        <a:srgbClr val="CBD5E0"/>
+                      </a:solidFill>
+                      <a:prstDash val="solid"/>
+                      <a:round/>
+                      <a:headEnd type="none" w="med" len="med"/>
+                      <a:tailEnd type="none" w="med" len="med"/>
+                    </a:lnB>
+                    <a:solidFill>
+                      <a:srgbClr val="F3F6F7"/>
+                    </a:solidFill>
+                  </a:tcPr>
+                </a:tc>
+                <a:tc>
+                  <a:txBody>
+                    <a:bodyPr/>
+                    <a:lstStyle/>
+                    <a:p>
+                      <a:pPr algn="r" indent="0" marL="0">
+                        <a:buNone/>
+                      </a:pPr>
+                      <a:r>
+                        <a:rPr lang="en-US" sz="850" dirty="0">
+                          <a:solidFill>
+                            <a:srgbClr val="2B2B2B"/>
+                          </a:solidFill>
+                          <a:latin typeface="맑은 고딕" pitchFamily="34" charset="0"/>
+                          <a:ea typeface="맑은 고딕" pitchFamily="34" charset="-122"/>
+                          <a:cs typeface="맑은 고딕" pitchFamily="34" charset="-120"/>
+                        </a:rPr>
+                        <a:t>-</a:t>
+                      </a:r>
+                      <a:endParaRPr lang="en-US" sz="850" dirty="0">
+                        <a:latin typeface="맑은 고딕" charset="0"/>
+                        <a:ea typeface="맑은 고딕" charset="0"/>
+                        <a:cs typeface="맑은 고딕" charset="0"/>
+                      </a:endParaRPr>
+                    </a:p>
+                  </a:txBody>
+                  <a:tcPr marL="91440" marR="91440" marT="45720" marB="45720" anchor="ctr">
+                    <a:lnL w="12700" cap="flat" cmpd="sng" algn="ctr">
+                      <a:solidFill>
+                        <a:srgbClr val="CBD5E0"/>
+                      </a:solidFill>
+                      <a:prstDash val="solid"/>
+                      <a:round/>
+                      <a:headEnd type="none" w="med" len="med"/>
+                      <a:tailEnd type="none" w="med" len="med"/>
+                    </a:lnL>
+                    <a:lnR w="12700" cap="flat" cmpd="sng" algn="ctr">
+                      <a:solidFill>
+                        <a:srgbClr val="CBD5E0"/>
+                      </a:solidFill>
+                      <a:prstDash val="solid"/>
+                      <a:round/>
+                      <a:headEnd type="none" w="med" len="med"/>
+                      <a:tailEnd type="none" w="med" len="med"/>
+                    </a:lnR>
+                    <a:lnT w="12700" cap="flat" cmpd="sng" algn="ctr">
+                      <a:solidFill>
+                        <a:srgbClr val="CBD5E0"/>
+                      </a:solidFill>
+                      <a:prstDash val="solid"/>
+                      <a:round/>
+                      <a:headEnd type="none" w="med" len="med"/>
+                      <a:tailEnd type="none" w="med" len="med"/>
+                    </a:lnT>
+                    <a:lnB w="12700" cap="flat" cmpd="sng" algn="ctr">
+                      <a:solidFill>
+                        <a:srgbClr val="CBD5E0"/>
+                      </a:solidFill>
+                      <a:prstDash val="solid"/>
+                      <a:round/>
+                      <a:headEnd type="none" w="med" len="med"/>
+                      <a:tailEnd type="none" w="med" len="med"/>
+                    </a:lnB>
+                    <a:solidFill>
+                      <a:srgbClr val="F3F6F7"/>
+                    </a:solidFill>
+                  </a:tcPr>
+                </a:tc>
+                <a:tc>
+                  <a:txBody>
+                    <a:bodyPr/>
+                    <a:lstStyle/>
+                    <a:p>
+                      <a:pPr algn="r" indent="0" marL="0">
+                        <a:buNone/>
+                      </a:pPr>
+                      <a:r>
+                        <a:rPr lang="en-US" sz="850" dirty="0">
+                          <a:solidFill>
+                            <a:srgbClr val="2B2B2B"/>
+                          </a:solidFill>
+                          <a:latin typeface="맑은 고딕" pitchFamily="34" charset="0"/>
+                          <a:ea typeface="맑은 고딕" pitchFamily="34" charset="-122"/>
+                          <a:cs typeface="맑은 고딕" pitchFamily="34" charset="-120"/>
+                        </a:rPr>
+                        <a:t>-</a:t>
                       </a:r>
                       <a:endParaRPr lang="en-US" sz="850" dirty="0">
                         <a:latin typeface="맑은 고딕" charset="0"/>
@@ -10641,7 +10593,7 @@
                     <a:bodyPr/>
                     <a:lstStyle/>
                     <a:p>
-                      <a:pPr algn="r" indent="0" marL="0">
+                      <a:pPr algn="ctr" indent="0" marL="0">
                         <a:buNone/>
                       </a:pPr>
                       <a:r>
@@ -10655,199 +10607,6 @@
                         </a:rPr>
                         <a:t>183</a:t>
                       </a:r>
-                      <a:endParaRPr lang="en-US" sz="850" dirty="0">
-                        <a:latin typeface="맑은 고딕" charset="0"/>
-                        <a:ea typeface="맑은 고딕" charset="0"/>
-                        <a:cs typeface="맑은 고딕" charset="0"/>
-                      </a:endParaRPr>
-                    </a:p>
-                  </a:txBody>
-                  <a:tcPr marL="91440" marR="91440" marT="45720" marB="45720" anchor="ctr">
-                    <a:lnL w="12700" cap="flat" cmpd="sng" algn="ctr">
-                      <a:solidFill>
-                        <a:srgbClr val="CBD5E0"/>
-                      </a:solidFill>
-                      <a:prstDash val="solid"/>
-                      <a:round/>
-                      <a:headEnd type="none" w="med" len="med"/>
-                      <a:tailEnd type="none" w="med" len="med"/>
-                    </a:lnL>
-                    <a:lnR w="12700" cap="flat" cmpd="sng" algn="ctr">
-                      <a:solidFill>
-                        <a:srgbClr val="CBD5E0"/>
-                      </a:solidFill>
-                      <a:prstDash val="solid"/>
-                      <a:round/>
-                      <a:headEnd type="none" w="med" len="med"/>
-                      <a:tailEnd type="none" w="med" len="med"/>
-                    </a:lnR>
-                    <a:lnT w="12700" cap="flat" cmpd="sng" algn="ctr">
-                      <a:solidFill>
-                        <a:srgbClr val="CBD5E0"/>
-                      </a:solidFill>
-                      <a:prstDash val="solid"/>
-                      <a:round/>
-                      <a:headEnd type="none" w="med" len="med"/>
-                      <a:tailEnd type="none" w="med" len="med"/>
-                    </a:lnT>
-                    <a:lnB w="12700" cap="flat" cmpd="sng" algn="ctr">
-                      <a:solidFill>
-                        <a:srgbClr val="CBD5E0"/>
-                      </a:solidFill>
-                      <a:prstDash val="solid"/>
-                      <a:round/>
-                      <a:headEnd type="none" w="med" len="med"/>
-                      <a:tailEnd type="none" w="med" len="med"/>
-                    </a:lnB>
-                    <a:solidFill>
-                      <a:srgbClr val="F3F6F7"/>
-                    </a:solidFill>
-                  </a:tcPr>
-                </a:tc>
-                <a:tc>
-                  <a:txBody>
-                    <a:bodyPr/>
-                    <a:lstStyle/>
-                    <a:p>
-                      <a:pPr algn="r" indent="0" marL="0">
-                        <a:buNone/>
-                      </a:pPr>
-                      <a:r>
-                        <a:rPr lang="en-US" sz="850" dirty="0">
-                          <a:solidFill>
-                            <a:srgbClr val="2B2B2B"/>
-                          </a:solidFill>
-                          <a:latin typeface="맑은 고딕" pitchFamily="34" charset="0"/>
-                          <a:ea typeface="맑은 고딕" pitchFamily="34" charset="-122"/>
-                          <a:cs typeface="맑은 고딕" pitchFamily="34" charset="-120"/>
-                        </a:rPr>
-                        <a:t>2026-08-31</a:t>
-                      </a:r>
-                      <a:endParaRPr lang="en-US" sz="850" dirty="0">
-                        <a:latin typeface="맑은 고딕" charset="0"/>
-                        <a:ea typeface="맑은 고딕" charset="0"/>
-                        <a:cs typeface="맑은 고딕" charset="0"/>
-                      </a:endParaRPr>
-                    </a:p>
-                  </a:txBody>
-                  <a:tcPr marL="91440" marR="91440" marT="45720" marB="45720" anchor="ctr">
-                    <a:lnL w="12700" cap="flat" cmpd="sng" algn="ctr">
-                      <a:solidFill>
-                        <a:srgbClr val="CBD5E0"/>
-                      </a:solidFill>
-                      <a:prstDash val="solid"/>
-                      <a:round/>
-                      <a:headEnd type="none" w="med" len="med"/>
-                      <a:tailEnd type="none" w="med" len="med"/>
-                    </a:lnL>
-                    <a:lnR w="12700" cap="flat" cmpd="sng" algn="ctr">
-                      <a:solidFill>
-                        <a:srgbClr val="CBD5E0"/>
-                      </a:solidFill>
-                      <a:prstDash val="solid"/>
-                      <a:round/>
-                      <a:headEnd type="none" w="med" len="med"/>
-                      <a:tailEnd type="none" w="med" len="med"/>
-                    </a:lnR>
-                    <a:lnT w="12700" cap="flat" cmpd="sng" algn="ctr">
-                      <a:solidFill>
-                        <a:srgbClr val="CBD5E0"/>
-                      </a:solidFill>
-                      <a:prstDash val="solid"/>
-                      <a:round/>
-                      <a:headEnd type="none" w="med" len="med"/>
-                      <a:tailEnd type="none" w="med" len="med"/>
-                    </a:lnT>
-                    <a:lnB w="12700" cap="flat" cmpd="sng" algn="ctr">
-                      <a:solidFill>
-                        <a:srgbClr val="CBD5E0"/>
-                      </a:solidFill>
-                      <a:prstDash val="solid"/>
-                      <a:round/>
-                      <a:headEnd type="none" w="med" len="med"/>
-                      <a:tailEnd type="none" w="med" len="med"/>
-                    </a:lnB>
-                    <a:solidFill>
-                      <a:srgbClr val="F3F6F7"/>
-                    </a:solidFill>
-                  </a:tcPr>
-                </a:tc>
-                <a:tc>
-                  <a:txBody>
-                    <a:bodyPr/>
-                    <a:lstStyle/>
-                    <a:p>
-                      <a:pPr algn="ctr" indent="0" marL="0">
-                        <a:buNone/>
-                      </a:pPr>
-                      <a:r>
-                        <a:rPr lang="en-US" sz="850" dirty="0">
-                          <a:solidFill>
-                            <a:srgbClr val="2B2B2B"/>
-                          </a:solidFill>
-                          <a:latin typeface="맑은 고딕" pitchFamily="34" charset="0"/>
-                          <a:ea typeface="맑은 고딕" pitchFamily="34" charset="-122"/>
-                          <a:cs typeface="맑은 고딕" pitchFamily="34" charset="-120"/>
-                        </a:rPr>
-                        <a:t>임대 11년 경과</a:t>
-                      </a:r>
-                      <a:endParaRPr lang="en-US" sz="850" dirty="0">
-                        <a:latin typeface="맑은 고딕" charset="0"/>
-                        <a:ea typeface="맑은 고딕" charset="0"/>
-                        <a:cs typeface="맑은 고딕" charset="0"/>
-                      </a:endParaRPr>
-                    </a:p>
-                  </a:txBody>
-                  <a:tcPr marL="91440" marR="91440" marT="45720" marB="45720" anchor="ctr">
-                    <a:lnL w="12700" cap="flat" cmpd="sng" algn="ctr">
-                      <a:solidFill>
-                        <a:srgbClr val="CBD5E0"/>
-                      </a:solidFill>
-                      <a:prstDash val="solid"/>
-                      <a:round/>
-                      <a:headEnd type="none" w="med" len="med"/>
-                      <a:tailEnd type="none" w="med" len="med"/>
-                    </a:lnL>
-                    <a:lnR w="12700" cap="flat" cmpd="sng" algn="ctr">
-                      <a:solidFill>
-                        <a:srgbClr val="CBD5E0"/>
-                      </a:solidFill>
-                      <a:prstDash val="solid"/>
-                      <a:round/>
-                      <a:headEnd type="none" w="med" len="med"/>
-                      <a:tailEnd type="none" w="med" len="med"/>
-                    </a:lnR>
-                    <a:lnT w="12700" cap="flat" cmpd="sng" algn="ctr">
-                      <a:solidFill>
-                        <a:srgbClr val="CBD5E0"/>
-                      </a:solidFill>
-                      <a:prstDash val="solid"/>
-                      <a:round/>
-                      <a:headEnd type="none" w="med" len="med"/>
-                      <a:tailEnd type="none" w="med" len="med"/>
-                    </a:lnT>
-                    <a:lnB w="12700" cap="flat" cmpd="sng" algn="ctr">
-                      <a:solidFill>
-                        <a:srgbClr val="CBD5E0"/>
-                      </a:solidFill>
-                      <a:prstDash val="solid"/>
-                      <a:round/>
-                      <a:headEnd type="none" w="med" len="med"/>
-                      <a:tailEnd type="none" w="med" len="med"/>
-                    </a:lnB>
-                    <a:solidFill>
-                      <a:srgbClr val="F3F6F7"/>
-                    </a:solidFill>
-                  </a:tcPr>
-                </a:tc>
-                <a:tc>
-                  <a:txBody>
-                    <a:bodyPr/>
-                    <a:lstStyle/>
-                    <a:p>
-                      <a:pPr algn="ctr" indent="0" marL="0">
-                        <a:buNone/>
-                      </a:pPr>
                       <a:endParaRPr lang="en-US" sz="850" dirty="0">
                         <a:latin typeface="맑은 고딕" charset="0"/>
                         <a:ea typeface="맑은 고딕" charset="0"/>
@@ -11188,7 +10947,143 @@
                           <a:ea typeface="맑은 고딕" pitchFamily="34" charset="-122"/>
                           <a:cs typeface="맑은 고딕" pitchFamily="34" charset="-120"/>
                         </a:rPr>
-                        <a:t>105.5</a:t>
+                        <a:t>-</a:t>
+                      </a:r>
+                      <a:endParaRPr lang="en-US" sz="850" dirty="0">
+                        <a:latin typeface="맑은 고딕" charset="0"/>
+                        <a:ea typeface="맑은 고딕" charset="0"/>
+                        <a:cs typeface="맑은 고딕" charset="0"/>
+                      </a:endParaRPr>
+                    </a:p>
+                  </a:txBody>
+                  <a:tcPr marL="91440" marR="91440" marT="45720" marB="45720" anchor="ctr">
+                    <a:lnL w="12700" cap="flat" cmpd="sng" algn="ctr">
+                      <a:solidFill>
+                        <a:srgbClr val="CBD5E0"/>
+                      </a:solidFill>
+                      <a:prstDash val="solid"/>
+                      <a:round/>
+                      <a:headEnd type="none" w="med" len="med"/>
+                      <a:tailEnd type="none" w="med" len="med"/>
+                    </a:lnL>
+                    <a:lnR w="12700" cap="flat" cmpd="sng" algn="ctr">
+                      <a:solidFill>
+                        <a:srgbClr val="CBD5E0"/>
+                      </a:solidFill>
+                      <a:prstDash val="solid"/>
+                      <a:round/>
+                      <a:headEnd type="none" w="med" len="med"/>
+                      <a:tailEnd type="none" w="med" len="med"/>
+                    </a:lnR>
+                    <a:lnT w="12700" cap="flat" cmpd="sng" algn="ctr">
+                      <a:solidFill>
+                        <a:srgbClr val="CBD5E0"/>
+                      </a:solidFill>
+                      <a:prstDash val="solid"/>
+                      <a:round/>
+                      <a:headEnd type="none" w="med" len="med"/>
+                      <a:tailEnd type="none" w="med" len="med"/>
+                    </a:lnT>
+                    <a:lnB w="12700" cap="flat" cmpd="sng" algn="ctr">
+                      <a:solidFill>
+                        <a:srgbClr val="CBD5E0"/>
+                      </a:solidFill>
+                      <a:prstDash val="solid"/>
+                      <a:round/>
+                      <a:headEnd type="none" w="med" len="med"/>
+                      <a:tailEnd type="none" w="med" len="med"/>
+                    </a:lnB>
+                    <a:solidFill>
+                      <a:srgbClr val="FFFFFF"/>
+                    </a:solidFill>
+                  </a:tcPr>
+                </a:tc>
+                <a:tc>
+                  <a:txBody>
+                    <a:bodyPr/>
+                    <a:lstStyle/>
+                    <a:p>
+                      <a:pPr algn="r" indent="0" marL="0">
+                        <a:buNone/>
+                      </a:pPr>
+                      <a:r>
+                        <a:rPr lang="en-US" sz="850" dirty="0">
+                          <a:solidFill>
+                            <a:srgbClr val="2B2B2B"/>
+                          </a:solidFill>
+                          <a:latin typeface="맑은 고딕" pitchFamily="34" charset="0"/>
+                          <a:ea typeface="맑은 고딕" pitchFamily="34" charset="-122"/>
+                          <a:cs typeface="맑은 고딕" pitchFamily="34" charset="-120"/>
+                        </a:rPr>
+                        <a:t>-</a:t>
+                      </a:r>
+                      <a:endParaRPr lang="en-US" sz="850" dirty="0">
+                        <a:latin typeface="맑은 고딕" charset="0"/>
+                        <a:ea typeface="맑은 고딕" charset="0"/>
+                        <a:cs typeface="맑은 고딕" charset="0"/>
+                      </a:endParaRPr>
+                    </a:p>
+                  </a:txBody>
+                  <a:tcPr marL="91440" marR="91440" marT="45720" marB="45720" anchor="ctr">
+                    <a:lnL w="12700" cap="flat" cmpd="sng" algn="ctr">
+                      <a:solidFill>
+                        <a:srgbClr val="CBD5E0"/>
+                      </a:solidFill>
+                      <a:prstDash val="solid"/>
+                      <a:round/>
+                      <a:headEnd type="none" w="med" len="med"/>
+                      <a:tailEnd type="none" w="med" len="med"/>
+                    </a:lnL>
+                    <a:lnR w="12700" cap="flat" cmpd="sng" algn="ctr">
+                      <a:solidFill>
+                        <a:srgbClr val="CBD5E0"/>
+                      </a:solidFill>
+                      <a:prstDash val="solid"/>
+                      <a:round/>
+                      <a:headEnd type="none" w="med" len="med"/>
+                      <a:tailEnd type="none" w="med" len="med"/>
+                    </a:lnR>
+                    <a:lnT w="12700" cap="flat" cmpd="sng" algn="ctr">
+                      <a:solidFill>
+                        <a:srgbClr val="CBD5E0"/>
+                      </a:solidFill>
+                      <a:prstDash val="solid"/>
+                      <a:round/>
+                      <a:headEnd type="none" w="med" len="med"/>
+                      <a:tailEnd type="none" w="med" len="med"/>
+                    </a:lnT>
+                    <a:lnB w="12700" cap="flat" cmpd="sng" algn="ctr">
+                      <a:solidFill>
+                        <a:srgbClr val="CBD5E0"/>
+                      </a:solidFill>
+                      <a:prstDash val="solid"/>
+                      <a:round/>
+                      <a:headEnd type="none" w="med" len="med"/>
+                      <a:tailEnd type="none" w="med" len="med"/>
+                    </a:lnB>
+                    <a:solidFill>
+                      <a:srgbClr val="FFFFFF"/>
+                    </a:solidFill>
+                  </a:tcPr>
+                </a:tc>
+                <a:tc>
+                  <a:txBody>
+                    <a:bodyPr/>
+                    <a:lstStyle/>
+                    <a:p>
+                      <a:pPr algn="r" indent="0" marL="0">
+                        <a:buNone/>
+                      </a:pPr>
+                      <a:r>
+                        <a:rPr lang="en-US" sz="850" dirty="0">
+                          <a:solidFill>
+                            <a:srgbClr val="2B2B2B"/>
+                          </a:solidFill>
+                          <a:latin typeface="맑은 고딕" pitchFamily="34" charset="0"/>
+                          <a:ea typeface="맑은 고딕" pitchFamily="34" charset="-122"/>
+                          <a:cs typeface="맑은 고딕" pitchFamily="34" charset="-120"/>
+                        </a:rPr>
+                        <a:t>-</a:t>
                       </a:r>
                       <a:endParaRPr lang="en-US" sz="850" dirty="0">
                         <a:latin typeface="맑은 고딕" charset="0"/>
@@ -11312,7 +11207,7 @@
                     <a:bodyPr/>
                     <a:lstStyle/>
                     <a:p>
-                      <a:pPr algn="r" indent="0" marL="0">
+                      <a:pPr algn="ctr" indent="0" marL="0">
                         <a:buNone/>
                       </a:pPr>
                       <a:r>
@@ -11326,199 +11221,6 @@
                         </a:rPr>
                         <a:t>883</a:t>
                       </a:r>
-                      <a:endParaRPr lang="en-US" sz="850" dirty="0">
-                        <a:latin typeface="맑은 고딕" charset="0"/>
-                        <a:ea typeface="맑은 고딕" charset="0"/>
-                        <a:cs typeface="맑은 고딕" charset="0"/>
-                      </a:endParaRPr>
-                    </a:p>
-                  </a:txBody>
-                  <a:tcPr marL="91440" marR="91440" marT="45720" marB="45720" anchor="ctr">
-                    <a:lnL w="12700" cap="flat" cmpd="sng" algn="ctr">
-                      <a:solidFill>
-                        <a:srgbClr val="CBD5E0"/>
-                      </a:solidFill>
-                      <a:prstDash val="solid"/>
-                      <a:round/>
-                      <a:headEnd type="none" w="med" len="med"/>
-                      <a:tailEnd type="none" w="med" len="med"/>
-                    </a:lnL>
-                    <a:lnR w="12700" cap="flat" cmpd="sng" algn="ctr">
-                      <a:solidFill>
-                        <a:srgbClr val="CBD5E0"/>
-                      </a:solidFill>
-                      <a:prstDash val="solid"/>
-                      <a:round/>
-                      <a:headEnd type="none" w="med" len="med"/>
-                      <a:tailEnd type="none" w="med" len="med"/>
-                    </a:lnR>
-                    <a:lnT w="12700" cap="flat" cmpd="sng" algn="ctr">
-                      <a:solidFill>
-                        <a:srgbClr val="CBD5E0"/>
-                      </a:solidFill>
-                      <a:prstDash val="solid"/>
-                      <a:round/>
-                      <a:headEnd type="none" w="med" len="med"/>
-                      <a:tailEnd type="none" w="med" len="med"/>
-                    </a:lnT>
-                    <a:lnB w="12700" cap="flat" cmpd="sng" algn="ctr">
-                      <a:solidFill>
-                        <a:srgbClr val="CBD5E0"/>
-                      </a:solidFill>
-                      <a:prstDash val="solid"/>
-                      <a:round/>
-                      <a:headEnd type="none" w="med" len="med"/>
-                      <a:tailEnd type="none" w="med" len="med"/>
-                    </a:lnB>
-                    <a:solidFill>
-                      <a:srgbClr val="FFFFFF"/>
-                    </a:solidFill>
-                  </a:tcPr>
-                </a:tc>
-                <a:tc>
-                  <a:txBody>
-                    <a:bodyPr/>
-                    <a:lstStyle/>
-                    <a:p>
-                      <a:pPr algn="r" indent="0" marL="0">
-                        <a:buNone/>
-                      </a:pPr>
-                      <a:r>
-                        <a:rPr lang="en-US" sz="850" dirty="0">
-                          <a:solidFill>
-                            <a:srgbClr val="2B2B2B"/>
-                          </a:solidFill>
-                          <a:latin typeface="맑은 고딕" pitchFamily="34" charset="0"/>
-                          <a:ea typeface="맑은 고딕" pitchFamily="34" charset="-122"/>
-                          <a:cs typeface="맑은 고딕" pitchFamily="34" charset="-120"/>
-                        </a:rPr>
-                        <a:t>2026-08-31</a:t>
-                      </a:r>
-                      <a:endParaRPr lang="en-US" sz="850" dirty="0">
-                        <a:latin typeface="맑은 고딕" charset="0"/>
-                        <a:ea typeface="맑은 고딕" charset="0"/>
-                        <a:cs typeface="맑은 고딕" charset="0"/>
-                      </a:endParaRPr>
-                    </a:p>
-                  </a:txBody>
-                  <a:tcPr marL="91440" marR="91440" marT="45720" marB="45720" anchor="ctr">
-                    <a:lnL w="12700" cap="flat" cmpd="sng" algn="ctr">
-                      <a:solidFill>
-                        <a:srgbClr val="CBD5E0"/>
-                      </a:solidFill>
-                      <a:prstDash val="solid"/>
-                      <a:round/>
-                      <a:headEnd type="none" w="med" len="med"/>
-                      <a:tailEnd type="none" w="med" len="med"/>
-                    </a:lnL>
-                    <a:lnR w="12700" cap="flat" cmpd="sng" algn="ctr">
-                      <a:solidFill>
-                        <a:srgbClr val="CBD5E0"/>
-                      </a:solidFill>
-                      <a:prstDash val="solid"/>
-                      <a:round/>
-                      <a:headEnd type="none" w="med" len="med"/>
-                      <a:tailEnd type="none" w="med" len="med"/>
-                    </a:lnR>
-                    <a:lnT w="12700" cap="flat" cmpd="sng" algn="ctr">
-                      <a:solidFill>
-                        <a:srgbClr val="CBD5E0"/>
-                      </a:solidFill>
-                      <a:prstDash val="solid"/>
-                      <a:round/>
-                      <a:headEnd type="none" w="med" len="med"/>
-                      <a:tailEnd type="none" w="med" len="med"/>
-                    </a:lnT>
-                    <a:lnB w="12700" cap="flat" cmpd="sng" algn="ctr">
-                      <a:solidFill>
-                        <a:srgbClr val="CBD5E0"/>
-                      </a:solidFill>
-                      <a:prstDash val="solid"/>
-                      <a:round/>
-                      <a:headEnd type="none" w="med" len="med"/>
-                      <a:tailEnd type="none" w="med" len="med"/>
-                    </a:lnB>
-                    <a:solidFill>
-                      <a:srgbClr val="FFFFFF"/>
-                    </a:solidFill>
-                  </a:tcPr>
-                </a:tc>
-                <a:tc>
-                  <a:txBody>
-                    <a:bodyPr/>
-                    <a:lstStyle/>
-                    <a:p>
-                      <a:pPr algn="ctr" indent="0" marL="0">
-                        <a:buNone/>
-                      </a:pPr>
-                      <a:r>
-                        <a:rPr lang="en-US" sz="850" dirty="0">
-                          <a:solidFill>
-                            <a:srgbClr val="2B2B2B"/>
-                          </a:solidFill>
-                          <a:latin typeface="맑은 고딕" pitchFamily="34" charset="0"/>
-                          <a:ea typeface="맑은 고딕" pitchFamily="34" charset="-122"/>
-                          <a:cs typeface="맑은 고딕" pitchFamily="34" charset="-120"/>
-                        </a:rPr>
-                        <a:t>로뎀나무내과 통합계약</a:t>
-                      </a:r>
-                      <a:endParaRPr lang="en-US" sz="850" dirty="0">
-                        <a:latin typeface="맑은 고딕" charset="0"/>
-                        <a:ea typeface="맑은 고딕" charset="0"/>
-                        <a:cs typeface="맑은 고딕" charset="0"/>
-                      </a:endParaRPr>
-                    </a:p>
-                  </a:txBody>
-                  <a:tcPr marL="91440" marR="91440" marT="45720" marB="45720" anchor="ctr">
-                    <a:lnL w="12700" cap="flat" cmpd="sng" algn="ctr">
-                      <a:solidFill>
-                        <a:srgbClr val="CBD5E0"/>
-                      </a:solidFill>
-                      <a:prstDash val="solid"/>
-                      <a:round/>
-                      <a:headEnd type="none" w="med" len="med"/>
-                      <a:tailEnd type="none" w="med" len="med"/>
-                    </a:lnL>
-                    <a:lnR w="12700" cap="flat" cmpd="sng" algn="ctr">
-                      <a:solidFill>
-                        <a:srgbClr val="CBD5E0"/>
-                      </a:solidFill>
-                      <a:prstDash val="solid"/>
-                      <a:round/>
-                      <a:headEnd type="none" w="med" len="med"/>
-                      <a:tailEnd type="none" w="med" len="med"/>
-                    </a:lnR>
-                    <a:lnT w="12700" cap="flat" cmpd="sng" algn="ctr">
-                      <a:solidFill>
-                        <a:srgbClr val="CBD5E0"/>
-                      </a:solidFill>
-                      <a:prstDash val="solid"/>
-                      <a:round/>
-                      <a:headEnd type="none" w="med" len="med"/>
-                      <a:tailEnd type="none" w="med" len="med"/>
-                    </a:lnT>
-                    <a:lnB w="12700" cap="flat" cmpd="sng" algn="ctr">
-                      <a:solidFill>
-                        <a:srgbClr val="CBD5E0"/>
-                      </a:solidFill>
-                      <a:prstDash val="solid"/>
-                      <a:round/>
-                      <a:headEnd type="none" w="med" len="med"/>
-                      <a:tailEnd type="none" w="med" len="med"/>
-                    </a:lnB>
-                    <a:solidFill>
-                      <a:srgbClr val="FFFFFF"/>
-                    </a:solidFill>
-                  </a:tcPr>
-                </a:tc>
-                <a:tc>
-                  <a:txBody>
-                    <a:bodyPr/>
-                    <a:lstStyle/>
-                    <a:p>
-                      <a:pPr algn="ctr" indent="0" marL="0">
-                        <a:buNone/>
-                      </a:pPr>
                       <a:endParaRPr lang="en-US" sz="850" dirty="0">
                         <a:latin typeface="맑은 고딕" charset="0"/>
                         <a:ea typeface="맑은 고딕" charset="0"/>
@@ -11859,7 +11561,143 @@
                           <a:ea typeface="맑은 고딕" pitchFamily="34" charset="-122"/>
                           <a:cs typeface="맑은 고딕" pitchFamily="34" charset="-120"/>
                         </a:rPr>
-                        <a:t>252.2</a:t>
+                        <a:t>-</a:t>
+                      </a:r>
+                      <a:endParaRPr lang="en-US" sz="850" dirty="0">
+                        <a:latin typeface="맑은 고딕" charset="0"/>
+                        <a:ea typeface="맑은 고딕" charset="0"/>
+                        <a:cs typeface="맑은 고딕" charset="0"/>
+                      </a:endParaRPr>
+                    </a:p>
+                  </a:txBody>
+                  <a:tcPr marL="91440" marR="91440" marT="45720" marB="45720" anchor="ctr">
+                    <a:lnL w="12700" cap="flat" cmpd="sng" algn="ctr">
+                      <a:solidFill>
+                        <a:srgbClr val="CBD5E0"/>
+                      </a:solidFill>
+                      <a:prstDash val="solid"/>
+                      <a:round/>
+                      <a:headEnd type="none" w="med" len="med"/>
+                      <a:tailEnd type="none" w="med" len="med"/>
+                    </a:lnL>
+                    <a:lnR w="12700" cap="flat" cmpd="sng" algn="ctr">
+                      <a:solidFill>
+                        <a:srgbClr val="CBD5E0"/>
+                      </a:solidFill>
+                      <a:prstDash val="solid"/>
+                      <a:round/>
+                      <a:headEnd type="none" w="med" len="med"/>
+                      <a:tailEnd type="none" w="med" len="med"/>
+                    </a:lnR>
+                    <a:lnT w="12700" cap="flat" cmpd="sng" algn="ctr">
+                      <a:solidFill>
+                        <a:srgbClr val="CBD5E0"/>
+                      </a:solidFill>
+                      <a:prstDash val="solid"/>
+                      <a:round/>
+                      <a:headEnd type="none" w="med" len="med"/>
+                      <a:tailEnd type="none" w="med" len="med"/>
+                    </a:lnT>
+                    <a:lnB w="12700" cap="flat" cmpd="sng" algn="ctr">
+                      <a:solidFill>
+                        <a:srgbClr val="CBD5E0"/>
+                      </a:solidFill>
+                      <a:prstDash val="solid"/>
+                      <a:round/>
+                      <a:headEnd type="none" w="med" len="med"/>
+                      <a:tailEnd type="none" w="med" len="med"/>
+                    </a:lnB>
+                    <a:solidFill>
+                      <a:srgbClr val="F3F6F7"/>
+                    </a:solidFill>
+                  </a:tcPr>
+                </a:tc>
+                <a:tc>
+                  <a:txBody>
+                    <a:bodyPr/>
+                    <a:lstStyle/>
+                    <a:p>
+                      <a:pPr algn="r" indent="0" marL="0">
+                        <a:buNone/>
+                      </a:pPr>
+                      <a:r>
+                        <a:rPr lang="en-US" sz="850" dirty="0">
+                          <a:solidFill>
+                            <a:srgbClr val="2B2B2B"/>
+                          </a:solidFill>
+                          <a:latin typeface="맑은 고딕" pitchFamily="34" charset="0"/>
+                          <a:ea typeface="맑은 고딕" pitchFamily="34" charset="-122"/>
+                          <a:cs typeface="맑은 고딕" pitchFamily="34" charset="-120"/>
+                        </a:rPr>
+                        <a:t>-</a:t>
+                      </a:r>
+                      <a:endParaRPr lang="en-US" sz="850" dirty="0">
+                        <a:latin typeface="맑은 고딕" charset="0"/>
+                        <a:ea typeface="맑은 고딕" charset="0"/>
+                        <a:cs typeface="맑은 고딕" charset="0"/>
+                      </a:endParaRPr>
+                    </a:p>
+                  </a:txBody>
+                  <a:tcPr marL="91440" marR="91440" marT="45720" marB="45720" anchor="ctr">
+                    <a:lnL w="12700" cap="flat" cmpd="sng" algn="ctr">
+                      <a:solidFill>
+                        <a:srgbClr val="CBD5E0"/>
+                      </a:solidFill>
+                      <a:prstDash val="solid"/>
+                      <a:round/>
+                      <a:headEnd type="none" w="med" len="med"/>
+                      <a:tailEnd type="none" w="med" len="med"/>
+                    </a:lnL>
+                    <a:lnR w="12700" cap="flat" cmpd="sng" algn="ctr">
+                      <a:solidFill>
+                        <a:srgbClr val="CBD5E0"/>
+                      </a:solidFill>
+                      <a:prstDash val="solid"/>
+                      <a:round/>
+                      <a:headEnd type="none" w="med" len="med"/>
+                      <a:tailEnd type="none" w="med" len="med"/>
+                    </a:lnR>
+                    <a:lnT w="12700" cap="flat" cmpd="sng" algn="ctr">
+                      <a:solidFill>
+                        <a:srgbClr val="CBD5E0"/>
+                      </a:solidFill>
+                      <a:prstDash val="solid"/>
+                      <a:round/>
+                      <a:headEnd type="none" w="med" len="med"/>
+                      <a:tailEnd type="none" w="med" len="med"/>
+                    </a:lnT>
+                    <a:lnB w="12700" cap="flat" cmpd="sng" algn="ctr">
+                      <a:solidFill>
+                        <a:srgbClr val="CBD5E0"/>
+                      </a:solidFill>
+                      <a:prstDash val="solid"/>
+                      <a:round/>
+                      <a:headEnd type="none" w="med" len="med"/>
+                      <a:tailEnd type="none" w="med" len="med"/>
+                    </a:lnB>
+                    <a:solidFill>
+                      <a:srgbClr val="F3F6F7"/>
+                    </a:solidFill>
+                  </a:tcPr>
+                </a:tc>
+                <a:tc>
+                  <a:txBody>
+                    <a:bodyPr/>
+                    <a:lstStyle/>
+                    <a:p>
+                      <a:pPr algn="r" indent="0" marL="0">
+                        <a:buNone/>
+                      </a:pPr>
+                      <a:r>
+                        <a:rPr lang="en-US" sz="850" dirty="0">
+                          <a:solidFill>
+                            <a:srgbClr val="2B2B2B"/>
+                          </a:solidFill>
+                          <a:latin typeface="맑은 고딕" pitchFamily="34" charset="0"/>
+                          <a:ea typeface="맑은 고딕" pitchFamily="34" charset="-122"/>
+                          <a:cs typeface="맑은 고딕" pitchFamily="34" charset="-120"/>
+                        </a:rPr>
+                        <a:t>-</a:t>
                       </a:r>
                       <a:endParaRPr lang="en-US" sz="850" dirty="0">
                         <a:latin typeface="맑은 고딕" charset="0"/>
@@ -11983,7 +11821,7 @@
                     <a:bodyPr/>
                     <a:lstStyle/>
                     <a:p>
-                      <a:pPr algn="r" indent="0" marL="0">
+                      <a:pPr algn="ctr" indent="0" marL="0">
                         <a:buNone/>
                       </a:pPr>
                       <a:r>
@@ -11997,199 +11835,6 @@
                         </a:rPr>
                         <a:t>0</a:t>
                       </a:r>
-                      <a:endParaRPr lang="en-US" sz="850" dirty="0">
-                        <a:latin typeface="맑은 고딕" charset="0"/>
-                        <a:ea typeface="맑은 고딕" charset="0"/>
-                        <a:cs typeface="맑은 고딕" charset="0"/>
-                      </a:endParaRPr>
-                    </a:p>
-                  </a:txBody>
-                  <a:tcPr marL="91440" marR="91440" marT="45720" marB="45720" anchor="ctr">
-                    <a:lnL w="12700" cap="flat" cmpd="sng" algn="ctr">
-                      <a:solidFill>
-                        <a:srgbClr val="CBD5E0"/>
-                      </a:solidFill>
-                      <a:prstDash val="solid"/>
-                      <a:round/>
-                      <a:headEnd type="none" w="med" len="med"/>
-                      <a:tailEnd type="none" w="med" len="med"/>
-                    </a:lnL>
-                    <a:lnR w="12700" cap="flat" cmpd="sng" algn="ctr">
-                      <a:solidFill>
-                        <a:srgbClr val="CBD5E0"/>
-                      </a:solidFill>
-                      <a:prstDash val="solid"/>
-                      <a:round/>
-                      <a:headEnd type="none" w="med" len="med"/>
-                      <a:tailEnd type="none" w="med" len="med"/>
-                    </a:lnR>
-                    <a:lnT w="12700" cap="flat" cmpd="sng" algn="ctr">
-                      <a:solidFill>
-                        <a:srgbClr val="CBD5E0"/>
-                      </a:solidFill>
-                      <a:prstDash val="solid"/>
-                      <a:round/>
-                      <a:headEnd type="none" w="med" len="med"/>
-                      <a:tailEnd type="none" w="med" len="med"/>
-                    </a:lnT>
-                    <a:lnB w="12700" cap="flat" cmpd="sng" algn="ctr">
-                      <a:solidFill>
-                        <a:srgbClr val="CBD5E0"/>
-                      </a:solidFill>
-                      <a:prstDash val="solid"/>
-                      <a:round/>
-                      <a:headEnd type="none" w="med" len="med"/>
-                      <a:tailEnd type="none" w="med" len="med"/>
-                    </a:lnB>
-                    <a:solidFill>
-                      <a:srgbClr val="F3F6F7"/>
-                    </a:solidFill>
-                  </a:tcPr>
-                </a:tc>
-                <a:tc>
-                  <a:txBody>
-                    <a:bodyPr/>
-                    <a:lstStyle/>
-                    <a:p>
-                      <a:pPr algn="r" indent="0" marL="0">
-                        <a:buNone/>
-                      </a:pPr>
-                      <a:r>
-                        <a:rPr lang="en-US" sz="850" dirty="0">
-                          <a:solidFill>
-                            <a:srgbClr val="2B2B2B"/>
-                          </a:solidFill>
-                          <a:latin typeface="맑은 고딕" pitchFamily="34" charset="0"/>
-                          <a:ea typeface="맑은 고딕" pitchFamily="34" charset="-122"/>
-                          <a:cs typeface="맑은 고딕" pitchFamily="34" charset="-120"/>
-                        </a:rPr>
-                        <a:t>2026-08-31</a:t>
-                      </a:r>
-                      <a:endParaRPr lang="en-US" sz="850" dirty="0">
-                        <a:latin typeface="맑은 고딕" charset="0"/>
-                        <a:ea typeface="맑은 고딕" charset="0"/>
-                        <a:cs typeface="맑은 고딕" charset="0"/>
-                      </a:endParaRPr>
-                    </a:p>
-                  </a:txBody>
-                  <a:tcPr marL="91440" marR="91440" marT="45720" marB="45720" anchor="ctr">
-                    <a:lnL w="12700" cap="flat" cmpd="sng" algn="ctr">
-                      <a:solidFill>
-                        <a:srgbClr val="CBD5E0"/>
-                      </a:solidFill>
-                      <a:prstDash val="solid"/>
-                      <a:round/>
-                      <a:headEnd type="none" w="med" len="med"/>
-                      <a:tailEnd type="none" w="med" len="med"/>
-                    </a:lnL>
-                    <a:lnR w="12700" cap="flat" cmpd="sng" algn="ctr">
-                      <a:solidFill>
-                        <a:srgbClr val="CBD5E0"/>
-                      </a:solidFill>
-                      <a:prstDash val="solid"/>
-                      <a:round/>
-                      <a:headEnd type="none" w="med" len="med"/>
-                      <a:tailEnd type="none" w="med" len="med"/>
-                    </a:lnR>
-                    <a:lnT w="12700" cap="flat" cmpd="sng" algn="ctr">
-                      <a:solidFill>
-                        <a:srgbClr val="CBD5E0"/>
-                      </a:solidFill>
-                      <a:prstDash val="solid"/>
-                      <a:round/>
-                      <a:headEnd type="none" w="med" len="med"/>
-                      <a:tailEnd type="none" w="med" len="med"/>
-                    </a:lnT>
-                    <a:lnB w="12700" cap="flat" cmpd="sng" algn="ctr">
-                      <a:solidFill>
-                        <a:srgbClr val="CBD5E0"/>
-                      </a:solidFill>
-                      <a:prstDash val="solid"/>
-                      <a:round/>
-                      <a:headEnd type="none" w="med" len="med"/>
-                      <a:tailEnd type="none" w="med" len="med"/>
-                    </a:lnB>
-                    <a:solidFill>
-                      <a:srgbClr val="F3F6F7"/>
-                    </a:solidFill>
-                  </a:tcPr>
-                </a:tc>
-                <a:tc>
-                  <a:txBody>
-                    <a:bodyPr/>
-                    <a:lstStyle/>
-                    <a:p>
-                      <a:pPr algn="ctr" indent="0" marL="0">
-                        <a:buNone/>
-                      </a:pPr>
-                      <a:r>
-                        <a:rPr lang="en-US" sz="850" dirty="0">
-                          <a:solidFill>
-                            <a:srgbClr val="2B2B2B"/>
-                          </a:solidFill>
-                          <a:latin typeface="맑은 고딕" pitchFamily="34" charset="0"/>
-                          <a:ea typeface="맑은 고딕" pitchFamily="34" charset="-122"/>
-                          <a:cs typeface="맑은 고딕" pitchFamily="34" charset="-120"/>
-                        </a:rPr>
-                        <a:t>로뎀나무내과 통합계약</a:t>
-                      </a:r>
-                      <a:endParaRPr lang="en-US" sz="850" dirty="0">
-                        <a:latin typeface="맑은 고딕" charset="0"/>
-                        <a:ea typeface="맑은 고딕" charset="0"/>
-                        <a:cs typeface="맑은 고딕" charset="0"/>
-                      </a:endParaRPr>
-                    </a:p>
-                  </a:txBody>
-                  <a:tcPr marL="91440" marR="91440" marT="45720" marB="45720" anchor="ctr">
-                    <a:lnL w="12700" cap="flat" cmpd="sng" algn="ctr">
-                      <a:solidFill>
-                        <a:srgbClr val="CBD5E0"/>
-                      </a:solidFill>
-                      <a:prstDash val="solid"/>
-                      <a:round/>
-                      <a:headEnd type="none" w="med" len="med"/>
-                      <a:tailEnd type="none" w="med" len="med"/>
-                    </a:lnL>
-                    <a:lnR w="12700" cap="flat" cmpd="sng" algn="ctr">
-                      <a:solidFill>
-                        <a:srgbClr val="CBD5E0"/>
-                      </a:solidFill>
-                      <a:prstDash val="solid"/>
-                      <a:round/>
-                      <a:headEnd type="none" w="med" len="med"/>
-                      <a:tailEnd type="none" w="med" len="med"/>
-                    </a:lnR>
-                    <a:lnT w="12700" cap="flat" cmpd="sng" algn="ctr">
-                      <a:solidFill>
-                        <a:srgbClr val="CBD5E0"/>
-                      </a:solidFill>
-                      <a:prstDash val="solid"/>
-                      <a:round/>
-                      <a:headEnd type="none" w="med" len="med"/>
-                      <a:tailEnd type="none" w="med" len="med"/>
-                    </a:lnT>
-                    <a:lnB w="12700" cap="flat" cmpd="sng" algn="ctr">
-                      <a:solidFill>
-                        <a:srgbClr val="CBD5E0"/>
-                      </a:solidFill>
-                      <a:prstDash val="solid"/>
-                      <a:round/>
-                      <a:headEnd type="none" w="med" len="med"/>
-                      <a:tailEnd type="none" w="med" len="med"/>
-                    </a:lnB>
-                    <a:solidFill>
-                      <a:srgbClr val="F3F6F7"/>
-                    </a:solidFill>
-                  </a:tcPr>
-                </a:tc>
-                <a:tc>
-                  <a:txBody>
-                    <a:bodyPr/>
-                    <a:lstStyle/>
-                    <a:p>
-                      <a:pPr algn="ctr" indent="0" marL="0">
-                        <a:buNone/>
-                      </a:pPr>
                       <a:endParaRPr lang="en-US" sz="850" dirty="0">
                         <a:latin typeface="맑은 고딕" charset="0"/>
                         <a:ea typeface="맑은 고딕" charset="0"/>
@@ -12530,7 +12175,143 @@
                           <a:ea typeface="맑은 고딕" pitchFamily="34" charset="-122"/>
                           <a:cs typeface="맑은 고딕" pitchFamily="34" charset="-120"/>
                         </a:rPr>
-                        <a:t>252.2</a:t>
+                        <a:t>-</a:t>
+                      </a:r>
+                      <a:endParaRPr lang="en-US" sz="850" dirty="0">
+                        <a:latin typeface="맑은 고딕" charset="0"/>
+                        <a:ea typeface="맑은 고딕" charset="0"/>
+                        <a:cs typeface="맑은 고딕" charset="0"/>
+                      </a:endParaRPr>
+                    </a:p>
+                  </a:txBody>
+                  <a:tcPr marL="91440" marR="91440" marT="45720" marB="45720" anchor="ctr">
+                    <a:lnL w="12700" cap="flat" cmpd="sng" algn="ctr">
+                      <a:solidFill>
+                        <a:srgbClr val="CBD5E0"/>
+                      </a:solidFill>
+                      <a:prstDash val="solid"/>
+                      <a:round/>
+                      <a:headEnd type="none" w="med" len="med"/>
+                      <a:tailEnd type="none" w="med" len="med"/>
+                    </a:lnL>
+                    <a:lnR w="12700" cap="flat" cmpd="sng" algn="ctr">
+                      <a:solidFill>
+                        <a:srgbClr val="CBD5E0"/>
+                      </a:solidFill>
+                      <a:prstDash val="solid"/>
+                      <a:round/>
+                      <a:headEnd type="none" w="med" len="med"/>
+                      <a:tailEnd type="none" w="med" len="med"/>
+                    </a:lnR>
+                    <a:lnT w="12700" cap="flat" cmpd="sng" algn="ctr">
+                      <a:solidFill>
+                        <a:srgbClr val="CBD5E0"/>
+                      </a:solidFill>
+                      <a:prstDash val="solid"/>
+                      <a:round/>
+                      <a:headEnd type="none" w="med" len="med"/>
+                      <a:tailEnd type="none" w="med" len="med"/>
+                    </a:lnT>
+                    <a:lnB w="12700" cap="flat" cmpd="sng" algn="ctr">
+                      <a:solidFill>
+                        <a:srgbClr val="CBD5E0"/>
+                      </a:solidFill>
+                      <a:prstDash val="solid"/>
+                      <a:round/>
+                      <a:headEnd type="none" w="med" len="med"/>
+                      <a:tailEnd type="none" w="med" len="med"/>
+                    </a:lnB>
+                    <a:solidFill>
+                      <a:srgbClr val="FFFFFF"/>
+                    </a:solidFill>
+                  </a:tcPr>
+                </a:tc>
+                <a:tc>
+                  <a:txBody>
+                    <a:bodyPr/>
+                    <a:lstStyle/>
+                    <a:p>
+                      <a:pPr algn="r" indent="0" marL="0">
+                        <a:buNone/>
+                      </a:pPr>
+                      <a:r>
+                        <a:rPr lang="en-US" sz="850" dirty="0">
+                          <a:solidFill>
+                            <a:srgbClr val="2B2B2B"/>
+                          </a:solidFill>
+                          <a:latin typeface="맑은 고딕" pitchFamily="34" charset="0"/>
+                          <a:ea typeface="맑은 고딕" pitchFamily="34" charset="-122"/>
+                          <a:cs typeface="맑은 고딕" pitchFamily="34" charset="-120"/>
+                        </a:rPr>
+                        <a:t>-</a:t>
+                      </a:r>
+                      <a:endParaRPr lang="en-US" sz="850" dirty="0">
+                        <a:latin typeface="맑은 고딕" charset="0"/>
+                        <a:ea typeface="맑은 고딕" charset="0"/>
+                        <a:cs typeface="맑은 고딕" charset="0"/>
+                      </a:endParaRPr>
+                    </a:p>
+                  </a:txBody>
+                  <a:tcPr marL="91440" marR="91440" marT="45720" marB="45720" anchor="ctr">
+                    <a:lnL w="12700" cap="flat" cmpd="sng" algn="ctr">
+                      <a:solidFill>
+                        <a:srgbClr val="CBD5E0"/>
+                      </a:solidFill>
+                      <a:prstDash val="solid"/>
+                      <a:round/>
+                      <a:headEnd type="none" w="med" len="med"/>
+                      <a:tailEnd type="none" w="med" len="med"/>
+                    </a:lnL>
+                    <a:lnR w="12700" cap="flat" cmpd="sng" algn="ctr">
+                      <a:solidFill>
+                        <a:srgbClr val="CBD5E0"/>
+                      </a:solidFill>
+                      <a:prstDash val="solid"/>
+                      <a:round/>
+                      <a:headEnd type="none" w="med" len="med"/>
+                      <a:tailEnd type="none" w="med" len="med"/>
+                    </a:lnR>
+                    <a:lnT w="12700" cap="flat" cmpd="sng" algn="ctr">
+                      <a:solidFill>
+                        <a:srgbClr val="CBD5E0"/>
+                      </a:solidFill>
+                      <a:prstDash val="solid"/>
+                      <a:round/>
+                      <a:headEnd type="none" w="med" len="med"/>
+                      <a:tailEnd type="none" w="med" len="med"/>
+                    </a:lnT>
+                    <a:lnB w="12700" cap="flat" cmpd="sng" algn="ctr">
+                      <a:solidFill>
+                        <a:srgbClr val="CBD5E0"/>
+                      </a:solidFill>
+                      <a:prstDash val="solid"/>
+                      <a:round/>
+                      <a:headEnd type="none" w="med" len="med"/>
+                      <a:tailEnd type="none" w="med" len="med"/>
+                    </a:lnB>
+                    <a:solidFill>
+                      <a:srgbClr val="FFFFFF"/>
+                    </a:solidFill>
+                  </a:tcPr>
+                </a:tc>
+                <a:tc>
+                  <a:txBody>
+                    <a:bodyPr/>
+                    <a:lstStyle/>
+                    <a:p>
+                      <a:pPr algn="r" indent="0" marL="0">
+                        <a:buNone/>
+                      </a:pPr>
+                      <a:r>
+                        <a:rPr lang="en-US" sz="850" dirty="0">
+                          <a:solidFill>
+                            <a:srgbClr val="2B2B2B"/>
+                          </a:solidFill>
+                          <a:latin typeface="맑은 고딕" pitchFamily="34" charset="0"/>
+                          <a:ea typeface="맑은 고딕" pitchFamily="34" charset="-122"/>
+                          <a:cs typeface="맑은 고딕" pitchFamily="34" charset="-120"/>
+                        </a:rPr>
+                        <a:t>-</a:t>
                       </a:r>
                       <a:endParaRPr lang="en-US" sz="850" dirty="0">
                         <a:latin typeface="맑은 고딕" charset="0"/>
@@ -12654,7 +12435,7 @@
                     <a:bodyPr/>
                     <a:lstStyle/>
                     <a:p>
-                      <a:pPr algn="r" indent="0" marL="0">
+                      <a:pPr algn="ctr" indent="0" marL="0">
                         <a:buNone/>
                       </a:pPr>
                       <a:r>
@@ -12668,188 +12449,6 @@
                         </a:rPr>
                         <a:t>455</a:t>
                       </a:r>
-                      <a:endParaRPr lang="en-US" sz="850" dirty="0">
-                        <a:latin typeface="맑은 고딕" charset="0"/>
-                        <a:ea typeface="맑은 고딕" charset="0"/>
-                        <a:cs typeface="맑은 고딕" charset="0"/>
-                      </a:endParaRPr>
-                    </a:p>
-                  </a:txBody>
-                  <a:tcPr marL="91440" marR="91440" marT="45720" marB="45720" anchor="ctr">
-                    <a:lnL w="12700" cap="flat" cmpd="sng" algn="ctr">
-                      <a:solidFill>
-                        <a:srgbClr val="CBD5E0"/>
-                      </a:solidFill>
-                      <a:prstDash val="solid"/>
-                      <a:round/>
-                      <a:headEnd type="none" w="med" len="med"/>
-                      <a:tailEnd type="none" w="med" len="med"/>
-                    </a:lnL>
-                    <a:lnR w="12700" cap="flat" cmpd="sng" algn="ctr">
-                      <a:solidFill>
-                        <a:srgbClr val="CBD5E0"/>
-                      </a:solidFill>
-                      <a:prstDash val="solid"/>
-                      <a:round/>
-                      <a:headEnd type="none" w="med" len="med"/>
-                      <a:tailEnd type="none" w="med" len="med"/>
-                    </a:lnR>
-                    <a:lnT w="12700" cap="flat" cmpd="sng" algn="ctr">
-                      <a:solidFill>
-                        <a:srgbClr val="CBD5E0"/>
-                      </a:solidFill>
-                      <a:prstDash val="solid"/>
-                      <a:round/>
-                      <a:headEnd type="none" w="med" len="med"/>
-                      <a:tailEnd type="none" w="med" len="med"/>
-                    </a:lnT>
-                    <a:lnB w="12700" cap="flat" cmpd="sng" algn="ctr">
-                      <a:solidFill>
-                        <a:srgbClr val="CBD5E0"/>
-                      </a:solidFill>
-                      <a:prstDash val="solid"/>
-                      <a:round/>
-                      <a:headEnd type="none" w="med" len="med"/>
-                      <a:tailEnd type="none" w="med" len="med"/>
-                    </a:lnB>
-                    <a:solidFill>
-                      <a:srgbClr val="FFFFFF"/>
-                    </a:solidFill>
-                  </a:tcPr>
-                </a:tc>
-                <a:tc>
-                  <a:txBody>
-                    <a:bodyPr/>
-                    <a:lstStyle/>
-                    <a:p>
-                      <a:pPr algn="r" indent="0" marL="0">
-                        <a:buNone/>
-                      </a:pPr>
-                      <a:r>
-                        <a:rPr lang="en-US" sz="850" dirty="0">
-                          <a:solidFill>
-                            <a:srgbClr val="2B2B2B"/>
-                          </a:solidFill>
-                          <a:latin typeface="맑은 고딕" pitchFamily="34" charset="0"/>
-                          <a:ea typeface="맑은 고딕" pitchFamily="34" charset="-122"/>
-                          <a:cs typeface="맑은 고딕" pitchFamily="34" charset="-120"/>
-                        </a:rPr>
-                        <a:t>2026-04-17</a:t>
-                      </a:r>
-                      <a:endParaRPr lang="en-US" sz="850" dirty="0">
-                        <a:latin typeface="맑은 고딕" charset="0"/>
-                        <a:ea typeface="맑은 고딕" charset="0"/>
-                        <a:cs typeface="맑은 고딕" charset="0"/>
-                      </a:endParaRPr>
-                    </a:p>
-                  </a:txBody>
-                  <a:tcPr marL="91440" marR="91440" marT="45720" marB="45720" anchor="ctr">
-                    <a:lnL w="12700" cap="flat" cmpd="sng" algn="ctr">
-                      <a:solidFill>
-                        <a:srgbClr val="CBD5E0"/>
-                      </a:solidFill>
-                      <a:prstDash val="solid"/>
-                      <a:round/>
-                      <a:headEnd type="none" w="med" len="med"/>
-                      <a:tailEnd type="none" w="med" len="med"/>
-                    </a:lnL>
-                    <a:lnR w="12700" cap="flat" cmpd="sng" algn="ctr">
-                      <a:solidFill>
-                        <a:srgbClr val="CBD5E0"/>
-                      </a:solidFill>
-                      <a:prstDash val="solid"/>
-                      <a:round/>
-                      <a:headEnd type="none" w="med" len="med"/>
-                      <a:tailEnd type="none" w="med" len="med"/>
-                    </a:lnR>
-                    <a:lnT w="12700" cap="flat" cmpd="sng" algn="ctr">
-                      <a:solidFill>
-                        <a:srgbClr val="CBD5E0"/>
-                      </a:solidFill>
-                      <a:prstDash val="solid"/>
-                      <a:round/>
-                      <a:headEnd type="none" w="med" len="med"/>
-                      <a:tailEnd type="none" w="med" len="med"/>
-                    </a:lnT>
-                    <a:lnB w="12700" cap="flat" cmpd="sng" algn="ctr">
-                      <a:solidFill>
-                        <a:srgbClr val="CBD5E0"/>
-                      </a:solidFill>
-                      <a:prstDash val="solid"/>
-                      <a:round/>
-                      <a:headEnd type="none" w="med" len="med"/>
-                      <a:tailEnd type="none" w="med" len="med"/>
-                    </a:lnB>
-                    <a:solidFill>
-                      <a:srgbClr val="FFFFFF"/>
-                    </a:solidFill>
-                  </a:tcPr>
-                </a:tc>
-                <a:tc>
-                  <a:txBody>
-                    <a:bodyPr/>
-                    <a:lstStyle/>
-                    <a:p>
-                      <a:pPr algn="ctr" indent="0" marL="0">
-                        <a:buNone/>
-                      </a:pPr>
-                      <a:endParaRPr lang="en-US" sz="850" dirty="0">
-                        <a:latin typeface="맑은 고딕" charset="0"/>
-                        <a:ea typeface="맑은 고딕" charset="0"/>
-                        <a:cs typeface="맑은 고딕" charset="0"/>
-                      </a:endParaRPr>
-                    </a:p>
-                  </a:txBody>
-                  <a:tcPr marL="91440" marR="91440" marT="45720" marB="45720" anchor="ctr">
-                    <a:lnL w="12700" cap="flat" cmpd="sng" algn="ctr">
-                      <a:solidFill>
-                        <a:srgbClr val="CBD5E0"/>
-                      </a:solidFill>
-                      <a:prstDash val="solid"/>
-                      <a:round/>
-                      <a:headEnd type="none" w="med" len="med"/>
-                      <a:tailEnd type="none" w="med" len="med"/>
-                    </a:lnL>
-                    <a:lnR w="12700" cap="flat" cmpd="sng" algn="ctr">
-                      <a:solidFill>
-                        <a:srgbClr val="CBD5E0"/>
-                      </a:solidFill>
-                      <a:prstDash val="solid"/>
-                      <a:round/>
-                      <a:headEnd type="none" w="med" len="med"/>
-                      <a:tailEnd type="none" w="med" len="med"/>
-                    </a:lnR>
-                    <a:lnT w="12700" cap="flat" cmpd="sng" algn="ctr">
-                      <a:solidFill>
-                        <a:srgbClr val="CBD5E0"/>
-                      </a:solidFill>
-                      <a:prstDash val="solid"/>
-                      <a:round/>
-                      <a:headEnd type="none" w="med" len="med"/>
-                      <a:tailEnd type="none" w="med" len="med"/>
-                    </a:lnT>
-                    <a:lnB w="12700" cap="flat" cmpd="sng" algn="ctr">
-                      <a:solidFill>
-                        <a:srgbClr val="CBD5E0"/>
-                      </a:solidFill>
-                      <a:prstDash val="solid"/>
-                      <a:round/>
-                      <a:headEnd type="none" w="med" len="med"/>
-                      <a:tailEnd type="none" w="med" len="med"/>
-                    </a:lnB>
-                    <a:solidFill>
-                      <a:srgbClr val="FFFFFF"/>
-                    </a:solidFill>
-                  </a:tcPr>
-                </a:tc>
-                <a:tc>
-                  <a:txBody>
-                    <a:bodyPr/>
-                    <a:lstStyle/>
-                    <a:p>
-                      <a:pPr algn="ctr" indent="0" marL="0">
-                        <a:buNone/>
-                      </a:pPr>
                       <a:endParaRPr lang="en-US" sz="850" dirty="0">
                         <a:latin typeface="맑은 고딕" charset="0"/>
                         <a:ea typeface="맑은 고딕" charset="0"/>
@@ -13190,7 +12789,143 @@
                           <a:ea typeface="맑은 고딕" pitchFamily="34" charset="-122"/>
                           <a:cs typeface="맑은 고딕" pitchFamily="34" charset="-120"/>
                         </a:rPr>
-                        <a:t>168.9</a:t>
+                        <a:t>-</a:t>
+                      </a:r>
+                      <a:endParaRPr lang="en-US" sz="850" dirty="0">
+                        <a:latin typeface="맑은 고딕" charset="0"/>
+                        <a:ea typeface="맑은 고딕" charset="0"/>
+                        <a:cs typeface="맑은 고딕" charset="0"/>
+                      </a:endParaRPr>
+                    </a:p>
+                  </a:txBody>
+                  <a:tcPr marL="91440" marR="91440" marT="45720" marB="45720" anchor="ctr">
+                    <a:lnL w="12700" cap="flat" cmpd="sng" algn="ctr">
+                      <a:solidFill>
+                        <a:srgbClr val="CBD5E0"/>
+                      </a:solidFill>
+                      <a:prstDash val="solid"/>
+                      <a:round/>
+                      <a:headEnd type="none" w="med" len="med"/>
+                      <a:tailEnd type="none" w="med" len="med"/>
+                    </a:lnL>
+                    <a:lnR w="12700" cap="flat" cmpd="sng" algn="ctr">
+                      <a:solidFill>
+                        <a:srgbClr val="CBD5E0"/>
+                      </a:solidFill>
+                      <a:prstDash val="solid"/>
+                      <a:round/>
+                      <a:headEnd type="none" w="med" len="med"/>
+                      <a:tailEnd type="none" w="med" len="med"/>
+                    </a:lnR>
+                    <a:lnT w="12700" cap="flat" cmpd="sng" algn="ctr">
+                      <a:solidFill>
+                        <a:srgbClr val="CBD5E0"/>
+                      </a:solidFill>
+                      <a:prstDash val="solid"/>
+                      <a:round/>
+                      <a:headEnd type="none" w="med" len="med"/>
+                      <a:tailEnd type="none" w="med" len="med"/>
+                    </a:lnT>
+                    <a:lnB w="12700" cap="flat" cmpd="sng" algn="ctr">
+                      <a:solidFill>
+                        <a:srgbClr val="CBD5E0"/>
+                      </a:solidFill>
+                      <a:prstDash val="solid"/>
+                      <a:round/>
+                      <a:headEnd type="none" w="med" len="med"/>
+                      <a:tailEnd type="none" w="med" len="med"/>
+                    </a:lnB>
+                    <a:solidFill>
+                      <a:srgbClr val="F3F6F7"/>
+                    </a:solidFill>
+                  </a:tcPr>
+                </a:tc>
+                <a:tc>
+                  <a:txBody>
+                    <a:bodyPr/>
+                    <a:lstStyle/>
+                    <a:p>
+                      <a:pPr algn="r" indent="0" marL="0">
+                        <a:buNone/>
+                      </a:pPr>
+                      <a:r>
+                        <a:rPr lang="en-US" sz="850" dirty="0">
+                          <a:solidFill>
+                            <a:srgbClr val="2B2B2B"/>
+                          </a:solidFill>
+                          <a:latin typeface="맑은 고딕" pitchFamily="34" charset="0"/>
+                          <a:ea typeface="맑은 고딕" pitchFamily="34" charset="-122"/>
+                          <a:cs typeface="맑은 고딕" pitchFamily="34" charset="-120"/>
+                        </a:rPr>
+                        <a:t>-</a:t>
+                      </a:r>
+                      <a:endParaRPr lang="en-US" sz="850" dirty="0">
+                        <a:latin typeface="맑은 고딕" charset="0"/>
+                        <a:ea typeface="맑은 고딕" charset="0"/>
+                        <a:cs typeface="맑은 고딕" charset="0"/>
+                      </a:endParaRPr>
+                    </a:p>
+                  </a:txBody>
+                  <a:tcPr marL="91440" marR="91440" marT="45720" marB="45720" anchor="ctr">
+                    <a:lnL w="12700" cap="flat" cmpd="sng" algn="ctr">
+                      <a:solidFill>
+                        <a:srgbClr val="CBD5E0"/>
+                      </a:solidFill>
+                      <a:prstDash val="solid"/>
+                      <a:round/>
+                      <a:headEnd type="none" w="med" len="med"/>
+                      <a:tailEnd type="none" w="med" len="med"/>
+                    </a:lnL>
+                    <a:lnR w="12700" cap="flat" cmpd="sng" algn="ctr">
+                      <a:solidFill>
+                        <a:srgbClr val="CBD5E0"/>
+                      </a:solidFill>
+                      <a:prstDash val="solid"/>
+                      <a:round/>
+                      <a:headEnd type="none" w="med" len="med"/>
+                      <a:tailEnd type="none" w="med" len="med"/>
+                    </a:lnR>
+                    <a:lnT w="12700" cap="flat" cmpd="sng" algn="ctr">
+                      <a:solidFill>
+                        <a:srgbClr val="CBD5E0"/>
+                      </a:solidFill>
+                      <a:prstDash val="solid"/>
+                      <a:round/>
+                      <a:headEnd type="none" w="med" len="med"/>
+                      <a:tailEnd type="none" w="med" len="med"/>
+                    </a:lnT>
+                    <a:lnB w="12700" cap="flat" cmpd="sng" algn="ctr">
+                      <a:solidFill>
+                        <a:srgbClr val="CBD5E0"/>
+                      </a:solidFill>
+                      <a:prstDash val="solid"/>
+                      <a:round/>
+                      <a:headEnd type="none" w="med" len="med"/>
+                      <a:tailEnd type="none" w="med" len="med"/>
+                    </a:lnB>
+                    <a:solidFill>
+                      <a:srgbClr val="F3F6F7"/>
+                    </a:solidFill>
+                  </a:tcPr>
+                </a:tc>
+                <a:tc>
+                  <a:txBody>
+                    <a:bodyPr/>
+                    <a:lstStyle/>
+                    <a:p>
+                      <a:pPr algn="r" indent="0" marL="0">
+                        <a:buNone/>
+                      </a:pPr>
+                      <a:r>
+                        <a:rPr lang="en-US" sz="850" dirty="0">
+                          <a:solidFill>
+                            <a:srgbClr val="2B2B2B"/>
+                          </a:solidFill>
+                          <a:latin typeface="맑은 고딕" pitchFamily="34" charset="0"/>
+                          <a:ea typeface="맑은 고딕" pitchFamily="34" charset="-122"/>
+                          <a:cs typeface="맑은 고딕" pitchFamily="34" charset="-120"/>
+                        </a:rPr>
+                        <a:t>-</a:t>
                       </a:r>
                       <a:endParaRPr lang="en-US" sz="850" dirty="0">
                         <a:latin typeface="맑은 고딕" charset="0"/>
@@ -13314,7 +13049,7 @@
                     <a:bodyPr/>
                     <a:lstStyle/>
                     <a:p>
-                      <a:pPr algn="r" indent="0" marL="0">
+                      <a:pPr algn="ctr" indent="0" marL="0">
                         <a:buNone/>
                       </a:pPr>
                       <a:r>
@@ -13328,188 +13063,6 @@
                         </a:rPr>
                         <a:t>260</a:t>
                       </a:r>
-                      <a:endParaRPr lang="en-US" sz="850" dirty="0">
-                        <a:latin typeface="맑은 고딕" charset="0"/>
-                        <a:ea typeface="맑은 고딕" charset="0"/>
-                        <a:cs typeface="맑은 고딕" charset="0"/>
-                      </a:endParaRPr>
-                    </a:p>
-                  </a:txBody>
-                  <a:tcPr marL="91440" marR="91440" marT="45720" marB="45720" anchor="ctr">
-                    <a:lnL w="12700" cap="flat" cmpd="sng" algn="ctr">
-                      <a:solidFill>
-                        <a:srgbClr val="CBD5E0"/>
-                      </a:solidFill>
-                      <a:prstDash val="solid"/>
-                      <a:round/>
-                      <a:headEnd type="none" w="med" len="med"/>
-                      <a:tailEnd type="none" w="med" len="med"/>
-                    </a:lnL>
-                    <a:lnR w="12700" cap="flat" cmpd="sng" algn="ctr">
-                      <a:solidFill>
-                        <a:srgbClr val="CBD5E0"/>
-                      </a:solidFill>
-                      <a:prstDash val="solid"/>
-                      <a:round/>
-                      <a:headEnd type="none" w="med" len="med"/>
-                      <a:tailEnd type="none" w="med" len="med"/>
-                    </a:lnR>
-                    <a:lnT w="12700" cap="flat" cmpd="sng" algn="ctr">
-                      <a:solidFill>
-                        <a:srgbClr val="CBD5E0"/>
-                      </a:solidFill>
-                      <a:prstDash val="solid"/>
-                      <a:round/>
-                      <a:headEnd type="none" w="med" len="med"/>
-                      <a:tailEnd type="none" w="med" len="med"/>
-                    </a:lnT>
-                    <a:lnB w="12700" cap="flat" cmpd="sng" algn="ctr">
-                      <a:solidFill>
-                        <a:srgbClr val="CBD5E0"/>
-                      </a:solidFill>
-                      <a:prstDash val="solid"/>
-                      <a:round/>
-                      <a:headEnd type="none" w="med" len="med"/>
-                      <a:tailEnd type="none" w="med" len="med"/>
-                    </a:lnB>
-                    <a:solidFill>
-                      <a:srgbClr val="F3F6F7"/>
-                    </a:solidFill>
-                  </a:tcPr>
-                </a:tc>
-                <a:tc>
-                  <a:txBody>
-                    <a:bodyPr/>
-                    <a:lstStyle/>
-                    <a:p>
-                      <a:pPr algn="r" indent="0" marL="0">
-                        <a:buNone/>
-                      </a:pPr>
-                      <a:r>
-                        <a:rPr lang="en-US" sz="850" dirty="0">
-                          <a:solidFill>
-                            <a:srgbClr val="2B2B2B"/>
-                          </a:solidFill>
-                          <a:latin typeface="맑은 고딕" pitchFamily="34" charset="0"/>
-                          <a:ea typeface="맑은 고딕" pitchFamily="34" charset="-122"/>
-                          <a:cs typeface="맑은 고딕" pitchFamily="34" charset="-120"/>
-                        </a:rPr>
-                        <a:t>2025-04-30</a:t>
-                      </a:r>
-                      <a:endParaRPr lang="en-US" sz="850" dirty="0">
-                        <a:latin typeface="맑은 고딕" charset="0"/>
-                        <a:ea typeface="맑은 고딕" charset="0"/>
-                        <a:cs typeface="맑은 고딕" charset="0"/>
-                      </a:endParaRPr>
-                    </a:p>
-                  </a:txBody>
-                  <a:tcPr marL="91440" marR="91440" marT="45720" marB="45720" anchor="ctr">
-                    <a:lnL w="12700" cap="flat" cmpd="sng" algn="ctr">
-                      <a:solidFill>
-                        <a:srgbClr val="CBD5E0"/>
-                      </a:solidFill>
-                      <a:prstDash val="solid"/>
-                      <a:round/>
-                      <a:headEnd type="none" w="med" len="med"/>
-                      <a:tailEnd type="none" w="med" len="med"/>
-                    </a:lnL>
-                    <a:lnR w="12700" cap="flat" cmpd="sng" algn="ctr">
-                      <a:solidFill>
-                        <a:srgbClr val="CBD5E0"/>
-                      </a:solidFill>
-                      <a:prstDash val="solid"/>
-                      <a:round/>
-                      <a:headEnd type="none" w="med" len="med"/>
-                      <a:tailEnd type="none" w="med" len="med"/>
-                    </a:lnR>
-                    <a:lnT w="12700" cap="flat" cmpd="sng" algn="ctr">
-                      <a:solidFill>
-                        <a:srgbClr val="CBD5E0"/>
-                      </a:solidFill>
-                      <a:prstDash val="solid"/>
-                      <a:round/>
-                      <a:headEnd type="none" w="med" len="med"/>
-                      <a:tailEnd type="none" w="med" len="med"/>
-                    </a:lnT>
-                    <a:lnB w="12700" cap="flat" cmpd="sng" algn="ctr">
-                      <a:solidFill>
-                        <a:srgbClr val="CBD5E0"/>
-                      </a:solidFill>
-                      <a:prstDash val="solid"/>
-                      <a:round/>
-                      <a:headEnd type="none" w="med" len="med"/>
-                      <a:tailEnd type="none" w="med" len="med"/>
-                    </a:lnB>
-                    <a:solidFill>
-                      <a:srgbClr val="F3F6F7"/>
-                    </a:solidFill>
-                  </a:tcPr>
-                </a:tc>
-                <a:tc>
-                  <a:txBody>
-                    <a:bodyPr/>
-                    <a:lstStyle/>
-                    <a:p>
-                      <a:pPr algn="ctr" indent="0" marL="0">
-                        <a:buNone/>
-                      </a:pPr>
-                      <a:endParaRPr lang="en-US" sz="850" dirty="0">
-                        <a:latin typeface="맑은 고딕" charset="0"/>
-                        <a:ea typeface="맑은 고딕" charset="0"/>
-                        <a:cs typeface="맑은 고딕" charset="0"/>
-                      </a:endParaRPr>
-                    </a:p>
-                  </a:txBody>
-                  <a:tcPr marL="91440" marR="91440" marT="45720" marB="45720" anchor="ctr">
-                    <a:lnL w="12700" cap="flat" cmpd="sng" algn="ctr">
-                      <a:solidFill>
-                        <a:srgbClr val="CBD5E0"/>
-                      </a:solidFill>
-                      <a:prstDash val="solid"/>
-                      <a:round/>
-                      <a:headEnd type="none" w="med" len="med"/>
-                      <a:tailEnd type="none" w="med" len="med"/>
-                    </a:lnL>
-                    <a:lnR w="12700" cap="flat" cmpd="sng" algn="ctr">
-                      <a:solidFill>
-                        <a:srgbClr val="CBD5E0"/>
-                      </a:solidFill>
-                      <a:prstDash val="solid"/>
-                      <a:round/>
-                      <a:headEnd type="none" w="med" len="med"/>
-                      <a:tailEnd type="none" w="med" len="med"/>
-                    </a:lnR>
-                    <a:lnT w="12700" cap="flat" cmpd="sng" algn="ctr">
-                      <a:solidFill>
-                        <a:srgbClr val="CBD5E0"/>
-                      </a:solidFill>
-                      <a:prstDash val="solid"/>
-                      <a:round/>
-                      <a:headEnd type="none" w="med" len="med"/>
-                      <a:tailEnd type="none" w="med" len="med"/>
-                    </a:lnT>
-                    <a:lnB w="12700" cap="flat" cmpd="sng" algn="ctr">
-                      <a:solidFill>
-                        <a:srgbClr val="CBD5E0"/>
-                      </a:solidFill>
-                      <a:prstDash val="solid"/>
-                      <a:round/>
-                      <a:headEnd type="none" w="med" len="med"/>
-                      <a:tailEnd type="none" w="med" len="med"/>
-                    </a:lnB>
-                    <a:solidFill>
-                      <a:srgbClr val="F3F6F7"/>
-                    </a:solidFill>
-                  </a:tcPr>
-                </a:tc>
-                <a:tc>
-                  <a:txBody>
-                    <a:bodyPr/>
-                    <a:lstStyle/>
-                    <a:p>
-                      <a:pPr algn="ctr" indent="0" marL="0">
-                        <a:buNone/>
-                      </a:pPr>
                       <a:endParaRPr lang="en-US" sz="850" dirty="0">
                         <a:latin typeface="맑은 고딕" charset="0"/>
                         <a:ea typeface="맑은 고딕" charset="0"/>
@@ -13850,7 +13403,143 @@
                           <a:ea typeface="맑은 고딕" pitchFamily="34" charset="-122"/>
                           <a:cs typeface="맑은 고딕" pitchFamily="34" charset="-120"/>
                         </a:rPr>
-                        <a:t>83.0</a:t>
+                        <a:t>-</a:t>
+                      </a:r>
+                      <a:endParaRPr lang="en-US" sz="850" dirty="0">
+                        <a:latin typeface="맑은 고딕" charset="0"/>
+                        <a:ea typeface="맑은 고딕" charset="0"/>
+                        <a:cs typeface="맑은 고딕" charset="0"/>
+                      </a:endParaRPr>
+                    </a:p>
+                  </a:txBody>
+                  <a:tcPr marL="91440" marR="91440" marT="45720" marB="45720" anchor="ctr">
+                    <a:lnL w="12700" cap="flat" cmpd="sng" algn="ctr">
+                      <a:solidFill>
+                        <a:srgbClr val="CBD5E0"/>
+                      </a:solidFill>
+                      <a:prstDash val="solid"/>
+                      <a:round/>
+                      <a:headEnd type="none" w="med" len="med"/>
+                      <a:tailEnd type="none" w="med" len="med"/>
+                    </a:lnL>
+                    <a:lnR w="12700" cap="flat" cmpd="sng" algn="ctr">
+                      <a:solidFill>
+                        <a:srgbClr val="CBD5E0"/>
+                      </a:solidFill>
+                      <a:prstDash val="solid"/>
+                      <a:round/>
+                      <a:headEnd type="none" w="med" len="med"/>
+                      <a:tailEnd type="none" w="med" len="med"/>
+                    </a:lnR>
+                    <a:lnT w="12700" cap="flat" cmpd="sng" algn="ctr">
+                      <a:solidFill>
+                        <a:srgbClr val="CBD5E0"/>
+                      </a:solidFill>
+                      <a:prstDash val="solid"/>
+                      <a:round/>
+                      <a:headEnd type="none" w="med" len="med"/>
+                      <a:tailEnd type="none" w="med" len="med"/>
+                    </a:lnT>
+                    <a:lnB w="12700" cap="flat" cmpd="sng" algn="ctr">
+                      <a:solidFill>
+                        <a:srgbClr val="CBD5E0"/>
+                      </a:solidFill>
+                      <a:prstDash val="solid"/>
+                      <a:round/>
+                      <a:headEnd type="none" w="med" len="med"/>
+                      <a:tailEnd type="none" w="med" len="med"/>
+                    </a:lnB>
+                    <a:solidFill>
+                      <a:srgbClr val="F3F6F7"/>
+                    </a:solidFill>
+                  </a:tcPr>
+                </a:tc>
+                <a:tc>
+                  <a:txBody>
+                    <a:bodyPr/>
+                    <a:lstStyle/>
+                    <a:p>
+                      <a:pPr algn="r" indent="0" marL="0">
+                        <a:buNone/>
+                      </a:pPr>
+                      <a:r>
+                        <a:rPr lang="en-US" sz="850" dirty="0">
+                          <a:solidFill>
+                            <a:srgbClr val="5B6B73"/>
+                          </a:solidFill>
+                          <a:latin typeface="맑은 고딕" pitchFamily="34" charset="0"/>
+                          <a:ea typeface="맑은 고딕" pitchFamily="34" charset="-122"/>
+                          <a:cs typeface="맑은 고딕" pitchFamily="34" charset="-120"/>
+                        </a:rPr>
+                        <a:t>-</a:t>
+                      </a:r>
+                      <a:endParaRPr lang="en-US" sz="850" dirty="0">
+                        <a:latin typeface="맑은 고딕" charset="0"/>
+                        <a:ea typeface="맑은 고딕" charset="0"/>
+                        <a:cs typeface="맑은 고딕" charset="0"/>
+                      </a:endParaRPr>
+                    </a:p>
+                  </a:txBody>
+                  <a:tcPr marL="91440" marR="91440" marT="45720" marB="45720" anchor="ctr">
+                    <a:lnL w="12700" cap="flat" cmpd="sng" algn="ctr">
+                      <a:solidFill>
+                        <a:srgbClr val="CBD5E0"/>
+                      </a:solidFill>
+                      <a:prstDash val="solid"/>
+                      <a:round/>
+                      <a:headEnd type="none" w="med" len="med"/>
+                      <a:tailEnd type="none" w="med" len="med"/>
+                    </a:lnL>
+                    <a:lnR w="12700" cap="flat" cmpd="sng" algn="ctr">
+                      <a:solidFill>
+                        <a:srgbClr val="CBD5E0"/>
+                      </a:solidFill>
+                      <a:prstDash val="solid"/>
+                      <a:round/>
+                      <a:headEnd type="none" w="med" len="med"/>
+                      <a:tailEnd type="none" w="med" len="med"/>
+                    </a:lnR>
+                    <a:lnT w="12700" cap="flat" cmpd="sng" algn="ctr">
+                      <a:solidFill>
+                        <a:srgbClr val="CBD5E0"/>
+                      </a:solidFill>
+                      <a:prstDash val="solid"/>
+                      <a:round/>
+                      <a:headEnd type="none" w="med" len="med"/>
+                      <a:tailEnd type="none" w="med" len="med"/>
+                    </a:lnT>
+                    <a:lnB w="12700" cap="flat" cmpd="sng" algn="ctr">
+                      <a:solidFill>
+                        <a:srgbClr val="CBD5E0"/>
+                      </a:solidFill>
+                      <a:prstDash val="solid"/>
+                      <a:round/>
+                      <a:headEnd type="none" w="med" len="med"/>
+                      <a:tailEnd type="none" w="med" len="med"/>
+                    </a:lnB>
+                    <a:solidFill>
+                      <a:srgbClr val="F3F6F7"/>
+                    </a:solidFill>
+                  </a:tcPr>
+                </a:tc>
+                <a:tc>
+                  <a:txBody>
+                    <a:bodyPr/>
+                    <a:lstStyle/>
+                    <a:p>
+                      <a:pPr algn="r" indent="0" marL="0">
+                        <a:buNone/>
+                      </a:pPr>
+                      <a:r>
+                        <a:rPr lang="en-US" sz="850" dirty="0">
+                          <a:solidFill>
+                            <a:srgbClr val="5B6B73"/>
+                          </a:solidFill>
+                          <a:latin typeface="맑은 고딕" pitchFamily="34" charset="0"/>
+                          <a:ea typeface="맑은 고딕" pitchFamily="34" charset="-122"/>
+                          <a:cs typeface="맑은 고딕" pitchFamily="34" charset="-120"/>
+                        </a:rPr>
+                        <a:t>-</a:t>
                       </a:r>
                       <a:endParaRPr lang="en-US" sz="850" dirty="0">
                         <a:latin typeface="맑은 고딕" charset="0"/>
@@ -13974,7 +13663,7 @@
                     <a:bodyPr/>
                     <a:lstStyle/>
                     <a:p>
-                      <a:pPr algn="r" indent="0" marL="0">
+                      <a:pPr algn="ctr" indent="0" marL="0">
                         <a:buNone/>
                       </a:pPr>
                       <a:r>
@@ -13988,199 +13677,6 @@
                         </a:rPr>
                         <a:t>0</a:t>
                       </a:r>
-                      <a:endParaRPr lang="en-US" sz="850" dirty="0">
-                        <a:latin typeface="맑은 고딕" charset="0"/>
-                        <a:ea typeface="맑은 고딕" charset="0"/>
-                        <a:cs typeface="맑은 고딕" charset="0"/>
-                      </a:endParaRPr>
-                    </a:p>
-                  </a:txBody>
-                  <a:tcPr marL="91440" marR="91440" marT="45720" marB="45720" anchor="ctr">
-                    <a:lnL w="12700" cap="flat" cmpd="sng" algn="ctr">
-                      <a:solidFill>
-                        <a:srgbClr val="CBD5E0"/>
-                      </a:solidFill>
-                      <a:prstDash val="solid"/>
-                      <a:round/>
-                      <a:headEnd type="none" w="med" len="med"/>
-                      <a:tailEnd type="none" w="med" len="med"/>
-                    </a:lnL>
-                    <a:lnR w="12700" cap="flat" cmpd="sng" algn="ctr">
-                      <a:solidFill>
-                        <a:srgbClr val="CBD5E0"/>
-                      </a:solidFill>
-                      <a:prstDash val="solid"/>
-                      <a:round/>
-                      <a:headEnd type="none" w="med" len="med"/>
-                      <a:tailEnd type="none" w="med" len="med"/>
-                    </a:lnR>
-                    <a:lnT w="12700" cap="flat" cmpd="sng" algn="ctr">
-                      <a:solidFill>
-                        <a:srgbClr val="CBD5E0"/>
-                      </a:solidFill>
-                      <a:prstDash val="solid"/>
-                      <a:round/>
-                      <a:headEnd type="none" w="med" len="med"/>
-                      <a:tailEnd type="none" w="med" len="med"/>
-                    </a:lnT>
-                    <a:lnB w="12700" cap="flat" cmpd="sng" algn="ctr">
-                      <a:solidFill>
-                        <a:srgbClr val="CBD5E0"/>
-                      </a:solidFill>
-                      <a:prstDash val="solid"/>
-                      <a:round/>
-                      <a:headEnd type="none" w="med" len="med"/>
-                      <a:tailEnd type="none" w="med" len="med"/>
-                    </a:lnB>
-                    <a:solidFill>
-                      <a:srgbClr val="F3F6F7"/>
-                    </a:solidFill>
-                  </a:tcPr>
-                </a:tc>
-                <a:tc>
-                  <a:txBody>
-                    <a:bodyPr/>
-                    <a:lstStyle/>
-                    <a:p>
-                      <a:pPr algn="r" indent="0" marL="0">
-                        <a:buNone/>
-                      </a:pPr>
-                      <a:r>
-                        <a:rPr lang="en-US" sz="850" dirty="0">
-                          <a:solidFill>
-                            <a:srgbClr val="5B6B73"/>
-                          </a:solidFill>
-                          <a:latin typeface="맑은 고딕" pitchFamily="34" charset="0"/>
-                          <a:ea typeface="맑은 고딕" pitchFamily="34" charset="-122"/>
-                          <a:cs typeface="맑은 고딕" pitchFamily="34" charset="-120"/>
-                        </a:rPr>
-                        <a:t>-</a:t>
-                      </a:r>
-                      <a:endParaRPr lang="en-US" sz="850" dirty="0">
-                        <a:latin typeface="맑은 고딕" charset="0"/>
-                        <a:ea typeface="맑은 고딕" charset="0"/>
-                        <a:cs typeface="맑은 고딕" charset="0"/>
-                      </a:endParaRPr>
-                    </a:p>
-                  </a:txBody>
-                  <a:tcPr marL="91440" marR="91440" marT="45720" marB="45720" anchor="ctr">
-                    <a:lnL w="12700" cap="flat" cmpd="sng" algn="ctr">
-                      <a:solidFill>
-                        <a:srgbClr val="CBD5E0"/>
-                      </a:solidFill>
-                      <a:prstDash val="solid"/>
-                      <a:round/>
-                      <a:headEnd type="none" w="med" len="med"/>
-                      <a:tailEnd type="none" w="med" len="med"/>
-                    </a:lnL>
-                    <a:lnR w="12700" cap="flat" cmpd="sng" algn="ctr">
-                      <a:solidFill>
-                        <a:srgbClr val="CBD5E0"/>
-                      </a:solidFill>
-                      <a:prstDash val="solid"/>
-                      <a:round/>
-                      <a:headEnd type="none" w="med" len="med"/>
-                      <a:tailEnd type="none" w="med" len="med"/>
-                    </a:lnR>
-                    <a:lnT w="12700" cap="flat" cmpd="sng" algn="ctr">
-                      <a:solidFill>
-                        <a:srgbClr val="CBD5E0"/>
-                      </a:solidFill>
-                      <a:prstDash val="solid"/>
-                      <a:round/>
-                      <a:headEnd type="none" w="med" len="med"/>
-                      <a:tailEnd type="none" w="med" len="med"/>
-                    </a:lnT>
-                    <a:lnB w="12700" cap="flat" cmpd="sng" algn="ctr">
-                      <a:solidFill>
-                        <a:srgbClr val="CBD5E0"/>
-                      </a:solidFill>
-                      <a:prstDash val="solid"/>
-                      <a:round/>
-                      <a:headEnd type="none" w="med" len="med"/>
-                      <a:tailEnd type="none" w="med" len="med"/>
-                    </a:lnB>
-                    <a:solidFill>
-                      <a:srgbClr val="F3F6F7"/>
-                    </a:solidFill>
-                  </a:tcPr>
-                </a:tc>
-                <a:tc>
-                  <a:txBody>
-                    <a:bodyPr/>
-                    <a:lstStyle/>
-                    <a:p>
-                      <a:pPr algn="ctr" indent="0" marL="0">
-                        <a:buNone/>
-                      </a:pPr>
-                      <a:r>
-                        <a:rPr lang="en-US" sz="850" dirty="0">
-                          <a:solidFill>
-                            <a:srgbClr val="5B6B73"/>
-                          </a:solidFill>
-                          <a:latin typeface="맑은 고딕" pitchFamily="34" charset="0"/>
-                          <a:ea typeface="맑은 고딕" pitchFamily="34" charset="-122"/>
-                          <a:cs typeface="맑은 고딕" pitchFamily="34" charset="-120"/>
-                        </a:rPr>
-                        <a:t>자가사용</a:t>
-                      </a:r>
-                      <a:endParaRPr lang="en-US" sz="850" dirty="0">
-                        <a:latin typeface="맑은 고딕" charset="0"/>
-                        <a:ea typeface="맑은 고딕" charset="0"/>
-                        <a:cs typeface="맑은 고딕" charset="0"/>
-                      </a:endParaRPr>
-                    </a:p>
-                  </a:txBody>
-                  <a:tcPr marL="91440" marR="91440" marT="45720" marB="45720" anchor="ctr">
-                    <a:lnL w="12700" cap="flat" cmpd="sng" algn="ctr">
-                      <a:solidFill>
-                        <a:srgbClr val="CBD5E0"/>
-                      </a:solidFill>
-                      <a:prstDash val="solid"/>
-                      <a:round/>
-                      <a:headEnd type="none" w="med" len="med"/>
-                      <a:tailEnd type="none" w="med" len="med"/>
-                    </a:lnL>
-                    <a:lnR w="12700" cap="flat" cmpd="sng" algn="ctr">
-                      <a:solidFill>
-                        <a:srgbClr val="CBD5E0"/>
-                      </a:solidFill>
-                      <a:prstDash val="solid"/>
-                      <a:round/>
-                      <a:headEnd type="none" w="med" len="med"/>
-                      <a:tailEnd type="none" w="med" len="med"/>
-                    </a:lnR>
-                    <a:lnT w="12700" cap="flat" cmpd="sng" algn="ctr">
-                      <a:solidFill>
-                        <a:srgbClr val="CBD5E0"/>
-                      </a:solidFill>
-                      <a:prstDash val="solid"/>
-                      <a:round/>
-                      <a:headEnd type="none" w="med" len="med"/>
-                      <a:tailEnd type="none" w="med" len="med"/>
-                    </a:lnT>
-                    <a:lnB w="12700" cap="flat" cmpd="sng" algn="ctr">
-                      <a:solidFill>
-                        <a:srgbClr val="CBD5E0"/>
-                      </a:solidFill>
-                      <a:prstDash val="solid"/>
-                      <a:round/>
-                      <a:headEnd type="none" w="med" len="med"/>
-                      <a:tailEnd type="none" w="med" len="med"/>
-                    </a:lnB>
-                    <a:solidFill>
-                      <a:srgbClr val="F3F6F7"/>
-                    </a:solidFill>
-                  </a:tcPr>
-                </a:tc>
-                <a:tc>
-                  <a:txBody>
-                    <a:bodyPr/>
-                    <a:lstStyle/>
-                    <a:p>
-                      <a:pPr algn="ctr" indent="0" marL="0">
-                        <a:buNone/>
-                      </a:pPr>
                       <a:endParaRPr lang="en-US" sz="850" dirty="0">
                         <a:latin typeface="맑은 고딕" charset="0"/>
                         <a:ea typeface="맑은 고딕" charset="0"/>
@@ -14521,7 +14017,143 @@
                           <a:ea typeface="맑은 고딕" pitchFamily="34" charset="-122"/>
                           <a:cs typeface="맑은 고딕" pitchFamily="34" charset="-120"/>
                         </a:rPr>
-                        <a:t>183.8</a:t>
+                        <a:t>-</a:t>
+                      </a:r>
+                      <a:endParaRPr lang="en-US" sz="850" dirty="0">
+                        <a:latin typeface="맑은 고딕" charset="0"/>
+                        <a:ea typeface="맑은 고딕" charset="0"/>
+                        <a:cs typeface="맑은 고딕" charset="0"/>
+                      </a:endParaRPr>
+                    </a:p>
+                  </a:txBody>
+                  <a:tcPr marL="91440" marR="91440" marT="45720" marB="45720" anchor="ctr">
+                    <a:lnL w="12700" cap="flat" cmpd="sng" algn="ctr">
+                      <a:solidFill>
+                        <a:srgbClr val="CBD5E0"/>
+                      </a:solidFill>
+                      <a:prstDash val="solid"/>
+                      <a:round/>
+                      <a:headEnd type="none" w="med" len="med"/>
+                      <a:tailEnd type="none" w="med" len="med"/>
+                    </a:lnL>
+                    <a:lnR w="12700" cap="flat" cmpd="sng" algn="ctr">
+                      <a:solidFill>
+                        <a:srgbClr val="CBD5E0"/>
+                      </a:solidFill>
+                      <a:prstDash val="solid"/>
+                      <a:round/>
+                      <a:headEnd type="none" w="med" len="med"/>
+                      <a:tailEnd type="none" w="med" len="med"/>
+                    </a:lnR>
+                    <a:lnT w="12700" cap="flat" cmpd="sng" algn="ctr">
+                      <a:solidFill>
+                        <a:srgbClr val="CBD5E0"/>
+                      </a:solidFill>
+                      <a:prstDash val="solid"/>
+                      <a:round/>
+                      <a:headEnd type="none" w="med" len="med"/>
+                      <a:tailEnd type="none" w="med" len="med"/>
+                    </a:lnT>
+                    <a:lnB w="12700" cap="flat" cmpd="sng" algn="ctr">
+                      <a:solidFill>
+                        <a:srgbClr val="CBD5E0"/>
+                      </a:solidFill>
+                      <a:prstDash val="solid"/>
+                      <a:round/>
+                      <a:headEnd type="none" w="med" len="med"/>
+                      <a:tailEnd type="none" w="med" len="med"/>
+                    </a:lnB>
+                    <a:solidFill>
+                      <a:srgbClr val="F3F6F7"/>
+                    </a:solidFill>
+                  </a:tcPr>
+                </a:tc>
+                <a:tc>
+                  <a:txBody>
+                    <a:bodyPr/>
+                    <a:lstStyle/>
+                    <a:p>
+                      <a:pPr algn="r" indent="0" marL="0">
+                        <a:buNone/>
+                      </a:pPr>
+                      <a:r>
+                        <a:rPr lang="en-US" sz="850" dirty="0">
+                          <a:solidFill>
+                            <a:srgbClr val="2B2B2B"/>
+                          </a:solidFill>
+                          <a:latin typeface="맑은 고딕" pitchFamily="34" charset="0"/>
+                          <a:ea typeface="맑은 고딕" pitchFamily="34" charset="-122"/>
+                          <a:cs typeface="맑은 고딕" pitchFamily="34" charset="-120"/>
+                        </a:rPr>
+                        <a:t>-</a:t>
+                      </a:r>
+                      <a:endParaRPr lang="en-US" sz="850" dirty="0">
+                        <a:latin typeface="맑은 고딕" charset="0"/>
+                        <a:ea typeface="맑은 고딕" charset="0"/>
+                        <a:cs typeface="맑은 고딕" charset="0"/>
+                      </a:endParaRPr>
+                    </a:p>
+                  </a:txBody>
+                  <a:tcPr marL="91440" marR="91440" marT="45720" marB="45720" anchor="ctr">
+                    <a:lnL w="12700" cap="flat" cmpd="sng" algn="ctr">
+                      <a:solidFill>
+                        <a:srgbClr val="CBD5E0"/>
+                      </a:solidFill>
+                      <a:prstDash val="solid"/>
+                      <a:round/>
+                      <a:headEnd type="none" w="med" len="med"/>
+                      <a:tailEnd type="none" w="med" len="med"/>
+                    </a:lnL>
+                    <a:lnR w="12700" cap="flat" cmpd="sng" algn="ctr">
+                      <a:solidFill>
+                        <a:srgbClr val="CBD5E0"/>
+                      </a:solidFill>
+                      <a:prstDash val="solid"/>
+                      <a:round/>
+                      <a:headEnd type="none" w="med" len="med"/>
+                      <a:tailEnd type="none" w="med" len="med"/>
+                    </a:lnR>
+                    <a:lnT w="12700" cap="flat" cmpd="sng" algn="ctr">
+                      <a:solidFill>
+                        <a:srgbClr val="CBD5E0"/>
+                      </a:solidFill>
+                      <a:prstDash val="solid"/>
+                      <a:round/>
+                      <a:headEnd type="none" w="med" len="med"/>
+                      <a:tailEnd type="none" w="med" len="med"/>
+                    </a:lnT>
+                    <a:lnB w="12700" cap="flat" cmpd="sng" algn="ctr">
+                      <a:solidFill>
+                        <a:srgbClr val="CBD5E0"/>
+                      </a:solidFill>
+                      <a:prstDash val="solid"/>
+                      <a:round/>
+                      <a:headEnd type="none" w="med" len="med"/>
+                      <a:tailEnd type="none" w="med" len="med"/>
+                    </a:lnB>
+                    <a:solidFill>
+                      <a:srgbClr val="F3F6F7"/>
+                    </a:solidFill>
+                  </a:tcPr>
+                </a:tc>
+                <a:tc>
+                  <a:txBody>
+                    <a:bodyPr/>
+                    <a:lstStyle/>
+                    <a:p>
+                      <a:pPr algn="r" indent="0" marL="0">
+                        <a:buNone/>
+                      </a:pPr>
+                      <a:r>
+                        <a:rPr lang="en-US" sz="850" dirty="0">
+                          <a:solidFill>
+                            <a:srgbClr val="2B2B2B"/>
+                          </a:solidFill>
+                          <a:latin typeface="맑은 고딕" pitchFamily="34" charset="0"/>
+                          <a:ea typeface="맑은 고딕" pitchFamily="34" charset="-122"/>
+                          <a:cs typeface="맑은 고딕" pitchFamily="34" charset="-120"/>
+                        </a:rPr>
+                        <a:t>-</a:t>
                       </a:r>
                       <a:endParaRPr lang="en-US" sz="850" dirty="0">
                         <a:latin typeface="맑은 고딕" charset="0"/>
@@ -14645,7 +14277,7 @@
                     <a:bodyPr/>
                     <a:lstStyle/>
                     <a:p>
-                      <a:pPr algn="r" indent="0" marL="0">
+                      <a:pPr algn="ctr" indent="0" marL="0">
                         <a:buNone/>
                       </a:pPr>
                       <a:r>
@@ -14659,199 +14291,6 @@
                         </a:rPr>
                         <a:t>165</a:t>
                       </a:r>
-                      <a:endParaRPr lang="en-US" sz="850" dirty="0">
-                        <a:latin typeface="맑은 고딕" charset="0"/>
-                        <a:ea typeface="맑은 고딕" charset="0"/>
-                        <a:cs typeface="맑은 고딕" charset="0"/>
-                      </a:endParaRPr>
-                    </a:p>
-                  </a:txBody>
-                  <a:tcPr marL="91440" marR="91440" marT="45720" marB="45720" anchor="ctr">
-                    <a:lnL w="12700" cap="flat" cmpd="sng" algn="ctr">
-                      <a:solidFill>
-                        <a:srgbClr val="CBD5E0"/>
-                      </a:solidFill>
-                      <a:prstDash val="solid"/>
-                      <a:round/>
-                      <a:headEnd type="none" w="med" len="med"/>
-                      <a:tailEnd type="none" w="med" len="med"/>
-                    </a:lnL>
-                    <a:lnR w="12700" cap="flat" cmpd="sng" algn="ctr">
-                      <a:solidFill>
-                        <a:srgbClr val="CBD5E0"/>
-                      </a:solidFill>
-                      <a:prstDash val="solid"/>
-                      <a:round/>
-                      <a:headEnd type="none" w="med" len="med"/>
-                      <a:tailEnd type="none" w="med" len="med"/>
-                    </a:lnR>
-                    <a:lnT w="12700" cap="flat" cmpd="sng" algn="ctr">
-                      <a:solidFill>
-                        <a:srgbClr val="CBD5E0"/>
-                      </a:solidFill>
-                      <a:prstDash val="solid"/>
-                      <a:round/>
-                      <a:headEnd type="none" w="med" len="med"/>
-                      <a:tailEnd type="none" w="med" len="med"/>
-                    </a:lnT>
-                    <a:lnB w="12700" cap="flat" cmpd="sng" algn="ctr">
-                      <a:solidFill>
-                        <a:srgbClr val="CBD5E0"/>
-                      </a:solidFill>
-                      <a:prstDash val="solid"/>
-                      <a:round/>
-                      <a:headEnd type="none" w="med" len="med"/>
-                      <a:tailEnd type="none" w="med" len="med"/>
-                    </a:lnB>
-                    <a:solidFill>
-                      <a:srgbClr val="F3F6F7"/>
-                    </a:solidFill>
-                  </a:tcPr>
-                </a:tc>
-                <a:tc>
-                  <a:txBody>
-                    <a:bodyPr/>
-                    <a:lstStyle/>
-                    <a:p>
-                      <a:pPr algn="r" indent="0" marL="0">
-                        <a:buNone/>
-                      </a:pPr>
-                      <a:r>
-                        <a:rPr lang="en-US" sz="850" dirty="0">
-                          <a:solidFill>
-                            <a:srgbClr val="2B2B2B"/>
-                          </a:solidFill>
-                          <a:latin typeface="맑은 고딕" pitchFamily="34" charset="0"/>
-                          <a:ea typeface="맑은 고딕" pitchFamily="34" charset="-122"/>
-                          <a:cs typeface="맑은 고딕" pitchFamily="34" charset="-120"/>
-                        </a:rPr>
-                        <a:t>2026-08-31</a:t>
-                      </a:r>
-                      <a:endParaRPr lang="en-US" sz="850" dirty="0">
-                        <a:latin typeface="맑은 고딕" charset="0"/>
-                        <a:ea typeface="맑은 고딕" charset="0"/>
-                        <a:cs typeface="맑은 고딕" charset="0"/>
-                      </a:endParaRPr>
-                    </a:p>
-                  </a:txBody>
-                  <a:tcPr marL="91440" marR="91440" marT="45720" marB="45720" anchor="ctr">
-                    <a:lnL w="12700" cap="flat" cmpd="sng" algn="ctr">
-                      <a:solidFill>
-                        <a:srgbClr val="CBD5E0"/>
-                      </a:solidFill>
-                      <a:prstDash val="solid"/>
-                      <a:round/>
-                      <a:headEnd type="none" w="med" len="med"/>
-                      <a:tailEnd type="none" w="med" len="med"/>
-                    </a:lnL>
-                    <a:lnR w="12700" cap="flat" cmpd="sng" algn="ctr">
-                      <a:solidFill>
-                        <a:srgbClr val="CBD5E0"/>
-                      </a:solidFill>
-                      <a:prstDash val="solid"/>
-                      <a:round/>
-                      <a:headEnd type="none" w="med" len="med"/>
-                      <a:tailEnd type="none" w="med" len="med"/>
-                    </a:lnR>
-                    <a:lnT w="12700" cap="flat" cmpd="sng" algn="ctr">
-                      <a:solidFill>
-                        <a:srgbClr val="CBD5E0"/>
-                      </a:solidFill>
-                      <a:prstDash val="solid"/>
-                      <a:round/>
-                      <a:headEnd type="none" w="med" len="med"/>
-                      <a:tailEnd type="none" w="med" len="med"/>
-                    </a:lnT>
-                    <a:lnB w="12700" cap="flat" cmpd="sng" algn="ctr">
-                      <a:solidFill>
-                        <a:srgbClr val="CBD5E0"/>
-                      </a:solidFill>
-                      <a:prstDash val="solid"/>
-                      <a:round/>
-                      <a:headEnd type="none" w="med" len="med"/>
-                      <a:tailEnd type="none" w="med" len="med"/>
-                    </a:lnB>
-                    <a:solidFill>
-                      <a:srgbClr val="F3F6F7"/>
-                    </a:solidFill>
-                  </a:tcPr>
-                </a:tc>
-                <a:tc>
-                  <a:txBody>
-                    <a:bodyPr/>
-                    <a:lstStyle/>
-                    <a:p>
-                      <a:pPr algn="ctr" indent="0" marL="0">
-                        <a:buNone/>
-                      </a:pPr>
-                      <a:r>
-                        <a:rPr lang="en-US" sz="850" dirty="0">
-                          <a:solidFill>
-                            <a:srgbClr val="2B2B2B"/>
-                          </a:solidFill>
-                          <a:latin typeface="맑은 고딕" pitchFamily="34" charset="0"/>
-                          <a:ea typeface="맑은 고딕" pitchFamily="34" charset="-122"/>
-                          <a:cs typeface="맑은 고딕" pitchFamily="34" charset="-120"/>
-                        </a:rPr>
-                        <a:t>로뎀나무내과 통합계약</a:t>
-                      </a:r>
-                      <a:endParaRPr lang="en-US" sz="850" dirty="0">
-                        <a:latin typeface="맑은 고딕" charset="0"/>
-                        <a:ea typeface="맑은 고딕" charset="0"/>
-                        <a:cs typeface="맑은 고딕" charset="0"/>
-                      </a:endParaRPr>
-                    </a:p>
-                  </a:txBody>
-                  <a:tcPr marL="91440" marR="91440" marT="45720" marB="45720" anchor="ctr">
-                    <a:lnL w="12700" cap="flat" cmpd="sng" algn="ctr">
-                      <a:solidFill>
-                        <a:srgbClr val="CBD5E0"/>
-                      </a:solidFill>
-                      <a:prstDash val="solid"/>
-                      <a:round/>
-                      <a:headEnd type="none" w="med" len="med"/>
-                      <a:tailEnd type="none" w="med" len="med"/>
-                    </a:lnL>
-                    <a:lnR w="12700" cap="flat" cmpd="sng" algn="ctr">
-                      <a:solidFill>
-                        <a:srgbClr val="CBD5E0"/>
-                      </a:solidFill>
-                      <a:prstDash val="solid"/>
-                      <a:round/>
-                      <a:headEnd type="none" w="med" len="med"/>
-                      <a:tailEnd type="none" w="med" len="med"/>
-                    </a:lnR>
-                    <a:lnT w="12700" cap="flat" cmpd="sng" algn="ctr">
-                      <a:solidFill>
-                        <a:srgbClr val="CBD5E0"/>
-                      </a:solidFill>
-                      <a:prstDash val="solid"/>
-                      <a:round/>
-                      <a:headEnd type="none" w="med" len="med"/>
-                      <a:tailEnd type="none" w="med" len="med"/>
-                    </a:lnT>
-                    <a:lnB w="12700" cap="flat" cmpd="sng" algn="ctr">
-                      <a:solidFill>
-                        <a:srgbClr val="CBD5E0"/>
-                      </a:solidFill>
-                      <a:prstDash val="solid"/>
-                      <a:round/>
-                      <a:headEnd type="none" w="med" len="med"/>
-                      <a:tailEnd type="none" w="med" len="med"/>
-                    </a:lnB>
-                    <a:solidFill>
-                      <a:srgbClr val="F3F6F7"/>
-                    </a:solidFill>
-                  </a:tcPr>
-                </a:tc>
-                <a:tc>
-                  <a:txBody>
-                    <a:bodyPr/>
-                    <a:lstStyle/>
-                    <a:p>
-                      <a:pPr algn="ctr" indent="0" marL="0">
-                        <a:buNone/>
-                      </a:pPr>
                       <a:endParaRPr lang="en-US" sz="850" dirty="0">
                         <a:latin typeface="맑은 고딕" charset="0"/>
                         <a:ea typeface="맑은 고딕" charset="0"/>
@@ -15170,7 +14609,143 @@
                           <a:ea typeface="맑은 고딕" pitchFamily="34" charset="-122"/>
                           <a:cs typeface="맑은 고딕" pitchFamily="34" charset="-120"/>
                         </a:rPr>
-                        <a:t>1441.3</a:t>
+                        <a:t>-</a:t>
+                      </a:r>
+                      <a:endParaRPr lang="en-US" sz="850" dirty="0">
+                        <a:latin typeface="맑은 고딕" charset="0"/>
+                        <a:ea typeface="맑은 고딕" charset="0"/>
+                        <a:cs typeface="맑은 고딕" charset="0"/>
+                      </a:endParaRPr>
+                    </a:p>
+                  </a:txBody>
+                  <a:tcPr marL="91440" marR="91440" marT="45720" marB="45720" anchor="ctr">
+                    <a:lnL w="12700" cap="flat" cmpd="sng" algn="ctr">
+                      <a:solidFill>
+                        <a:srgbClr val="CBD5E0"/>
+                      </a:solidFill>
+                      <a:prstDash val="solid"/>
+                      <a:round/>
+                      <a:headEnd type="none" w="med" len="med"/>
+                      <a:tailEnd type="none" w="med" len="med"/>
+                    </a:lnL>
+                    <a:lnR w="12700" cap="flat" cmpd="sng" algn="ctr">
+                      <a:solidFill>
+                        <a:srgbClr val="CBD5E0"/>
+                      </a:solidFill>
+                      <a:prstDash val="solid"/>
+                      <a:round/>
+                      <a:headEnd type="none" w="med" len="med"/>
+                      <a:tailEnd type="none" w="med" len="med"/>
+                    </a:lnR>
+                    <a:lnT w="12700" cap="flat" cmpd="sng" algn="ctr">
+                      <a:solidFill>
+                        <a:srgbClr val="CBD5E0"/>
+                      </a:solidFill>
+                      <a:prstDash val="solid"/>
+                      <a:round/>
+                      <a:headEnd type="none" w="med" len="med"/>
+                      <a:tailEnd type="none" w="med" len="med"/>
+                    </a:lnT>
+                    <a:lnB w="12700" cap="flat" cmpd="sng" algn="ctr">
+                      <a:solidFill>
+                        <a:srgbClr val="CBD5E0"/>
+                      </a:solidFill>
+                      <a:prstDash val="solid"/>
+                      <a:round/>
+                      <a:headEnd type="none" w="med" len="med"/>
+                      <a:tailEnd type="none" w="med" len="med"/>
+                    </a:lnB>
+                    <a:solidFill>
+                      <a:srgbClr val="FFFFFF"/>
+                    </a:solidFill>
+                  </a:tcPr>
+                </a:tc>
+                <a:tc>
+                  <a:txBody>
+                    <a:bodyPr/>
+                    <a:lstStyle/>
+                    <a:p>
+                      <a:pPr algn="r" indent="0" marL="0">
+                        <a:buNone/>
+                      </a:pPr>
+                      <a:r>
+                        <a:rPr lang="en-US" sz="850" dirty="0">
+                          <a:solidFill>
+                            <a:srgbClr val="2B2B2B"/>
+                          </a:solidFill>
+                          <a:latin typeface="맑은 고딕" pitchFamily="34" charset="0"/>
+                          <a:ea typeface="맑은 고딕" pitchFamily="34" charset="-122"/>
+                          <a:cs typeface="맑은 고딕" pitchFamily="34" charset="-120"/>
+                        </a:rPr>
+                        <a:t>-</a:t>
+                      </a:r>
+                      <a:endParaRPr lang="en-US" sz="850" dirty="0">
+                        <a:latin typeface="맑은 고딕" charset="0"/>
+                        <a:ea typeface="맑은 고딕" charset="0"/>
+                        <a:cs typeface="맑은 고딕" charset="0"/>
+                      </a:endParaRPr>
+                    </a:p>
+                  </a:txBody>
+                  <a:tcPr marL="91440" marR="91440" marT="45720" marB="45720" anchor="ctr">
+                    <a:lnL w="12700" cap="flat" cmpd="sng" algn="ctr">
+                      <a:solidFill>
+                        <a:srgbClr val="CBD5E0"/>
+                      </a:solidFill>
+                      <a:prstDash val="solid"/>
+                      <a:round/>
+                      <a:headEnd type="none" w="med" len="med"/>
+                      <a:tailEnd type="none" w="med" len="med"/>
+                    </a:lnL>
+                    <a:lnR w="12700" cap="flat" cmpd="sng" algn="ctr">
+                      <a:solidFill>
+                        <a:srgbClr val="CBD5E0"/>
+                      </a:solidFill>
+                      <a:prstDash val="solid"/>
+                      <a:round/>
+                      <a:headEnd type="none" w="med" len="med"/>
+                      <a:tailEnd type="none" w="med" len="med"/>
+                    </a:lnR>
+                    <a:lnT w="12700" cap="flat" cmpd="sng" algn="ctr">
+                      <a:solidFill>
+                        <a:srgbClr val="CBD5E0"/>
+                      </a:solidFill>
+                      <a:prstDash val="solid"/>
+                      <a:round/>
+                      <a:headEnd type="none" w="med" len="med"/>
+                      <a:tailEnd type="none" w="med" len="med"/>
+                    </a:lnT>
+                    <a:lnB w="12700" cap="flat" cmpd="sng" algn="ctr">
+                      <a:solidFill>
+                        <a:srgbClr val="CBD5E0"/>
+                      </a:solidFill>
+                      <a:prstDash val="solid"/>
+                      <a:round/>
+                      <a:headEnd type="none" w="med" len="med"/>
+                      <a:tailEnd type="none" w="med" len="med"/>
+                    </a:lnB>
+                    <a:solidFill>
+                      <a:srgbClr val="FFFFFF"/>
+                    </a:solidFill>
+                  </a:tcPr>
+                </a:tc>
+                <a:tc>
+                  <a:txBody>
+                    <a:bodyPr/>
+                    <a:lstStyle/>
+                    <a:p>
+                      <a:pPr algn="r" indent="0" marL="0">
+                        <a:buNone/>
+                      </a:pPr>
+                      <a:r>
+                        <a:rPr lang="en-US" sz="850" dirty="0">
+                          <a:solidFill>
+                            <a:srgbClr val="2B2B2B"/>
+                          </a:solidFill>
+                          <a:latin typeface="맑은 고딕" pitchFamily="34" charset="0"/>
+                          <a:ea typeface="맑은 고딕" pitchFamily="34" charset="-122"/>
+                          <a:cs typeface="맑은 고딕" pitchFamily="34" charset="-120"/>
+                        </a:rPr>
+                        <a:t>-</a:t>
                       </a:r>
                       <a:endParaRPr lang="en-US" sz="850" dirty="0">
                         <a:latin typeface="맑은 고딕" charset="0"/>
@@ -15294,7 +14869,7 @@
                     <a:bodyPr/>
                     <a:lstStyle/>
                     <a:p>
-                      <a:pPr algn="r" indent="0" marL="0">
+                      <a:pPr algn="ctr" indent="0" marL="0">
                         <a:buNone/>
                       </a:pPr>
                       <a:r>
@@ -15357,177 +14932,6 @@
                     </a:solidFill>
                   </a:tcPr>
                 </a:tc>
-                <a:tc>
-                  <a:txBody>
-                    <a:bodyPr/>
-                    <a:lstStyle/>
-                    <a:p>
-                      <a:pPr algn="r" indent="0" marL="0">
-                        <a:buNone/>
-                      </a:pPr>
-                      <a:endParaRPr lang="en-US" sz="850" dirty="0">
-                        <a:latin typeface="맑은 고딕" charset="0"/>
-                        <a:ea typeface="맑은 고딕" charset="0"/>
-                        <a:cs typeface="맑은 고딕" charset="0"/>
-                      </a:endParaRPr>
-                    </a:p>
-                  </a:txBody>
-                  <a:tcPr marL="91440" marR="91440" marT="45720" marB="45720" anchor="ctr">
-                    <a:lnL w="12700" cap="flat" cmpd="sng" algn="ctr">
-                      <a:solidFill>
-                        <a:srgbClr val="CBD5E0"/>
-                      </a:solidFill>
-                      <a:prstDash val="solid"/>
-                      <a:round/>
-                      <a:headEnd type="none" w="med" len="med"/>
-                      <a:tailEnd type="none" w="med" len="med"/>
-                    </a:lnL>
-                    <a:lnR w="12700" cap="flat" cmpd="sng" algn="ctr">
-                      <a:solidFill>
-                        <a:srgbClr val="CBD5E0"/>
-                      </a:solidFill>
-                      <a:prstDash val="solid"/>
-                      <a:round/>
-                      <a:headEnd type="none" w="med" len="med"/>
-                      <a:tailEnd type="none" w="med" len="med"/>
-                    </a:lnR>
-                    <a:lnT w="12700" cap="flat" cmpd="sng" algn="ctr">
-                      <a:solidFill>
-                        <a:srgbClr val="CBD5E0"/>
-                      </a:solidFill>
-                      <a:prstDash val="solid"/>
-                      <a:round/>
-                      <a:headEnd type="none" w="med" len="med"/>
-                      <a:tailEnd type="none" w="med" len="med"/>
-                    </a:lnT>
-                    <a:lnB w="12700" cap="flat" cmpd="sng" algn="ctr">
-                      <a:solidFill>
-                        <a:srgbClr val="CBD5E0"/>
-                      </a:solidFill>
-                      <a:prstDash val="solid"/>
-                      <a:round/>
-                      <a:headEnd type="none" w="med" len="med"/>
-                      <a:tailEnd type="none" w="med" len="med"/>
-                    </a:lnB>
-                    <a:solidFill>
-                      <a:srgbClr val="FFFFFF"/>
-                    </a:solidFill>
-                  </a:tcPr>
-                </a:tc>
-                <a:tc>
-                  <a:txBody>
-                    <a:bodyPr/>
-                    <a:lstStyle/>
-                    <a:p>
-                      <a:pPr algn="ctr" indent="0" marL="0">
-                        <a:buNone/>
-                      </a:pPr>
-                      <a:endParaRPr lang="en-US" sz="850" dirty="0">
-                        <a:latin typeface="맑은 고딕" charset="0"/>
-                        <a:ea typeface="맑은 고딕" charset="0"/>
-                        <a:cs typeface="맑은 고딕" charset="0"/>
-                      </a:endParaRPr>
-                    </a:p>
-                  </a:txBody>
-                  <a:tcPr marL="91440" marR="91440" marT="45720" marB="45720" anchor="ctr">
-                    <a:lnL w="12700" cap="flat" cmpd="sng" algn="ctr">
-                      <a:solidFill>
-                        <a:srgbClr val="CBD5E0"/>
-                      </a:solidFill>
-                      <a:prstDash val="solid"/>
-                      <a:round/>
-                      <a:headEnd type="none" w="med" len="med"/>
-                      <a:tailEnd type="none" w="med" len="med"/>
-                    </a:lnL>
-                    <a:lnR w="12700" cap="flat" cmpd="sng" algn="ctr">
-                      <a:solidFill>
-                        <a:srgbClr val="CBD5E0"/>
-                      </a:solidFill>
-                      <a:prstDash val="solid"/>
-                      <a:round/>
-                      <a:headEnd type="none" w="med" len="med"/>
-                      <a:tailEnd type="none" w="med" len="med"/>
-                    </a:lnR>
-                    <a:lnT w="12700" cap="flat" cmpd="sng" algn="ctr">
-                      <a:solidFill>
-                        <a:srgbClr val="CBD5E0"/>
-                      </a:solidFill>
-                      <a:prstDash val="solid"/>
-                      <a:round/>
-                      <a:headEnd type="none" w="med" len="med"/>
-                      <a:tailEnd type="none" w="med" len="med"/>
-                    </a:lnT>
-                    <a:lnB w="12700" cap="flat" cmpd="sng" algn="ctr">
-                      <a:solidFill>
-                        <a:srgbClr val="CBD5E0"/>
-                      </a:solidFill>
-                      <a:prstDash val="solid"/>
-                      <a:round/>
-                      <a:headEnd type="none" w="med" len="med"/>
-                      <a:tailEnd type="none" w="med" len="med"/>
-                    </a:lnB>
-                    <a:solidFill>
-                      <a:srgbClr val="FFFFFF"/>
-                    </a:solidFill>
-                  </a:tcPr>
-                </a:tc>
-                <a:tc>
-                  <a:txBody>
-                    <a:bodyPr/>
-                    <a:lstStyle/>
-                    <a:p>
-                      <a:pPr algn="ctr" indent="0" marL="0">
-                        <a:buNone/>
-                      </a:pPr>
-                      <a:endParaRPr lang="en-US" sz="850" dirty="0">
-                        <a:latin typeface="맑은 고딕" charset="0"/>
-                        <a:ea typeface="맑은 고딕" charset="0"/>
-                        <a:cs typeface="맑은 고딕" charset="0"/>
-                      </a:endParaRPr>
-                    </a:p>
-                  </a:txBody>
-                  <a:tcPr marL="91440" marR="91440" marT="45720" marB="45720" anchor="ctr">
-                    <a:lnL w="12700" cap="flat" cmpd="sng" algn="ctr">
-                      <a:solidFill>
-                        <a:srgbClr val="CBD5E0"/>
-                      </a:solidFill>
-                      <a:prstDash val="solid"/>
-                      <a:round/>
-                      <a:headEnd type="none" w="med" len="med"/>
-                      <a:tailEnd type="none" w="med" len="med"/>
-                    </a:lnL>
-                    <a:lnR w="12700" cap="flat" cmpd="sng" algn="ctr">
-                      <a:solidFill>
-                        <a:srgbClr val="CBD5E0"/>
-                      </a:solidFill>
-                      <a:prstDash val="solid"/>
-                      <a:round/>
-                      <a:headEnd type="none" w="med" len="med"/>
-                      <a:tailEnd type="none" w="med" len="med"/>
-                    </a:lnR>
-                    <a:lnT w="12700" cap="flat" cmpd="sng" algn="ctr">
-                      <a:solidFill>
-                        <a:srgbClr val="CBD5E0"/>
-                      </a:solidFill>
-                      <a:prstDash val="solid"/>
-                      <a:round/>
-                      <a:headEnd type="none" w="med" len="med"/>
-                      <a:tailEnd type="none" w="med" len="med"/>
-                    </a:lnT>
-                    <a:lnB w="12700" cap="flat" cmpd="sng" algn="ctr">
-                      <a:solidFill>
-                        <a:srgbClr val="CBD5E0"/>
-                      </a:solidFill>
-                      <a:prstDash val="solid"/>
-                      <a:round/>
-                      <a:headEnd type="none" w="med" len="med"/>
-                      <a:tailEnd type="none" w="med" len="med"/>
-                    </a:lnB>
-                    <a:solidFill>
-                      <a:srgbClr val="FFFFFF"/>
-                    </a:solidFill>
-                  </a:tcPr>
-                </a:tc>
               </a:tr>
             </a:tbl>
           </a:graphicData>
@@ -15535,7 +14939,7 @@
       </p:graphicFrame>
       <p:sp>
         <p:nvSpPr>
-          <p:cNvPr id="43" name="Text 40"/>
+          <p:cNvPr id="34" name="Text 31"/>
           <p:cNvSpPr/>
           <p:nvPr/>
         </p:nvSpPr>
@@ -15574,7 +14978,7 @@
       </p:sp>
       <p:sp>
         <p:nvSpPr>
-          <p:cNvPr id="44" name="Text 41"/>
+          <p:cNvPr id="35" name="Text 32"/>
           <p:cNvSpPr/>
           <p:nvPr/>
         </p:nvSpPr>
@@ -15789,231 +15193,11 @@
         <p:spPr>
           <a:xfrm>
             <a:off x="502920" y="1371600"/>
-            <a:ext cx="11057839" cy="1188720"/>
+            <a:ext cx="11057839" cy="4389120"/>
           </a:xfrm>
           <a:prstGeom prst="roundRect">
             <a:avLst>
-              <a:gd name="adj" fmla="val 6154"/>
-            </a:avLst>
-          </a:prstGeom>
-          <a:solidFill>
-            <a:srgbClr val="F7FAFC"/>
-          </a:solidFill>
-          <a:ln w="9525">
-            <a:solidFill>
-              <a:srgbClr val="CBD5E0"/>
-            </a:solidFill>
-            <a:prstDash val="solid"/>
-          </a:ln>
-        </p:spPr>
-      </p:sp>
-      <p:sp>
-        <p:nvSpPr>
-          <p:cNvPr id="7" name="Text 5"/>
-          <p:cNvSpPr/>
-          <p:nvPr/>
-        </p:nvSpPr>
-        <p:spPr>
-          <a:xfrm>
-            <a:off x="868680" y="1508760"/>
-            <a:ext cx="3200400" cy="822960"/>
-          </a:xfrm>
-          <a:prstGeom prst="rect">
-            <a:avLst/>
-          </a:prstGeom>
-          <a:noFill/>
-          <a:ln/>
-        </p:spPr>
-        <p:txBody>
-          <a:bodyPr wrap="square" rtlCol="0" anchor="ctr"/>
-          <a:lstStyle/>
-          <a:p>
-            <a:pPr indent="0" marL="0">
-              <a:buNone/>
-            </a:pPr>
-            <a:r>
-              <a:rPr lang="en-US" sz="1600" b="1" dirty="0">
-                <a:solidFill>
-                  <a:srgbClr val="132A3A"/>
-                </a:solidFill>
-                <a:latin typeface="맑은 고딕" pitchFamily="34" charset="0"/>
-                <a:ea typeface="맑은 고딕" pitchFamily="34" charset="-122"/>
-                <a:cs typeface="맑은 고딕" pitchFamily="34" charset="-120"/>
-              </a:rPr>
-              <a:t>표면 임대수익률  =</a:t>
-            </a:r>
-            <a:endParaRPr lang="en-US" sz="1600" dirty="0"/>
-          </a:p>
-        </p:txBody>
-      </p:sp>
-      <p:sp>
-        <p:nvSpPr>
-          <p:cNvPr id="8" name="Text 6"/>
-          <p:cNvSpPr/>
-          <p:nvPr/>
-        </p:nvSpPr>
-        <p:spPr>
-          <a:xfrm>
-            <a:off x="4343400" y="1508760"/>
-            <a:ext cx="4572000" cy="365760"/>
-          </a:xfrm>
-          <a:prstGeom prst="rect">
-            <a:avLst/>
-          </a:prstGeom>
-          <a:noFill/>
-          <a:ln/>
-        </p:spPr>
-        <p:txBody>
-          <a:bodyPr wrap="square" rtlCol="0" anchor="b"/>
-          <a:lstStyle/>
-          <a:p>
-            <a:pPr algn="ctr" indent="0" marL="0">
-              <a:buNone/>
-            </a:pPr>
-            <a:r>
-              <a:rPr lang="en-US" sz="1300" b="1" dirty="0">
-                <a:solidFill>
-                  <a:srgbClr val="132A3A"/>
-                </a:solidFill>
-                <a:latin typeface="맑은 고딕" pitchFamily="34" charset="0"/>
-                <a:ea typeface="맑은 고딕" pitchFamily="34" charset="-122"/>
-                <a:cs typeface="맑은 고딕" pitchFamily="34" charset="-120"/>
-              </a:rPr>
-              <a:t>연간 임대료 합계 (관리비 제외)</a:t>
-            </a:r>
-            <a:endParaRPr lang="en-US" sz="1300" dirty="0"/>
-          </a:p>
-        </p:txBody>
-      </p:sp>
-      <p:sp>
-        <p:nvSpPr>
-          <p:cNvPr id="9" name="Shape 7"/>
-          <p:cNvSpPr/>
-          <p:nvPr/>
-        </p:nvSpPr>
-        <p:spPr>
-          <a:xfrm>
-            <a:off x="4526280" y="1920240"/>
-            <a:ext cx="4206240" cy="0"/>
-          </a:xfrm>
-          <a:prstGeom prst="line">
-            <a:avLst/>
-          </a:prstGeom>
-          <a:noFill/>
-          <a:ln w="25400">
-            <a:solidFill>
-              <a:srgbClr val="B8860B"/>
-            </a:solidFill>
-            <a:prstDash val="solid"/>
-          </a:ln>
-        </p:spPr>
-      </p:sp>
-      <p:sp>
-        <p:nvSpPr>
-          <p:cNvPr id="10" name="Text 8"/>
-          <p:cNvSpPr/>
-          <p:nvPr/>
-        </p:nvSpPr>
-        <p:spPr>
-          <a:xfrm>
-            <a:off x="4343400" y="1965960"/>
-            <a:ext cx="4572000" cy="365760"/>
-          </a:xfrm>
-          <a:prstGeom prst="rect">
-            <a:avLst/>
-          </a:prstGeom>
-          <a:noFill/>
-          <a:ln/>
-        </p:spPr>
-        <p:txBody>
-          <a:bodyPr wrap="square" rtlCol="0" anchor="t"/>
-          <a:lstStyle/>
-          <a:p>
-            <a:pPr algn="ctr" indent="0" marL="0">
-              <a:buNone/>
-            </a:pPr>
-            <a:r>
-              <a:rPr lang="en-US" sz="1300" b="1" dirty="0">
-                <a:solidFill>
-                  <a:srgbClr val="132A3A"/>
-                </a:solidFill>
-                <a:latin typeface="맑은 고딕" pitchFamily="34" charset="0"/>
-                <a:ea typeface="맑은 고딕" pitchFamily="34" charset="-122"/>
-                <a:cs typeface="맑은 고딕" pitchFamily="34" charset="-120"/>
-              </a:rPr>
-              <a:t>매매가  −  승계 보증금 합계</a:t>
-            </a:r>
-            <a:endParaRPr lang="en-US" sz="1300" dirty="0"/>
-          </a:p>
-        </p:txBody>
-      </p:sp>
-      <p:sp>
-        <p:nvSpPr>
-          <p:cNvPr id="11" name="Text 9"/>
-          <p:cNvSpPr/>
-          <p:nvPr/>
-        </p:nvSpPr>
-        <p:spPr>
-          <a:xfrm>
-            <a:off x="8726119" y="1508760"/>
-            <a:ext cx="2697480" cy="822960"/>
-          </a:xfrm>
-          <a:prstGeom prst="rect">
-            <a:avLst/>
-          </a:prstGeom>
-          <a:noFill/>
-          <a:ln/>
-        </p:spPr>
-        <p:txBody>
-          <a:bodyPr wrap="square" rtlCol="0" anchor="ctr"/>
-          <a:lstStyle/>
-          <a:p>
-            <a:pPr algn="r" indent="0" marL="0">
-              <a:buNone/>
-            </a:pPr>
-            <a:r>
-              <a:rPr lang="en-US" sz="1100" b="1" dirty="0">
-                <a:solidFill>
-                  <a:srgbClr val="B8860B"/>
-                </a:solidFill>
-                <a:latin typeface="맑은 고딕" pitchFamily="34" charset="0"/>
-                <a:ea typeface="맑은 고딕" pitchFamily="34" charset="-122"/>
-                <a:cs typeface="맑은 고딕" pitchFamily="34" charset="-120"/>
-              </a:rPr>
-              <a:t>2.3억원</a:t>
-            </a:r>
-            <a:pPr algn="r" indent="0" marL="0">
-              <a:buNone/>
-            </a:pPr>
-            <a:r>
-              <a:rPr lang="en-US" sz="1100" dirty="0">
-                <a:solidFill>
-                  <a:srgbClr val="5B6B73"/>
-                </a:solidFill>
-                <a:latin typeface="맑은 고딕" pitchFamily="34" charset="0"/>
-                <a:ea typeface="맑은 고딕" pitchFamily="34" charset="-122"/>
-                <a:cs typeface="맑은 고딕" pitchFamily="34" charset="-120"/>
-              </a:rPr>
-              <a:t> ÷ (115.0억원 − 2.9억원)</a:t>
-            </a:r>
-            <a:endParaRPr lang="en-US" sz="1100" dirty="0"/>
-          </a:p>
-        </p:txBody>
-      </p:sp>
-      <p:sp>
-        <p:nvSpPr>
-          <p:cNvPr id="12" name="Shape 10"/>
-          <p:cNvSpPr/>
-          <p:nvPr/>
-        </p:nvSpPr>
-        <p:spPr>
-          <a:xfrm>
-            <a:off x="502920" y="2834640"/>
-            <a:ext cx="11057839" cy="3063240"/>
-          </a:xfrm>
-          <a:prstGeom prst="roundRect">
-            <a:avLst>
-              <a:gd name="adj" fmla="val 2388"/>
+              <a:gd name="adj" fmla="val 1667"/>
             </a:avLst>
           </a:prstGeom>
           <a:solidFill>
@@ -16029,36 +15213,36 @@
       </p:sp>
       <p:sp>
         <p:nvSpPr>
-          <p:cNvPr id="13" name="Shape 11"/>
-          <p:cNvSpPr/>
-          <p:nvPr/>
-        </p:nvSpPr>
-        <p:spPr>
-          <a:xfrm>
-            <a:off x="685800" y="3017520"/>
-            <a:ext cx="1280160" cy="329184"/>
+          <p:cNvPr id="7" name="Shape 5"/>
+          <p:cNvSpPr/>
+          <p:nvPr/>
+        </p:nvSpPr>
+        <p:spPr>
+          <a:xfrm>
+            <a:off x="731520" y="1600200"/>
+            <a:ext cx="10600639" cy="1005840"/>
           </a:xfrm>
           <a:prstGeom prst="roundRect">
             <a:avLst>
-              <a:gd name="adj" fmla="val 11111"/>
+              <a:gd name="adj" fmla="val 7273"/>
             </a:avLst>
           </a:prstGeom>
           <a:solidFill>
-            <a:srgbClr val="F3F6F7"/>
+            <a:srgbClr val="132A3A"/>
           </a:solidFill>
           <a:ln/>
         </p:spPr>
       </p:sp>
       <p:sp>
         <p:nvSpPr>
-          <p:cNvPr id="14" name="Text 12"/>
-          <p:cNvSpPr/>
-          <p:nvPr/>
-        </p:nvSpPr>
-        <p:spPr>
-          <a:xfrm>
-            <a:off x="685800" y="3017520"/>
-            <a:ext cx="1280160" cy="329184"/>
+          <p:cNvPr id="8" name="Text 6"/>
+          <p:cNvSpPr/>
+          <p:nvPr/>
+        </p:nvSpPr>
+        <p:spPr>
+          <a:xfrm>
+            <a:off x="960120" y="1600200"/>
+            <a:ext cx="2286000" cy="1005840"/>
           </a:xfrm>
           <a:prstGeom prst="rect">
             <a:avLst/>
@@ -16070,34 +15254,73 @@
           <a:bodyPr wrap="square" rtlCol="0" anchor="ctr"/>
           <a:lstStyle/>
           <a:p>
-            <a:pPr algn="ctr" indent="0" marL="0">
-              <a:buNone/>
-            </a:pPr>
-            <a:r>
-              <a:rPr lang="en-US" sz="1000" b="1" dirty="0">
-                <a:solidFill>
-                  <a:srgbClr val="132A3A"/>
+            <a:pPr indent="0" marL="0">
+              <a:buNone/>
+            </a:pPr>
+            <a:r>
+              <a:rPr lang="en-US" sz="1600" b="1" dirty="0">
+                <a:solidFill>
+                  <a:srgbClr val="FFFFFF"/>
                 </a:solidFill>
                 <a:latin typeface="맑은 고딕" pitchFamily="34" charset="0"/>
                 <a:ea typeface="맑은 고딕" pitchFamily="34" charset="-122"/>
                 <a:cs typeface="맑은 고딕" pitchFamily="34" charset="-120"/>
               </a:rPr>
-              <a:t>As-Is (현재)</a:t>
-            </a:r>
-            <a:endParaRPr lang="en-US" sz="1000" dirty="0"/>
-          </a:p>
-        </p:txBody>
-      </p:sp>
-      <p:sp>
-        <p:nvSpPr>
-          <p:cNvPr id="15" name="Text 13"/>
-          <p:cNvSpPr/>
-          <p:nvPr/>
-        </p:nvSpPr>
-        <p:spPr>
-          <a:xfrm>
-            <a:off x="777240" y="3520440"/>
-            <a:ext cx="2743200" cy="402336"/>
+              <a:t>수익률</a:t>
+            </a:r>
+            <a:endParaRPr lang="en-US" sz="1600" dirty="0"/>
+          </a:p>
+        </p:txBody>
+      </p:sp>
+      <p:sp>
+        <p:nvSpPr>
+          <p:cNvPr id="9" name="Text 7"/>
+          <p:cNvSpPr/>
+          <p:nvPr/>
+        </p:nvSpPr>
+        <p:spPr>
+          <a:xfrm>
+            <a:off x="8360359" y="1600200"/>
+            <a:ext cx="2743200" cy="1005840"/>
+          </a:xfrm>
+          <a:prstGeom prst="rect">
+            <a:avLst/>
+          </a:prstGeom>
+          <a:noFill/>
+          <a:ln/>
+        </p:spPr>
+        <p:txBody>
+          <a:bodyPr wrap="square" rtlCol="0" anchor="ctr"/>
+          <a:lstStyle/>
+          <a:p>
+            <a:pPr algn="r" indent="0" marL="0">
+              <a:buNone/>
+            </a:pPr>
+            <a:r>
+              <a:rPr lang="en-US" sz="2800" b="1" dirty="0">
+                <a:solidFill>
+                  <a:srgbClr val="B8860B"/>
+                </a:solidFill>
+                <a:latin typeface="Arial" pitchFamily="34" charset="0"/>
+                <a:ea typeface="Arial" pitchFamily="34" charset="-122"/>
+                <a:cs typeface="Arial" pitchFamily="34" charset="-120"/>
+              </a:rPr>
+              <a:t>2.08%</a:t>
+            </a:r>
+            <a:endParaRPr lang="en-US" sz="2800" dirty="0"/>
+          </a:p>
+        </p:txBody>
+      </p:sp>
+      <p:sp>
+        <p:nvSpPr>
+          <p:cNvPr id="10" name="Text 8"/>
+          <p:cNvSpPr/>
+          <p:nvPr/>
+        </p:nvSpPr>
+        <p:spPr>
+          <a:xfrm>
+            <a:off x="822960" y="2834640"/>
+            <a:ext cx="2743200" cy="347472"/>
           </a:xfrm>
           <a:prstGeom prst="rect">
             <a:avLst/>
@@ -16121,7 +15344,7 @@
                 <a:ea typeface="맑은 고딕" pitchFamily="34" charset="-122"/>
                 <a:cs typeface="맑은 고딕" pitchFamily="34" charset="-120"/>
               </a:rPr>
-              <a:t>연간 임대료</a:t>
+              <a:t>연간 임대수입</a:t>
             </a:r>
             <a:endParaRPr lang="en-US" sz="1100" dirty="0"/>
           </a:p>
@@ -16129,14 +15352,14 @@
       </p:sp>
       <p:sp>
         <p:nvSpPr>
-          <p:cNvPr id="16" name="Text 14"/>
-          <p:cNvSpPr/>
-          <p:nvPr/>
-        </p:nvSpPr>
-        <p:spPr>
-          <a:xfrm>
-            <a:off x="9457639" y="3520440"/>
-            <a:ext cx="1828800" cy="402336"/>
+          <p:cNvPr id="11" name="Text 9"/>
+          <p:cNvSpPr/>
+          <p:nvPr/>
+        </p:nvSpPr>
+        <p:spPr>
+          <a:xfrm>
+            <a:off x="9000439" y="2834640"/>
+            <a:ext cx="2194560" cy="347472"/>
           </a:xfrm>
           <a:prstGeom prst="rect">
             <a:avLst/>
@@ -16152,7 +15375,7 @@
               <a:buNone/>
             </a:pPr>
             <a:r>
-              <a:rPr lang="en-US" sz="1200" b="1" dirty="0">
+              <a:rPr lang="en-US" sz="1200" dirty="0">
                 <a:solidFill>
                   <a:srgbClr val="132A3A"/>
                 </a:solidFill>
@@ -16168,14 +15391,37 @@
       </p:sp>
       <p:sp>
         <p:nvSpPr>
-          <p:cNvPr id="17" name="Text 15"/>
-          <p:cNvSpPr/>
-          <p:nvPr/>
-        </p:nvSpPr>
-        <p:spPr>
-          <a:xfrm>
-            <a:off x="777240" y="3922776"/>
-            <a:ext cx="2743200" cy="402336"/>
+          <p:cNvPr id="12" name="Shape 10"/>
+          <p:cNvSpPr/>
+          <p:nvPr/>
+        </p:nvSpPr>
+        <p:spPr>
+          <a:xfrm>
+            <a:off x="731520" y="3182112"/>
+            <a:ext cx="10600639" cy="0"/>
+          </a:xfrm>
+          <a:prstGeom prst="line">
+            <a:avLst/>
+          </a:prstGeom>
+          <a:noFill/>
+          <a:ln w="6350">
+            <a:solidFill>
+              <a:srgbClr val="E8E8E8"/>
+            </a:solidFill>
+            <a:prstDash val="solid"/>
+          </a:ln>
+        </p:spPr>
+      </p:sp>
+      <p:sp>
+        <p:nvSpPr>
+          <p:cNvPr id="13" name="Text 11"/>
+          <p:cNvSpPr/>
+          <p:nvPr/>
+        </p:nvSpPr>
+        <p:spPr>
+          <a:xfrm>
+            <a:off x="822960" y="3182112"/>
+            <a:ext cx="2743200" cy="347472"/>
           </a:xfrm>
           <a:prstGeom prst="rect">
             <a:avLst/>
@@ -16207,14 +15453,14 @@
       </p:sp>
       <p:sp>
         <p:nvSpPr>
-          <p:cNvPr id="18" name="Text 16"/>
-          <p:cNvSpPr/>
-          <p:nvPr/>
-        </p:nvSpPr>
-        <p:spPr>
-          <a:xfrm>
-            <a:off x="9457639" y="3922776"/>
-            <a:ext cx="1828800" cy="402336"/>
+          <p:cNvPr id="14" name="Text 12"/>
+          <p:cNvSpPr/>
+          <p:nvPr/>
+        </p:nvSpPr>
+        <p:spPr>
+          <a:xfrm>
+            <a:off x="9000439" y="3182112"/>
+            <a:ext cx="2194560" cy="347472"/>
           </a:xfrm>
           <a:prstGeom prst="rect">
             <a:avLst/>
@@ -16230,7 +15476,7 @@
               <a:buNone/>
             </a:pPr>
             <a:r>
-              <a:rPr lang="en-US" sz="1200" b="1" dirty="0">
+              <a:rPr lang="en-US" sz="1200" dirty="0">
                 <a:solidFill>
                   <a:srgbClr val="132A3A"/>
                 </a:solidFill>
@@ -16246,14 +15492,37 @@
       </p:sp>
       <p:sp>
         <p:nvSpPr>
-          <p:cNvPr id="19" name="Text 17"/>
-          <p:cNvSpPr/>
-          <p:nvPr/>
-        </p:nvSpPr>
-        <p:spPr>
-          <a:xfrm>
-            <a:off x="777240" y="4325112"/>
-            <a:ext cx="2743200" cy="402336"/>
+          <p:cNvPr id="15" name="Shape 13"/>
+          <p:cNvSpPr/>
+          <p:nvPr/>
+        </p:nvSpPr>
+        <p:spPr>
+          <a:xfrm>
+            <a:off x="731520" y="3529584"/>
+            <a:ext cx="10600639" cy="0"/>
+          </a:xfrm>
+          <a:prstGeom prst="line">
+            <a:avLst/>
+          </a:prstGeom>
+          <a:noFill/>
+          <a:ln w="6350">
+            <a:solidFill>
+              <a:srgbClr val="E8E8E8"/>
+            </a:solidFill>
+            <a:prstDash val="solid"/>
+          </a:ln>
+        </p:spPr>
+      </p:sp>
+      <p:sp>
+        <p:nvSpPr>
+          <p:cNvPr id="16" name="Text 14"/>
+          <p:cNvSpPr/>
+          <p:nvPr/>
+        </p:nvSpPr>
+        <p:spPr>
+          <a:xfrm>
+            <a:off x="822960" y="3529584"/>
+            <a:ext cx="2743200" cy="347472"/>
           </a:xfrm>
           <a:prstGeom prst="rect">
             <a:avLst/>
@@ -16285,14 +15554,14 @@
       </p:sp>
       <p:sp>
         <p:nvSpPr>
-          <p:cNvPr id="20" name="Text 18"/>
-          <p:cNvSpPr/>
-          <p:nvPr/>
-        </p:nvSpPr>
-        <p:spPr>
-          <a:xfrm>
-            <a:off x="9457639" y="4325112"/>
-            <a:ext cx="1828800" cy="402336"/>
+          <p:cNvPr id="17" name="Text 15"/>
+          <p:cNvSpPr/>
+          <p:nvPr/>
+        </p:nvSpPr>
+        <p:spPr>
+          <a:xfrm>
+            <a:off x="9000439" y="3529584"/>
+            <a:ext cx="2194560" cy="347472"/>
           </a:xfrm>
           <a:prstGeom prst="rect">
             <a:avLst/>
@@ -16308,7 +15577,7 @@
               <a:buNone/>
             </a:pPr>
             <a:r>
-              <a:rPr lang="en-US" sz="1200" b="1" dirty="0">
+              <a:rPr lang="en-US" sz="1200" dirty="0">
                 <a:solidFill>
                   <a:srgbClr val="132A3A"/>
                 </a:solidFill>
@@ -16324,36 +15593,37 @@
       </p:sp>
       <p:sp>
         <p:nvSpPr>
-          <p:cNvPr id="21" name="Shape 19"/>
-          <p:cNvSpPr/>
-          <p:nvPr/>
-        </p:nvSpPr>
-        <p:spPr>
-          <a:xfrm>
-            <a:off x="685800" y="4837176"/>
-            <a:ext cx="10692079" cy="594360"/>
-          </a:xfrm>
-          <a:prstGeom prst="roundRect">
-            <a:avLst>
-              <a:gd name="adj" fmla="val 9231"/>
-            </a:avLst>
-          </a:prstGeom>
-          <a:solidFill>
-            <a:srgbClr val="132A3A"/>
-          </a:solidFill>
-          <a:ln/>
-        </p:spPr>
-      </p:sp>
-      <p:sp>
-        <p:nvSpPr>
-          <p:cNvPr id="22" name="Text 20"/>
-          <p:cNvSpPr/>
-          <p:nvPr/>
-        </p:nvSpPr>
-        <p:spPr>
-          <a:xfrm>
-            <a:off x="868680" y="4837176"/>
-            <a:ext cx="2286000" cy="594360"/>
+          <p:cNvPr id="18" name="Shape 16"/>
+          <p:cNvSpPr/>
+          <p:nvPr/>
+        </p:nvSpPr>
+        <p:spPr>
+          <a:xfrm>
+            <a:off x="731520" y="3877056"/>
+            <a:ext cx="10600639" cy="0"/>
+          </a:xfrm>
+          <a:prstGeom prst="line">
+            <a:avLst/>
+          </a:prstGeom>
+          <a:noFill/>
+          <a:ln w="6350">
+            <a:solidFill>
+              <a:srgbClr val="E8E8E8"/>
+            </a:solidFill>
+            <a:prstDash val="solid"/>
+          </a:ln>
+        </p:spPr>
+      </p:sp>
+      <p:sp>
+        <p:nvSpPr>
+          <p:cNvPr id="19" name="Text 17"/>
+          <p:cNvSpPr/>
+          <p:nvPr/>
+        </p:nvSpPr>
+        <p:spPr>
+          <a:xfrm>
+            <a:off x="822960" y="3877056"/>
+            <a:ext cx="2743200" cy="347472"/>
           </a:xfrm>
           <a:prstGeom prst="rect">
             <a:avLst/>
@@ -16369,30 +15639,30 @@
               <a:buNone/>
             </a:pPr>
             <a:r>
-              <a:rPr lang="en-US" sz="1200" b="1" dirty="0">
-                <a:solidFill>
-                  <a:srgbClr val="FFFFFF"/>
+              <a:rPr lang="en-US" sz="1100" dirty="0">
+                <a:solidFill>
+                  <a:srgbClr val="5B6B73"/>
                 </a:solidFill>
                 <a:latin typeface="맑은 고딕" pitchFamily="34" charset="0"/>
                 <a:ea typeface="맑은 고딕" pitchFamily="34" charset="-122"/>
                 <a:cs typeface="맑은 고딕" pitchFamily="34" charset="-120"/>
               </a:rPr>
-              <a:t>Cap Rate</a:t>
-            </a:r>
-            <a:endParaRPr lang="en-US" sz="1200" dirty="0"/>
-          </a:p>
-        </p:txBody>
-      </p:sp>
-      <p:sp>
-        <p:nvSpPr>
-          <p:cNvPr id="23" name="Text 21"/>
-          <p:cNvSpPr/>
-          <p:nvPr/>
-        </p:nvSpPr>
-        <p:spPr>
-          <a:xfrm>
-            <a:off x="9183319" y="4837176"/>
-            <a:ext cx="2011680" cy="594360"/>
+              <a:t>순투자금 (매매가 − 보증금)</a:t>
+            </a:r>
+            <a:endParaRPr lang="en-US" sz="1100" dirty="0"/>
+          </a:p>
+        </p:txBody>
+      </p:sp>
+      <p:sp>
+        <p:nvSpPr>
+          <p:cNvPr id="20" name="Text 18"/>
+          <p:cNvSpPr/>
+          <p:nvPr/>
+        </p:nvSpPr>
+        <p:spPr>
+          <a:xfrm>
+            <a:off x="9000439" y="3877056"/>
+            <a:ext cx="2194560" cy="347472"/>
           </a:xfrm>
           <a:prstGeom prst="rect">
             <a:avLst/>
@@ -16408,19 +15678,84 @@
               <a:buNone/>
             </a:pPr>
             <a:r>
-              <a:rPr lang="en-US" sz="2200" b="1" dirty="0">
-                <a:solidFill>
-                  <a:srgbClr val="FFFFFF"/>
+              <a:rPr lang="en-US" sz="1200" b="1" dirty="0">
+                <a:solidFill>
+                  <a:srgbClr val="B8860B"/>
                 </a:solidFill>
                 <a:latin typeface="Arial" pitchFamily="34" charset="0"/>
                 <a:ea typeface="Arial" pitchFamily="34" charset="-122"/>
                 <a:cs typeface="Arial" pitchFamily="34" charset="-120"/>
               </a:rPr>
-              <a:t>2.08%</a:t>
-            </a:r>
-            <a:endParaRPr lang="en-US" sz="2200" dirty="0"/>
-          </a:p>
-        </p:txBody>
+              <a:t>112.1억원</a:t>
+            </a:r>
+            <a:endParaRPr lang="en-US" sz="1200" dirty="0"/>
+          </a:p>
+        </p:txBody>
+      </p:sp>
+      <p:sp>
+        <p:nvSpPr>
+          <p:cNvPr id="21" name="Shape 19"/>
+          <p:cNvSpPr/>
+          <p:nvPr/>
+        </p:nvSpPr>
+        <p:spPr>
+          <a:xfrm>
+            <a:off x="731520" y="4224528"/>
+            <a:ext cx="10600639" cy="0"/>
+          </a:xfrm>
+          <a:prstGeom prst="line">
+            <a:avLst/>
+          </a:prstGeom>
+          <a:noFill/>
+          <a:ln w="6350">
+            <a:solidFill>
+              <a:srgbClr val="E8E8E8"/>
+            </a:solidFill>
+            <a:prstDash val="solid"/>
+          </a:ln>
+        </p:spPr>
+      </p:sp>
+      <p:sp>
+        <p:nvSpPr>
+          <p:cNvPr id="22" name="Shape 20"/>
+          <p:cNvSpPr/>
+          <p:nvPr/>
+        </p:nvSpPr>
+        <p:spPr>
+          <a:xfrm>
+            <a:off x="502920" y="5897880"/>
+            <a:ext cx="11057839" cy="438912"/>
+          </a:xfrm>
+          <a:prstGeom prst="roundRect">
+            <a:avLst>
+              <a:gd name="adj" fmla="val 12500"/>
+            </a:avLst>
+          </a:prstGeom>
+          <a:solidFill>
+            <a:srgbClr val="E8F4F8"/>
+          </a:solidFill>
+          <a:ln/>
+        </p:spPr>
+      </p:sp>
+      <p:sp>
+        <p:nvSpPr>
+          <p:cNvPr id="23" name="Shape 21"/>
+          <p:cNvSpPr/>
+          <p:nvPr/>
+        </p:nvSpPr>
+        <p:spPr>
+          <a:xfrm>
+            <a:off x="502920" y="5952744"/>
+            <a:ext cx="36576" cy="329184"/>
+          </a:xfrm>
+          <a:prstGeom prst="rect">
+            <a:avLst/>
+          </a:prstGeom>
+          <a:solidFill>
+            <a:srgbClr val="2E6E82"/>
+          </a:solidFill>
+          <a:ln/>
+        </p:spPr>
       </p:sp>
       <p:sp>
         <p:nvSpPr>
@@ -16430,8 +15765,8 @@
         </p:nvSpPr>
         <p:spPr>
           <a:xfrm>
-            <a:off x="502920" y="6382512"/>
-            <a:ext cx="7315200" cy="219456"/>
+            <a:off x="649224" y="5989320"/>
+            <a:ext cx="10801807" cy="201168"/>
           </a:xfrm>
           <a:prstGeom prst="rect">
             <a:avLst/>
@@ -16447,14 +15782,96 @@
               <a:buNone/>
             </a:pPr>
             <a:r>
-              <a:rPr lang="en-US" sz="800" dirty="0">
-                <a:solidFill>
-                  <a:srgbClr val="5B6B73"/>
+              <a:rPr lang="en-US" sz="1050" b="1" dirty="0">
+                <a:solidFill>
+                  <a:srgbClr val="2E6E82"/>
                 </a:solidFill>
                 <a:latin typeface="맑은 고딕" pitchFamily="34" charset="0"/>
                 <a:ea typeface="맑은 고딕" pitchFamily="34" charset="-122"/>
                 <a:cs typeface="맑은 고딕" pitchFamily="34" charset="-120"/>
               </a:rPr>
+              <a:t>투자 판단 참고</a:t>
+            </a:r>
+            <a:endParaRPr lang="en-US" sz="1050" dirty="0"/>
+          </a:p>
+        </p:txBody>
+      </p:sp>
+      <p:sp>
+        <p:nvSpPr>
+          <p:cNvPr id="25" name="Text 23"/>
+          <p:cNvSpPr/>
+          <p:nvPr/>
+        </p:nvSpPr>
+        <p:spPr>
+          <a:xfrm>
+            <a:off x="649224" y="6190488"/>
+            <a:ext cx="10801807" cy="109728"/>
+          </a:xfrm>
+          <a:prstGeom prst="rect">
+            <a:avLst/>
+          </a:prstGeom>
+          <a:noFill/>
+          <a:ln/>
+        </p:spPr>
+        <p:txBody>
+          <a:bodyPr wrap="square" lIns="0" tIns="0" rIns="0" bIns="0" rtlCol="0" anchor="t"/>
+          <a:lstStyle/>
+          <a:p>
+            <a:pPr marL="342900" indent="-342900">
+              <a:lnSpc>
+                <a:spcPct val="108000"/>
+              </a:lnSpc>
+              <a:buSzPct val="100000"/>
+              <a:buChar char="•"/>
+            </a:pPr>
+            <a:r>
+              <a:rPr lang="en-US" sz="980" dirty="0">
+                <a:solidFill>
+                  <a:srgbClr val="2B2B2B"/>
+                </a:solidFill>
+                <a:latin typeface="맑은 고딕" pitchFamily="34" charset="0"/>
+                <a:ea typeface="맑은 고딕" pitchFamily="34" charset="-122"/>
+                <a:cs typeface="맑은 고딕" pitchFamily="34" charset="-120"/>
+              </a:rPr>
+              <a:t>수익률 2.1%는 시장 평균 하회 — 토지가치 상승 또는 리모델링 후 임대료 증대 가능성 검토 필요</a:t>
+            </a:r>
+            <a:endParaRPr lang="en-US" sz="980" dirty="0"/>
+          </a:p>
+        </p:txBody>
+      </p:sp>
+      <p:sp>
+        <p:nvSpPr>
+          <p:cNvPr id="26" name="Text 24"/>
+          <p:cNvSpPr/>
+          <p:nvPr/>
+        </p:nvSpPr>
+        <p:spPr>
+          <a:xfrm>
+            <a:off x="502920" y="6382512"/>
+            <a:ext cx="7315200" cy="219456"/>
+          </a:xfrm>
+          <a:prstGeom prst="rect">
+            <a:avLst/>
+          </a:prstGeom>
+          <a:noFill/>
+          <a:ln/>
+        </p:spPr>
+        <p:txBody>
+          <a:bodyPr wrap="square" lIns="0" tIns="0" rIns="0" bIns="0" rtlCol="0" anchor="ctr"/>
+          <a:lstStyle/>
+          <a:p>
+            <a:pPr indent="0" marL="0">
+              <a:buNone/>
+            </a:pPr>
+            <a:r>
+              <a:rPr lang="en-US" sz="800" dirty="0">
+                <a:solidFill>
+                  <a:srgbClr val="5B6B73"/>
+                </a:solidFill>
+                <a:latin typeface="맑은 고딕" pitchFamily="34" charset="0"/>
+                <a:ea typeface="맑은 고딕" pitchFamily="34" charset="-122"/>
+                <a:cs typeface="맑은 고딕" pitchFamily="34" charset="-120"/>
+              </a:rPr>
               <a:t>CRE DEAL</a:t>
             </a:r>
             <a:endParaRPr lang="en-US" sz="800" dirty="0"/>
@@ -16463,7 +15880,7 @@
       </p:sp>
       <p:sp>
         <p:nvSpPr>
-          <p:cNvPr id="25" name="Text 23"/>
+          <p:cNvPr id="27" name="Text 25"/>
           <p:cNvSpPr/>
           <p:nvPr/>
         </p:nvSpPr>
